--- a/体育・保健体育の方向性_指導講評.pptx
+++ b/体育・保健体育の方向性_指導講評.pptx
@@ -3106,7 +3106,7 @@
         <p:spPr>
           <a:xfrm>
             <a:off x="0" y="0"/>
-            <a:ext cx="12192119" cy="1007999"/>
+            <a:ext cx="12192119" cy="936000"/>
           </a:xfrm>
           <a:prstGeom prst="rect">
             <a:avLst/>
@@ -3149,8 +3149,8 @@
         </p:nvSpPr>
         <p:spPr>
           <a:xfrm>
-            <a:off x="0" y="1007999"/>
-            <a:ext cx="12192119" cy="79200"/>
+            <a:off x="0" y="936000"/>
+            <a:ext cx="12192119" cy="72000"/>
           </a:xfrm>
           <a:prstGeom prst="rect">
             <a:avLst/>
@@ -3194,7 +3194,7 @@
         <p:spPr>
           <a:xfrm>
             <a:off x="288000" y="198000"/>
-            <a:ext cx="864000" cy="612000"/>
+            <a:ext cx="792000" cy="540000"/>
           </a:xfrm>
           <a:prstGeom prst="roundRect">
             <a:avLst>
@@ -3240,7 +3240,7 @@
         <p:spPr>
           <a:xfrm>
             <a:off x="288000" y="198000"/>
-            <a:ext cx="864000" cy="612000"/>
+            <a:ext cx="792000" cy="540000"/>
           </a:xfrm>
           <a:prstGeom prst="rect">
             <a:avLst/>
@@ -3248,18 +3248,18 @@
           <a:noFill/>
         </p:spPr>
         <p:txBody>
-          <a:bodyPr wrap="square" lIns="54000" rIns="54000" tIns="18000" bIns="18000" anchor="ctr">
+          <a:bodyPr wrap="square" lIns="43200" rIns="43200" tIns="18000" bIns="18000" anchor="ctr">
             <a:spAutoFit/>
           </a:bodyPr>
           <a:lstStyle/>
           <a:p>
             <a:pPr algn="ctr">
               <a:lnSpc>
-                <a:spcPct val="130000"/>
-              </a:lnSpc>
-            </a:pPr>
-            <a:r>
-              <a:rPr sz="3200" b="1">
+                <a:spcPct val="125000"/>
+              </a:lnSpc>
+            </a:pPr>
+            <a:r>
+              <a:rPr sz="2800" b="1">
                 <a:solidFill>
                   <a:srgbClr val="FFFFFF"/>
                 </a:solidFill>
@@ -3279,8 +3279,8 @@
         </p:nvSpPr>
         <p:spPr>
           <a:xfrm>
-            <a:off x="1296000" y="198000"/>
-            <a:ext cx="9360000" cy="612000"/>
+            <a:off x="1224000" y="198000"/>
+            <a:ext cx="9540000" cy="540000"/>
           </a:xfrm>
           <a:prstGeom prst="rect">
             <a:avLst/>
@@ -3288,25 +3288,25 @@
           <a:noFill/>
         </p:spPr>
         <p:txBody>
-          <a:bodyPr wrap="square" lIns="54000" rIns="54000" tIns="18000" bIns="18000" anchor="ctr">
+          <a:bodyPr wrap="square" lIns="43200" rIns="43200" tIns="18000" bIns="18000" anchor="ctr">
             <a:spAutoFit/>
           </a:bodyPr>
           <a:lstStyle/>
           <a:p>
             <a:pPr algn="l">
               <a:lnSpc>
-                <a:spcPct val="130000"/>
-              </a:lnSpc>
-            </a:pPr>
-            <a:r>
-              <a:rPr sz="3200" b="1">
+                <a:spcPct val="125000"/>
+              </a:lnSpc>
+            </a:pPr>
+            <a:r>
+              <a:rPr sz="2800" b="1">
                 <a:solidFill>
                   <a:srgbClr val="FFFFFF"/>
                 </a:solidFill>
                 <a:latin typeface="メイリオ"/>
                 <a:rFonts eastAsia="メイリオ" ascii="メイリオ" hAnsi="メイリオ"/>
               </a:rPr>
-              <a:t>次 期 改 訂 を 貫 く 3 つ の 方 向 性</a:t>
+              <a:t>次期改訂を貫く 3つの方向性</a:t>
             </a:r>
           </a:p>
         </p:txBody>
@@ -3319,8 +3319,8 @@
         </p:nvSpPr>
         <p:spPr>
           <a:xfrm>
-            <a:off x="10872000" y="198000"/>
-            <a:ext cx="1116000" cy="612000"/>
+            <a:off x="10800000" y="198000"/>
+            <a:ext cx="1080000" cy="540000"/>
           </a:xfrm>
           <a:prstGeom prst="rect">
             <a:avLst/>
@@ -3328,18 +3328,18 @@
           <a:noFill/>
         </p:spPr>
         <p:txBody>
-          <a:bodyPr wrap="square" lIns="54000" rIns="54000" tIns="18000" bIns="18000" anchor="ctr">
+          <a:bodyPr wrap="square" lIns="43200" rIns="43200" tIns="18000" bIns="18000" anchor="ctr">
             <a:spAutoFit/>
           </a:bodyPr>
           <a:lstStyle/>
           <a:p>
             <a:pPr algn="r">
               <a:lnSpc>
-                <a:spcPct val="130000"/>
-              </a:lnSpc>
-            </a:pPr>
-            <a:r>
-              <a:rPr sz="1800" b="0">
+                <a:spcPct val="125000"/>
+              </a:lnSpc>
+            </a:pPr>
+            <a:r>
+              <a:rPr sz="1600" b="0">
                 <a:solidFill>
                   <a:srgbClr val="FFFFFF"/>
                 </a:solidFill>
@@ -3359,8 +3359,8 @@
         </p:nvSpPr>
         <p:spPr>
           <a:xfrm>
-            <a:off x="288000" y="1260000"/>
-            <a:ext cx="11627999" cy="503999"/>
+            <a:off x="288000" y="1080000"/>
+            <a:ext cx="11627999" cy="468000"/>
           </a:xfrm>
           <a:prstGeom prst="rect">
             <a:avLst/>
@@ -3368,25 +3368,25 @@
           <a:noFill/>
         </p:spPr>
         <p:txBody>
-          <a:bodyPr wrap="square" lIns="54000" rIns="54000" tIns="18000" bIns="18000" anchor="ctr">
+          <a:bodyPr wrap="square" lIns="43200" rIns="43200" tIns="18000" bIns="18000" anchor="ctr">
             <a:spAutoFit/>
           </a:bodyPr>
           <a:lstStyle/>
           <a:p>
             <a:pPr algn="ctr">
               <a:lnSpc>
-                <a:spcPct val="130000"/>
-              </a:lnSpc>
-            </a:pPr>
-            <a:r>
-              <a:rPr sz="2200" b="1">
+                <a:spcPct val="125000"/>
+              </a:lnSpc>
+            </a:pPr>
+            <a:r>
+              <a:rPr sz="2000" b="1">
                 <a:solidFill>
                   <a:srgbClr val="1F3A5F"/>
                 </a:solidFill>
                 <a:latin typeface="メイリオ"/>
                 <a:rFonts eastAsia="メイリオ" ascii="メイリオ" hAnsi="メイリオ"/>
               </a:rPr>
-              <a:t>論点整理（令和 7 年 9 月）で示された 体育科 の進む方向</a:t>
+              <a:t>論点整理（令和7年9月）で示された 体育科 の進む方向</a:t>
             </a:r>
           </a:p>
         </p:txBody>
@@ -3399,8 +3399,8 @@
         </p:nvSpPr>
         <p:spPr>
           <a:xfrm>
-            <a:off x="306000" y="1872000"/>
-            <a:ext cx="3780000" cy="4104000"/>
+            <a:off x="306000" y="1692000"/>
+            <a:ext cx="3780000" cy="4176000"/>
           </a:xfrm>
           <a:prstGeom prst="roundRect">
             <a:avLst>
@@ -3447,8 +3447,8 @@
         </p:nvSpPr>
         <p:spPr>
           <a:xfrm>
-            <a:off x="306000" y="1872000"/>
-            <a:ext cx="3780000" cy="756000"/>
+            <a:off x="306000" y="1692000"/>
+            <a:ext cx="3780000" cy="720000"/>
           </a:xfrm>
           <a:prstGeom prst="rect">
             <a:avLst/>
@@ -3491,8 +3491,8 @@
         </p:nvSpPr>
         <p:spPr>
           <a:xfrm>
-            <a:off x="306000" y="1872000"/>
-            <a:ext cx="3780000" cy="756000"/>
+            <a:off x="306000" y="1692000"/>
+            <a:ext cx="3780000" cy="720000"/>
           </a:xfrm>
           <a:prstGeom prst="rect">
             <a:avLst/>
@@ -3500,18 +3500,18 @@
           <a:noFill/>
         </p:spPr>
         <p:txBody>
-          <a:bodyPr wrap="square" lIns="54000" rIns="54000" tIns="18000" bIns="18000" anchor="ctr">
+          <a:bodyPr wrap="square" lIns="43200" rIns="43200" tIns="18000" bIns="18000" anchor="ctr">
             <a:spAutoFit/>
           </a:bodyPr>
           <a:lstStyle/>
           <a:p>
             <a:pPr algn="ctr">
               <a:lnSpc>
-                <a:spcPct val="130000"/>
-              </a:lnSpc>
-            </a:pPr>
-            <a:r>
-              <a:rPr sz="5200" b="1">
+                <a:spcPct val="125000"/>
+              </a:lnSpc>
+            </a:pPr>
+            <a:r>
+              <a:rPr sz="4800" b="1">
                 <a:solidFill>
                   <a:srgbClr val="FFFFFF"/>
                 </a:solidFill>
@@ -3531,8 +3531,8 @@
         </p:nvSpPr>
         <p:spPr>
           <a:xfrm>
-            <a:off x="306000" y="2699999"/>
-            <a:ext cx="3780000" cy="576000"/>
+            <a:off x="306000" y="2484000"/>
+            <a:ext cx="3780000" cy="540000"/>
           </a:xfrm>
           <a:prstGeom prst="rect">
             <a:avLst/>
@@ -3540,18 +3540,18 @@
           <a:noFill/>
         </p:spPr>
         <p:txBody>
-          <a:bodyPr wrap="square" lIns="54000" rIns="54000" tIns="18000" bIns="18000" anchor="ctr">
+          <a:bodyPr wrap="square" lIns="43200" rIns="43200" tIns="18000" bIns="18000" anchor="ctr">
             <a:spAutoFit/>
           </a:bodyPr>
           <a:lstStyle/>
           <a:p>
             <a:pPr algn="ctr">
               <a:lnSpc>
-                <a:spcPct val="130000"/>
-              </a:lnSpc>
-            </a:pPr>
-            <a:r>
-              <a:rPr sz="3200" b="1">
+                <a:spcPct val="125000"/>
+              </a:lnSpc>
+            </a:pPr>
+            <a:r>
+              <a:rPr sz="3000" b="1">
                 <a:solidFill>
                   <a:srgbClr val="1F3A5F"/>
                 </a:solidFill>
@@ -3571,7 +3571,7 @@
         </p:nvSpPr>
         <p:spPr>
           <a:xfrm>
-            <a:off x="306000" y="3312000"/>
+            <a:off x="306000" y="3060000"/>
             <a:ext cx="3780000" cy="324000"/>
           </a:xfrm>
           <a:prstGeom prst="rect">
@@ -3580,18 +3580,18 @@
           <a:noFill/>
         </p:spPr>
         <p:txBody>
-          <a:bodyPr wrap="square" lIns="54000" rIns="54000" tIns="18000" bIns="18000" anchor="ctr">
+          <a:bodyPr wrap="square" lIns="43200" rIns="43200" tIns="18000" bIns="18000" anchor="ctr">
             <a:spAutoFit/>
           </a:bodyPr>
           <a:lstStyle/>
           <a:p>
             <a:pPr algn="ctr">
               <a:lnSpc>
-                <a:spcPct val="130000"/>
-              </a:lnSpc>
-            </a:pPr>
-            <a:r>
-              <a:rPr sz="2000" b="0">
+                <a:spcPct val="125000"/>
+              </a:lnSpc>
+            </a:pPr>
+            <a:r>
+              <a:rPr sz="1800" b="0">
                 <a:solidFill>
                   <a:srgbClr val="555555"/>
                 </a:solidFill>
@@ -3611,7 +3611,7 @@
         </p:nvSpPr>
         <p:spPr>
           <a:xfrm>
-            <a:off x="846000" y="3744000"/>
+            <a:off x="846000" y="3492000"/>
             <a:ext cx="2700000" cy="28800"/>
           </a:xfrm>
           <a:prstGeom prst="rect">
@@ -3655,8 +3655,8 @@
         </p:nvSpPr>
         <p:spPr>
           <a:xfrm>
-            <a:off x="306000" y="3852000"/>
-            <a:ext cx="3780000" cy="540000"/>
+            <a:off x="306000" y="3600000"/>
+            <a:ext cx="3780000" cy="468000"/>
           </a:xfrm>
           <a:prstGeom prst="rect">
             <a:avLst/>
@@ -3664,18 +3664,18 @@
           <a:noFill/>
         </p:spPr>
         <p:txBody>
-          <a:bodyPr wrap="square" lIns="54000" rIns="54000" tIns="18000" bIns="18000" anchor="ctr">
+          <a:bodyPr wrap="square" lIns="43200" rIns="43200" tIns="18000" bIns="18000" anchor="ctr">
             <a:spAutoFit/>
           </a:bodyPr>
           <a:lstStyle/>
           <a:p>
             <a:pPr algn="ctr">
               <a:lnSpc>
-                <a:spcPct val="130000"/>
-              </a:lnSpc>
-            </a:pPr>
-            <a:r>
-              <a:rPr sz="2800" b="1">
+                <a:spcPct val="125000"/>
+              </a:lnSpc>
+            </a:pPr>
+            <a:r>
+              <a:rPr sz="2600" b="1">
                 <a:solidFill>
                   <a:srgbClr val="1F3A5F"/>
                 </a:solidFill>
@@ -3695,8 +3695,8 @@
         </p:nvSpPr>
         <p:spPr>
           <a:xfrm>
-            <a:off x="450000" y="4536000"/>
-            <a:ext cx="3492000" cy="1368000"/>
+            <a:off x="450000" y="4284000"/>
+            <a:ext cx="3492000" cy="1296000"/>
           </a:xfrm>
           <a:prstGeom prst="rect">
             <a:avLst/>
@@ -3704,7 +3704,7 @@
           <a:noFill/>
         </p:spPr>
         <p:txBody>
-          <a:bodyPr wrap="square" lIns="54000" rIns="54000" tIns="18000" bIns="18000" anchor="t">
+          <a:bodyPr wrap="square" lIns="43200" rIns="43200" tIns="18000" bIns="18000" anchor="ctr">
             <a:spAutoFit/>
           </a:bodyPr>
           <a:lstStyle/>
@@ -3715,14 +3715,14 @@
               </a:lnSpc>
             </a:pPr>
             <a:r>
-              <a:rPr sz="2400" b="1">
+              <a:rPr sz="2200" b="1">
                 <a:solidFill>
                   <a:srgbClr val="2B2B2B"/>
                 </a:solidFill>
                 <a:latin typeface="メイリオ"/>
                 <a:rFonts eastAsia="メイリオ" ascii="メイリオ" hAnsi="メイリオ"/>
               </a:rPr>
-              <a:t>高次の資質・能力</a:t>
+              <a:t>高次の資質・能力を</a:t>
             </a:r>
           </a:p>
           <a:p>
@@ -3732,14 +3732,14 @@
               </a:lnSpc>
             </a:pPr>
             <a:r>
-              <a:rPr sz="2400" b="1">
+              <a:rPr sz="2200" b="1">
                 <a:solidFill>
                   <a:srgbClr val="2B2B2B"/>
                 </a:solidFill>
                 <a:latin typeface="メイリオ"/>
                 <a:rFonts eastAsia="メイリオ" ascii="メイリオ" hAnsi="メイリオ"/>
               </a:rPr>
-              <a:t>を 軸にする</a:t>
+              <a:t>授業の軸にする</a:t>
             </a:r>
           </a:p>
         </p:txBody>
@@ -3752,8 +3752,8 @@
         </p:nvSpPr>
         <p:spPr>
           <a:xfrm>
-            <a:off x="4266000" y="1872000"/>
-            <a:ext cx="3780000" cy="4104000"/>
+            <a:off x="4266000" y="1692000"/>
+            <a:ext cx="3780000" cy="4176000"/>
           </a:xfrm>
           <a:prstGeom prst="roundRect">
             <a:avLst>
@@ -3800,8 +3800,8 @@
         </p:nvSpPr>
         <p:spPr>
           <a:xfrm>
-            <a:off x="4266000" y="1872000"/>
-            <a:ext cx="3780000" cy="756000"/>
+            <a:off x="4266000" y="1692000"/>
+            <a:ext cx="3780000" cy="720000"/>
           </a:xfrm>
           <a:prstGeom prst="rect">
             <a:avLst/>
@@ -3844,8 +3844,8 @@
         </p:nvSpPr>
         <p:spPr>
           <a:xfrm>
-            <a:off x="4266000" y="1872000"/>
-            <a:ext cx="3780000" cy="756000"/>
+            <a:off x="4266000" y="1692000"/>
+            <a:ext cx="3780000" cy="720000"/>
           </a:xfrm>
           <a:prstGeom prst="rect">
             <a:avLst/>
@@ -3853,18 +3853,18 @@
           <a:noFill/>
         </p:spPr>
         <p:txBody>
-          <a:bodyPr wrap="square" lIns="54000" rIns="54000" tIns="18000" bIns="18000" anchor="ctr">
+          <a:bodyPr wrap="square" lIns="43200" rIns="43200" tIns="18000" bIns="18000" anchor="ctr">
             <a:spAutoFit/>
           </a:bodyPr>
           <a:lstStyle/>
           <a:p>
             <a:pPr algn="ctr">
               <a:lnSpc>
-                <a:spcPct val="130000"/>
-              </a:lnSpc>
-            </a:pPr>
-            <a:r>
-              <a:rPr sz="5200" b="1">
+                <a:spcPct val="125000"/>
+              </a:lnSpc>
+            </a:pPr>
+            <a:r>
+              <a:rPr sz="4800" b="1">
                 <a:solidFill>
                   <a:srgbClr val="FFFFFF"/>
                 </a:solidFill>
@@ -3884,8 +3884,8 @@
         </p:nvSpPr>
         <p:spPr>
           <a:xfrm>
-            <a:off x="4266000" y="2699999"/>
-            <a:ext cx="3780000" cy="576000"/>
+            <a:off x="4266000" y="2484000"/>
+            <a:ext cx="3780000" cy="540000"/>
           </a:xfrm>
           <a:prstGeom prst="rect">
             <a:avLst/>
@@ -3893,18 +3893,18 @@
           <a:noFill/>
         </p:spPr>
         <p:txBody>
-          <a:bodyPr wrap="square" lIns="54000" rIns="54000" tIns="18000" bIns="18000" anchor="ctr">
+          <a:bodyPr wrap="square" lIns="43200" rIns="43200" tIns="18000" bIns="18000" anchor="ctr">
             <a:spAutoFit/>
           </a:bodyPr>
           <a:lstStyle/>
           <a:p>
             <a:pPr algn="ctr">
               <a:lnSpc>
-                <a:spcPct val="130000"/>
-              </a:lnSpc>
-            </a:pPr>
-            <a:r>
-              <a:rPr sz="3200" b="1">
+                <a:spcPct val="125000"/>
+              </a:lnSpc>
+            </a:pPr>
+            <a:r>
+              <a:rPr sz="3000" b="1">
                 <a:solidFill>
                   <a:srgbClr val="2E8B57"/>
                 </a:solidFill>
@@ -3924,7 +3924,7 @@
         </p:nvSpPr>
         <p:spPr>
           <a:xfrm>
-            <a:off x="4266000" y="3312000"/>
+            <a:off x="4266000" y="3060000"/>
             <a:ext cx="3780000" cy="324000"/>
           </a:xfrm>
           <a:prstGeom prst="rect">
@@ -3933,18 +3933,18 @@
           <a:noFill/>
         </p:spPr>
         <p:txBody>
-          <a:bodyPr wrap="square" lIns="54000" rIns="54000" tIns="18000" bIns="18000" anchor="ctr">
+          <a:bodyPr wrap="square" lIns="43200" rIns="43200" tIns="18000" bIns="18000" anchor="ctr">
             <a:spAutoFit/>
           </a:bodyPr>
           <a:lstStyle/>
           <a:p>
             <a:pPr algn="ctr">
               <a:lnSpc>
-                <a:spcPct val="130000"/>
-              </a:lnSpc>
-            </a:pPr>
-            <a:r>
-              <a:rPr sz="2000" b="0">
+                <a:spcPct val="125000"/>
+              </a:lnSpc>
+            </a:pPr>
+            <a:r>
+              <a:rPr sz="1800" b="0">
                 <a:solidFill>
                   <a:srgbClr val="555555"/>
                 </a:solidFill>
@@ -3964,7 +3964,7 @@
         </p:nvSpPr>
         <p:spPr>
           <a:xfrm>
-            <a:off x="4806000" y="3744000"/>
+            <a:off x="4806000" y="3492000"/>
             <a:ext cx="2700000" cy="28800"/>
           </a:xfrm>
           <a:prstGeom prst="rect">
@@ -4008,8 +4008,8 @@
         </p:nvSpPr>
         <p:spPr>
           <a:xfrm>
-            <a:off x="4266000" y="3852000"/>
-            <a:ext cx="3780000" cy="540000"/>
+            <a:off x="4266000" y="3600000"/>
+            <a:ext cx="3780000" cy="468000"/>
           </a:xfrm>
           <a:prstGeom prst="rect">
             <a:avLst/>
@@ -4017,25 +4017,25 @@
           <a:noFill/>
         </p:spPr>
         <p:txBody>
-          <a:bodyPr wrap="square" lIns="54000" rIns="54000" tIns="18000" bIns="18000" anchor="ctr">
+          <a:bodyPr wrap="square" lIns="43200" rIns="43200" tIns="18000" bIns="18000" anchor="ctr">
             <a:spAutoFit/>
           </a:bodyPr>
           <a:lstStyle/>
           <a:p>
             <a:pPr algn="ctr">
               <a:lnSpc>
-                <a:spcPct val="130000"/>
-              </a:lnSpc>
-            </a:pPr>
-            <a:r>
-              <a:rPr sz="2800" b="1">
+                <a:spcPct val="125000"/>
+              </a:lnSpc>
+            </a:pPr>
+            <a:r>
+              <a:rPr sz="2600" b="1">
                 <a:solidFill>
                   <a:srgbClr val="2E8B57"/>
                 </a:solidFill>
                 <a:latin typeface="メイリオ"/>
                 <a:rFonts eastAsia="メイリオ" ascii="メイリオ" hAnsi="メイリオ"/>
               </a:rPr>
-              <a:t>多様性 の 包摂</a:t>
+              <a:t>多様性の包摂</a:t>
             </a:r>
           </a:p>
         </p:txBody>
@@ -4048,8 +4048,8 @@
         </p:nvSpPr>
         <p:spPr>
           <a:xfrm>
-            <a:off x="4410000" y="4536000"/>
-            <a:ext cx="3492000" cy="1368000"/>
+            <a:off x="4410000" y="4284000"/>
+            <a:ext cx="3492000" cy="1296000"/>
           </a:xfrm>
           <a:prstGeom prst="rect">
             <a:avLst/>
@@ -4057,7 +4057,7 @@
           <a:noFill/>
         </p:spPr>
         <p:txBody>
-          <a:bodyPr wrap="square" lIns="54000" rIns="54000" tIns="18000" bIns="18000" anchor="t">
+          <a:bodyPr wrap="square" lIns="43200" rIns="43200" tIns="18000" bIns="18000" anchor="ctr">
             <a:spAutoFit/>
           </a:bodyPr>
           <a:lstStyle/>
@@ -4068,7 +4068,7 @@
               </a:lnSpc>
             </a:pPr>
             <a:r>
-              <a:rPr sz="2400" b="1">
+              <a:rPr sz="2200" b="1">
                 <a:solidFill>
                   <a:srgbClr val="2B2B2B"/>
                 </a:solidFill>
@@ -4085,14 +4085,14 @@
               </a:lnSpc>
             </a:pPr>
             <a:r>
-              <a:rPr sz="2400" b="1">
+              <a:rPr sz="2200" b="1">
                 <a:solidFill>
                   <a:srgbClr val="2B2B2B"/>
                 </a:solidFill>
                 <a:latin typeface="メイリオ"/>
                 <a:rFonts eastAsia="メイリオ" ascii="メイリオ" hAnsi="メイリオ"/>
               </a:rPr>
-              <a:t>楽しさ を 味わう</a:t>
+              <a:t>楽しさを味わう</a:t>
             </a:r>
           </a:p>
         </p:txBody>
@@ -4105,8 +4105,8 @@
         </p:nvSpPr>
         <p:spPr>
           <a:xfrm>
-            <a:off x="8226000" y="1872000"/>
-            <a:ext cx="3780000" cy="4104000"/>
+            <a:off x="8226000" y="1692000"/>
+            <a:ext cx="3780000" cy="4176000"/>
           </a:xfrm>
           <a:prstGeom prst="roundRect">
             <a:avLst>
@@ -4153,8 +4153,8 @@
         </p:nvSpPr>
         <p:spPr>
           <a:xfrm>
-            <a:off x="8226000" y="1872000"/>
-            <a:ext cx="3780000" cy="756000"/>
+            <a:off x="8226000" y="1692000"/>
+            <a:ext cx="3780000" cy="720000"/>
           </a:xfrm>
           <a:prstGeom prst="rect">
             <a:avLst/>
@@ -4197,8 +4197,8 @@
         </p:nvSpPr>
         <p:spPr>
           <a:xfrm>
-            <a:off x="8226000" y="1872000"/>
-            <a:ext cx="3780000" cy="756000"/>
+            <a:off x="8226000" y="1692000"/>
+            <a:ext cx="3780000" cy="720000"/>
           </a:xfrm>
           <a:prstGeom prst="rect">
             <a:avLst/>
@@ -4206,18 +4206,18 @@
           <a:noFill/>
         </p:spPr>
         <p:txBody>
-          <a:bodyPr wrap="square" lIns="54000" rIns="54000" tIns="18000" bIns="18000" anchor="ctr">
+          <a:bodyPr wrap="square" lIns="43200" rIns="43200" tIns="18000" bIns="18000" anchor="ctr">
             <a:spAutoFit/>
           </a:bodyPr>
           <a:lstStyle/>
           <a:p>
             <a:pPr algn="ctr">
               <a:lnSpc>
-                <a:spcPct val="130000"/>
-              </a:lnSpc>
-            </a:pPr>
-            <a:r>
-              <a:rPr sz="5200" b="1">
+                <a:spcPct val="125000"/>
+              </a:lnSpc>
+            </a:pPr>
+            <a:r>
+              <a:rPr sz="4800" b="1">
                 <a:solidFill>
                   <a:srgbClr val="FFFFFF"/>
                 </a:solidFill>
@@ -4237,8 +4237,8 @@
         </p:nvSpPr>
         <p:spPr>
           <a:xfrm>
-            <a:off x="8226000" y="2699999"/>
-            <a:ext cx="3780000" cy="576000"/>
+            <a:off x="8226000" y="2484000"/>
+            <a:ext cx="3780000" cy="540000"/>
           </a:xfrm>
           <a:prstGeom prst="rect">
             <a:avLst/>
@@ -4246,18 +4246,18 @@
           <a:noFill/>
         </p:spPr>
         <p:txBody>
-          <a:bodyPr wrap="square" lIns="54000" rIns="54000" tIns="18000" bIns="18000" anchor="ctr">
+          <a:bodyPr wrap="square" lIns="43200" rIns="43200" tIns="18000" bIns="18000" anchor="ctr">
             <a:spAutoFit/>
           </a:bodyPr>
           <a:lstStyle/>
           <a:p>
             <a:pPr algn="ctr">
               <a:lnSpc>
-                <a:spcPct val="130000"/>
-              </a:lnSpc>
-            </a:pPr>
-            <a:r>
-              <a:rPr sz="3200" b="1">
+                <a:spcPct val="125000"/>
+              </a:lnSpc>
+            </a:pPr>
+            <a:r>
+              <a:rPr sz="3000" b="1">
                 <a:solidFill>
                   <a:srgbClr val="E87A1E"/>
                 </a:solidFill>
@@ -4277,7 +4277,7 @@
         </p:nvSpPr>
         <p:spPr>
           <a:xfrm>
-            <a:off x="8226000" y="3312000"/>
+            <a:off x="8226000" y="3060000"/>
             <a:ext cx="3780000" cy="324000"/>
           </a:xfrm>
           <a:prstGeom prst="rect">
@@ -4286,18 +4286,18 @@
           <a:noFill/>
         </p:spPr>
         <p:txBody>
-          <a:bodyPr wrap="square" lIns="54000" rIns="54000" tIns="18000" bIns="18000" anchor="ctr">
+          <a:bodyPr wrap="square" lIns="43200" rIns="43200" tIns="18000" bIns="18000" anchor="ctr">
             <a:spAutoFit/>
           </a:bodyPr>
           <a:lstStyle/>
           <a:p>
             <a:pPr algn="ctr">
               <a:lnSpc>
-                <a:spcPct val="130000"/>
-              </a:lnSpc>
-            </a:pPr>
-            <a:r>
-              <a:rPr sz="2000" b="0">
+                <a:spcPct val="125000"/>
+              </a:lnSpc>
+            </a:pPr>
+            <a:r>
+              <a:rPr sz="1800" b="0">
                 <a:solidFill>
                   <a:srgbClr val="555555"/>
                 </a:solidFill>
@@ -4317,7 +4317,7 @@
         </p:nvSpPr>
         <p:spPr>
           <a:xfrm>
-            <a:off x="8766000" y="3744000"/>
+            <a:off x="8766000" y="3492000"/>
             <a:ext cx="2700000" cy="28800"/>
           </a:xfrm>
           <a:prstGeom prst="rect">
@@ -4361,8 +4361,8 @@
         </p:nvSpPr>
         <p:spPr>
           <a:xfrm>
-            <a:off x="8226000" y="3852000"/>
-            <a:ext cx="3780000" cy="540000"/>
+            <a:off x="8226000" y="3600000"/>
+            <a:ext cx="3780000" cy="468000"/>
           </a:xfrm>
           <a:prstGeom prst="rect">
             <a:avLst/>
@@ -4370,18 +4370,18 @@
           <a:noFill/>
         </p:spPr>
         <p:txBody>
-          <a:bodyPr wrap="square" lIns="54000" rIns="54000" tIns="18000" bIns="18000" anchor="ctr">
+          <a:bodyPr wrap="square" lIns="43200" rIns="43200" tIns="18000" bIns="18000" anchor="ctr">
             <a:spAutoFit/>
           </a:bodyPr>
           <a:lstStyle/>
           <a:p>
             <a:pPr algn="ctr">
               <a:lnSpc>
-                <a:spcPct val="130000"/>
-              </a:lnSpc>
-            </a:pPr>
-            <a:r>
-              <a:rPr sz="2800" b="1">
+                <a:spcPct val="125000"/>
+              </a:lnSpc>
+            </a:pPr>
+            <a:r>
+              <a:rPr sz="2600" b="1">
                 <a:solidFill>
                   <a:srgbClr val="E87A1E"/>
                 </a:solidFill>
@@ -4401,8 +4401,8 @@
         </p:nvSpPr>
         <p:spPr>
           <a:xfrm>
-            <a:off x="8370000" y="4536000"/>
-            <a:ext cx="3492000" cy="1368000"/>
+            <a:off x="8370000" y="4284000"/>
+            <a:ext cx="3492000" cy="1296000"/>
           </a:xfrm>
           <a:prstGeom prst="rect">
             <a:avLst/>
@@ -4410,7 +4410,7 @@
           <a:noFill/>
         </p:spPr>
         <p:txBody>
-          <a:bodyPr wrap="square" lIns="54000" rIns="54000" tIns="18000" bIns="18000" anchor="t">
+          <a:bodyPr wrap="square" lIns="43200" rIns="43200" tIns="18000" bIns="18000" anchor="ctr">
             <a:spAutoFit/>
           </a:bodyPr>
           <a:lstStyle/>
@@ -4421,14 +4421,14 @@
               </a:lnSpc>
             </a:pPr>
             <a:r>
-              <a:rPr sz="2400" b="1">
+              <a:rPr sz="2200" b="1">
                 <a:solidFill>
                   <a:srgbClr val="2B2B2B"/>
                 </a:solidFill>
                 <a:latin typeface="メイリオ"/>
                 <a:rFonts eastAsia="メイリオ" ascii="メイリオ" hAnsi="メイリオ"/>
               </a:rPr>
-              <a:t>余白 と 創意工夫</a:t>
+              <a:t>余白と創意工夫を</a:t>
             </a:r>
           </a:p>
           <a:p>
@@ -4438,14 +4438,14 @@
               </a:lnSpc>
             </a:pPr>
             <a:r>
-              <a:rPr sz="2400" b="1">
+              <a:rPr sz="2200" b="1">
                 <a:solidFill>
                   <a:srgbClr val="2B2B2B"/>
                 </a:solidFill>
                 <a:latin typeface="メイリオ"/>
                 <a:rFonts eastAsia="メイリオ" ascii="メイリオ" hAnsi="メイリオ"/>
               </a:rPr>
-              <a:t>を 大切にする</a:t>
+              <a:t>大切にする</a:t>
             </a:r>
           </a:p>
         </p:txBody>
@@ -4458,8 +4458,8 @@
         </p:nvSpPr>
         <p:spPr>
           <a:xfrm>
-            <a:off x="0" y="6588000"/>
-            <a:ext cx="12192119" cy="270000"/>
+            <a:off x="0" y="6606001"/>
+            <a:ext cx="12192119" cy="251999"/>
           </a:xfrm>
           <a:prstGeom prst="rect">
             <a:avLst/>
@@ -4502,8 +4502,8 @@
         </p:nvSpPr>
         <p:spPr>
           <a:xfrm>
-            <a:off x="288000" y="6588000"/>
-            <a:ext cx="7200000" cy="270000"/>
+            <a:off x="288000" y="6606001"/>
+            <a:ext cx="7200000" cy="251999"/>
           </a:xfrm>
           <a:prstGeom prst="rect">
             <a:avLst/>
@@ -4511,18 +4511,18 @@
           <a:noFill/>
         </p:spPr>
         <p:txBody>
-          <a:bodyPr wrap="square" lIns="54000" rIns="54000" tIns="18000" bIns="18000" anchor="ctr">
+          <a:bodyPr wrap="square" lIns="43200" rIns="43200" tIns="18000" bIns="18000" anchor="ctr">
             <a:spAutoFit/>
           </a:bodyPr>
           <a:lstStyle/>
           <a:p>
             <a:pPr algn="l">
               <a:lnSpc>
-                <a:spcPct val="130000"/>
-              </a:lnSpc>
-            </a:pPr>
-            <a:r>
-              <a:rPr sz="1200" b="0">
+                <a:spcPct val="125000"/>
+              </a:lnSpc>
+            </a:pPr>
+            <a:r>
+              <a:rPr sz="1100" b="0">
                 <a:solidFill>
                   <a:srgbClr val="FFFFFF"/>
                 </a:solidFill>
@@ -4542,8 +4542,8 @@
         </p:nvSpPr>
         <p:spPr>
           <a:xfrm>
-            <a:off x="4680000" y="6588000"/>
-            <a:ext cx="7200000" cy="270000"/>
+            <a:off x="4680000" y="6606001"/>
+            <a:ext cx="7200000" cy="251999"/>
           </a:xfrm>
           <a:prstGeom prst="rect">
             <a:avLst/>
@@ -4551,18 +4551,18 @@
           <a:noFill/>
         </p:spPr>
         <p:txBody>
-          <a:bodyPr wrap="square" lIns="54000" rIns="54000" tIns="18000" bIns="18000" anchor="ctr">
+          <a:bodyPr wrap="square" lIns="43200" rIns="43200" tIns="18000" bIns="18000" anchor="ctr">
             <a:spAutoFit/>
           </a:bodyPr>
           <a:lstStyle/>
           <a:p>
             <a:pPr algn="r">
               <a:lnSpc>
-                <a:spcPct val="130000"/>
-              </a:lnSpc>
-            </a:pPr>
-            <a:r>
-              <a:rPr sz="1100" b="0">
+                <a:spcPct val="125000"/>
+              </a:lnSpc>
+            </a:pPr>
+            <a:r>
+              <a:rPr sz="1000" b="0">
                 <a:solidFill>
                   <a:srgbClr val="FFFFFF"/>
                 </a:solidFill>
@@ -4601,7 +4601,7 @@
         <p:spPr>
           <a:xfrm>
             <a:off x="0" y="0"/>
-            <a:ext cx="12192119" cy="1007999"/>
+            <a:ext cx="12192119" cy="936000"/>
           </a:xfrm>
           <a:prstGeom prst="rect">
             <a:avLst/>
@@ -4644,8 +4644,8 @@
         </p:nvSpPr>
         <p:spPr>
           <a:xfrm>
-            <a:off x="0" y="1007999"/>
-            <a:ext cx="12192119" cy="79200"/>
+            <a:off x="0" y="936000"/>
+            <a:ext cx="12192119" cy="72000"/>
           </a:xfrm>
           <a:prstGeom prst="rect">
             <a:avLst/>
@@ -4689,7 +4689,7 @@
         <p:spPr>
           <a:xfrm>
             <a:off x="288000" y="198000"/>
-            <a:ext cx="864000" cy="612000"/>
+            <a:ext cx="792000" cy="540000"/>
           </a:xfrm>
           <a:prstGeom prst="roundRect">
             <a:avLst>
@@ -4735,7 +4735,7 @@
         <p:spPr>
           <a:xfrm>
             <a:off x="288000" y="198000"/>
-            <a:ext cx="864000" cy="612000"/>
+            <a:ext cx="792000" cy="540000"/>
           </a:xfrm>
           <a:prstGeom prst="rect">
             <a:avLst/>
@@ -4743,18 +4743,18 @@
           <a:noFill/>
         </p:spPr>
         <p:txBody>
-          <a:bodyPr wrap="square" lIns="54000" rIns="54000" tIns="18000" bIns="18000" anchor="ctr">
+          <a:bodyPr wrap="square" lIns="43200" rIns="43200" tIns="18000" bIns="18000" anchor="ctr">
             <a:spAutoFit/>
           </a:bodyPr>
           <a:lstStyle/>
           <a:p>
             <a:pPr algn="ctr">
               <a:lnSpc>
-                <a:spcPct val="130000"/>
-              </a:lnSpc>
-            </a:pPr>
-            <a:r>
-              <a:rPr sz="3200" b="1">
+                <a:spcPct val="125000"/>
+              </a:lnSpc>
+            </a:pPr>
+            <a:r>
+              <a:rPr sz="2800" b="1">
                 <a:solidFill>
                   <a:srgbClr val="FFFFFF"/>
                 </a:solidFill>
@@ -4774,8 +4774,8 @@
         </p:nvSpPr>
         <p:spPr>
           <a:xfrm>
-            <a:off x="1296000" y="198000"/>
-            <a:ext cx="9360000" cy="612000"/>
+            <a:off x="1224000" y="198000"/>
+            <a:ext cx="9540000" cy="540000"/>
           </a:xfrm>
           <a:prstGeom prst="rect">
             <a:avLst/>
@@ -4783,25 +4783,25 @@
           <a:noFill/>
         </p:spPr>
         <p:txBody>
-          <a:bodyPr wrap="square" lIns="54000" rIns="54000" tIns="18000" bIns="18000" anchor="ctr">
+          <a:bodyPr wrap="square" lIns="43200" rIns="43200" tIns="18000" bIns="18000" anchor="ctr">
             <a:spAutoFit/>
           </a:bodyPr>
           <a:lstStyle/>
           <a:p>
             <a:pPr algn="l">
               <a:lnSpc>
-                <a:spcPct val="130000"/>
-              </a:lnSpc>
-            </a:pPr>
-            <a:r>
-              <a:rPr sz="3200" b="1">
+                <a:spcPct val="125000"/>
+              </a:lnSpc>
+            </a:pPr>
+            <a:r>
+              <a:rPr sz="2800" b="1">
                 <a:solidFill>
                   <a:srgbClr val="FFFFFF"/>
                 </a:solidFill>
                 <a:latin typeface="メイリオ"/>
                 <a:rFonts eastAsia="メイリオ" ascii="メイリオ" hAnsi="メイリオ"/>
               </a:rPr>
-              <a:t>練 馬 の 先 生 方 へ</a:t>
+              <a:t>練馬の 先生方へ</a:t>
             </a:r>
           </a:p>
         </p:txBody>
@@ -4814,8 +4814,8 @@
         </p:nvSpPr>
         <p:spPr>
           <a:xfrm>
-            <a:off x="10872000" y="198000"/>
-            <a:ext cx="1116000" cy="612000"/>
+            <a:off x="10800000" y="198000"/>
+            <a:ext cx="1080000" cy="540000"/>
           </a:xfrm>
           <a:prstGeom prst="rect">
             <a:avLst/>
@@ -4823,18 +4823,18 @@
           <a:noFill/>
         </p:spPr>
         <p:txBody>
-          <a:bodyPr wrap="square" lIns="54000" rIns="54000" tIns="18000" bIns="18000" anchor="ctr">
+          <a:bodyPr wrap="square" lIns="43200" rIns="43200" tIns="18000" bIns="18000" anchor="ctr">
             <a:spAutoFit/>
           </a:bodyPr>
           <a:lstStyle/>
           <a:p>
             <a:pPr algn="r">
               <a:lnSpc>
-                <a:spcPct val="130000"/>
-              </a:lnSpc>
-            </a:pPr>
-            <a:r>
-              <a:rPr sz="1800" b="0">
+                <a:spcPct val="125000"/>
+              </a:lnSpc>
+            </a:pPr>
+            <a:r>
+              <a:rPr sz="1600" b="0">
                 <a:solidFill>
                   <a:srgbClr val="FFFFFF"/>
                 </a:solidFill>
@@ -4854,7 +4854,7 @@
         </p:nvSpPr>
         <p:spPr>
           <a:xfrm>
-            <a:off x="540000" y="1296000"/>
+            <a:off x="540000" y="1188000"/>
             <a:ext cx="11106000" cy="4140000"/>
           </a:xfrm>
           <a:prstGeom prst="roundRect">
@@ -4900,8 +4900,8 @@
         </p:nvSpPr>
         <p:spPr>
           <a:xfrm>
-            <a:off x="2880000" y="1800000"/>
-            <a:ext cx="6426000" cy="50400"/>
+            <a:off x="3240000" y="1620000"/>
+            <a:ext cx="5706000" cy="50400"/>
           </a:xfrm>
           <a:prstGeom prst="rect">
             <a:avLst/>
@@ -4944,8 +4944,8 @@
         </p:nvSpPr>
         <p:spPr>
           <a:xfrm>
-            <a:off x="720000" y="1980000"/>
-            <a:ext cx="10746000" cy="3240000"/>
+            <a:off x="720000" y="1728000"/>
+            <a:ext cx="10746000" cy="3528000"/>
           </a:xfrm>
           <a:prstGeom prst="rect">
             <a:avLst/>
@@ -4953,52 +4953,52 @@
           <a:noFill/>
         </p:spPr>
         <p:txBody>
-          <a:bodyPr wrap="square" lIns="54000" rIns="54000" tIns="18000" bIns="18000" anchor="ctr">
+          <a:bodyPr wrap="square" lIns="43200" rIns="43200" tIns="18000" bIns="18000" anchor="ctr">
             <a:spAutoFit/>
           </a:bodyPr>
           <a:lstStyle/>
           <a:p>
             <a:pPr algn="ctr">
               <a:lnSpc>
-                <a:spcPct val="160000"/>
-              </a:lnSpc>
-            </a:pPr>
-            <a:r>
-              <a:rPr sz="3200" b="1">
+                <a:spcPct val="155000"/>
+              </a:lnSpc>
+            </a:pPr>
+            <a:r>
+              <a:rPr sz="2800" b="1">
                 <a:solidFill>
                   <a:srgbClr val="FFFFFF"/>
                 </a:solidFill>
                 <a:latin typeface="メイリオ"/>
                 <a:rFonts eastAsia="メイリオ" ascii="メイリオ" hAnsi="メイリオ"/>
               </a:rPr>
-              <a:t>種目 を 教える 授業 から、</a:t>
+              <a:t>種目を 教える 授業 から、</a:t>
             </a:r>
           </a:p>
           <a:p>
             <a:pPr algn="ctr">
               <a:lnSpc>
-                <a:spcPct val="160000"/>
-              </a:lnSpc>
-            </a:pPr>
-            <a:r>
-              <a:rPr sz="3200" b="1">
+                <a:spcPct val="155000"/>
+              </a:lnSpc>
+            </a:pPr>
+            <a:r>
+              <a:rPr sz="2800" b="1">
                 <a:solidFill>
                   <a:srgbClr val="FFFFFF"/>
                 </a:solidFill>
                 <a:latin typeface="メイリオ"/>
                 <a:rFonts eastAsia="メイリオ" ascii="メイリオ" hAnsi="メイリオ"/>
               </a:rPr>
-              <a:t>資質・能力 を 育てる 授業 へ。</a:t>
+              <a:t>資質・能力を 育てる 授業へ。</a:t>
             </a:r>
           </a:p>
           <a:p>
             <a:pPr algn="ctr">
               <a:lnSpc>
-                <a:spcPct val="160000"/>
-              </a:lnSpc>
-            </a:pPr>
-            <a:r>
-              <a:rPr sz="3200" b="1">
+                <a:spcPct val="155000"/>
+              </a:lnSpc>
+            </a:pPr>
+            <a:r>
+              <a:rPr sz="2800" b="1">
                 <a:solidFill>
                   <a:srgbClr val="FFFFFF"/>
                 </a:solidFill>
@@ -5011,86 +5011,35 @@
           <a:p>
             <a:pPr algn="ctr">
               <a:lnSpc>
-                <a:spcPct val="160000"/>
-              </a:lnSpc>
-            </a:pPr>
-            <a:r>
-              <a:rPr sz="3200" b="1">
+                <a:spcPct val="155000"/>
+              </a:lnSpc>
+            </a:pPr>
+            <a:r>
+              <a:rPr sz="2800" b="1">
                 <a:solidFill>
                   <a:srgbClr val="FFFFFF"/>
                 </a:solidFill>
                 <a:latin typeface="メイリオ"/>
                 <a:rFonts eastAsia="メイリオ" ascii="メイリオ" hAnsi="メイリオ"/>
               </a:rPr>
-              <a:t>「できる ／ できない」 を 超え、</a:t>
+              <a:t>一人一人の 変化と工夫 を 見取り、</a:t>
             </a:r>
           </a:p>
           <a:p>
             <a:pPr algn="ctr">
               <a:lnSpc>
-                <a:spcPct val="160000"/>
-              </a:lnSpc>
-            </a:pPr>
-            <a:r>
-              <a:rPr sz="3200" b="1">
+                <a:spcPct val="155000"/>
+              </a:lnSpc>
+            </a:pPr>
+            <a:r>
+              <a:rPr sz="2800" b="1">
                 <a:solidFill>
                   <a:srgbClr val="FFFFFF"/>
                 </a:solidFill>
                 <a:latin typeface="メイリオ"/>
                 <a:rFonts eastAsia="メイリオ" ascii="メイリオ" hAnsi="メイリオ"/>
               </a:rPr>
-              <a:t>一人一人 の 変化 と 工夫 を 見取る。</a:t>
-            </a:r>
-          </a:p>
-          <a:p>
-            <a:pPr algn="ctr">
-              <a:lnSpc>
-                <a:spcPct val="160000"/>
-              </a:lnSpc>
-            </a:pPr>
-            <a:r>
-              <a:rPr sz="3200" b="1">
-                <a:solidFill>
-                  <a:srgbClr val="FFFFFF"/>
-                </a:solidFill>
-                <a:latin typeface="メイリオ"/>
-                <a:rFonts eastAsia="メイリオ" ascii="メイリオ" hAnsi="メイリオ"/>
-              </a:rPr>
-              <a:t/>
-            </a:r>
-          </a:p>
-          <a:p>
-            <a:pPr algn="ctr">
-              <a:lnSpc>
-                <a:spcPct val="160000"/>
-              </a:lnSpc>
-            </a:pPr>
-            <a:r>
-              <a:rPr sz="3200" b="1">
-                <a:solidFill>
-                  <a:srgbClr val="FFFFFF"/>
-                </a:solidFill>
-                <a:latin typeface="メイリオ"/>
-                <a:rFonts eastAsia="メイリオ" ascii="メイリオ" hAnsi="メイリオ"/>
-              </a:rPr>
-              <a:t>練馬 の 体育研究 の 中で、</a:t>
-            </a:r>
-          </a:p>
-          <a:p>
-            <a:pPr algn="ctr">
-              <a:lnSpc>
-                <a:spcPct val="160000"/>
-              </a:lnSpc>
-            </a:pPr>
-            <a:r>
-              <a:rPr sz="3200" b="1">
-                <a:solidFill>
-                  <a:srgbClr val="FFFFFF"/>
-                </a:solidFill>
-                <a:latin typeface="メイリオ"/>
-                <a:rFonts eastAsia="メイリオ" ascii="メイリオ" hAnsi="メイリオ"/>
-              </a:rPr>
-              <a:t>一緒に 描いて いきたい。</a:t>
+              <a:t>練馬の研究の中で 一緒に 描いていきたい。</a:t>
             </a:r>
           </a:p>
         </p:txBody>
@@ -5103,8 +5052,8 @@
         </p:nvSpPr>
         <p:spPr>
           <a:xfrm>
-            <a:off x="540000" y="5508000"/>
-            <a:ext cx="11106000" cy="936000"/>
+            <a:off x="540000" y="5436000"/>
+            <a:ext cx="11106000" cy="972000"/>
           </a:xfrm>
           <a:prstGeom prst="roundRect">
             <a:avLst>
@@ -5151,8 +5100,8 @@
         </p:nvSpPr>
         <p:spPr>
           <a:xfrm>
-            <a:off x="720000" y="5544000"/>
-            <a:ext cx="10746000" cy="324000"/>
+            <a:off x="720000" y="5472000"/>
+            <a:ext cx="10746000" cy="288000"/>
           </a:xfrm>
           <a:prstGeom prst="rect">
             <a:avLst/>
@@ -5160,25 +5109,25 @@
           <a:noFill/>
         </p:spPr>
         <p:txBody>
-          <a:bodyPr wrap="square" lIns="54000" rIns="54000" tIns="18000" bIns="18000" anchor="ctr">
+          <a:bodyPr wrap="square" lIns="43200" rIns="43200" tIns="18000" bIns="18000" anchor="ctr">
             <a:spAutoFit/>
           </a:bodyPr>
           <a:lstStyle/>
           <a:p>
             <a:pPr algn="l">
               <a:lnSpc>
-                <a:spcPct val="130000"/>
-              </a:lnSpc>
-            </a:pPr>
-            <a:r>
-              <a:rPr sz="1400" b="1">
+                <a:spcPct val="125000"/>
+              </a:lnSpc>
+            </a:pPr>
+            <a:r>
+              <a:rPr sz="1300" b="1">
                 <a:solidFill>
                   <a:srgbClr val="1F3A5F"/>
                 </a:solidFill>
                 <a:latin typeface="メイリオ"/>
                 <a:rFonts eastAsia="メイリオ" ascii="メイリオ" hAnsi="メイリオ"/>
               </a:rPr>
-              <a:t>▼ 主 な 参 考 資 料</a:t>
+              <a:t>▼ 主な参考資料</a:t>
             </a:r>
           </a:p>
         </p:txBody>
@@ -5191,8 +5140,8 @@
         </p:nvSpPr>
         <p:spPr>
           <a:xfrm>
-            <a:off x="720000" y="5832000"/>
-            <a:ext cx="10746000" cy="576000"/>
+            <a:off x="720000" y="5760000"/>
+            <a:ext cx="10746000" cy="612000"/>
           </a:xfrm>
           <a:prstGeom prst="rect">
             <a:avLst/>
@@ -5200,42 +5149,42 @@
           <a:noFill/>
         </p:spPr>
         <p:txBody>
-          <a:bodyPr wrap="square" lIns="54000" rIns="54000" tIns="18000" bIns="18000" anchor="t">
+          <a:bodyPr wrap="square" lIns="43200" rIns="43200" tIns="18000" bIns="18000" anchor="t">
             <a:spAutoFit/>
           </a:bodyPr>
           <a:lstStyle/>
           <a:p>
             <a:pPr algn="l">
               <a:lnSpc>
-                <a:spcPct val="150000"/>
-              </a:lnSpc>
-            </a:pPr>
-            <a:r>
-              <a:rPr sz="1300" b="0">
+                <a:spcPct val="140000"/>
+              </a:lnSpc>
+            </a:pPr>
+            <a:r>
+              <a:rPr sz="1200" b="0">
                 <a:solidFill>
                   <a:srgbClr val="2B2B2B"/>
                 </a:solidFill>
                 <a:latin typeface="メイリオ"/>
                 <a:rFonts eastAsia="メイリオ" ascii="メイリオ" hAnsi="メイリオ"/>
               </a:rPr>
-              <a:t>中央教育審議会 体育・保健体育、健康、安全 ワーキンググループ</a:t>
+              <a:t>中央教育審議会 体育・保健体育、健康、安全ワーキンググループ</a:t>
             </a:r>
           </a:p>
           <a:p>
             <a:pPr algn="l">
               <a:lnSpc>
-                <a:spcPct val="150000"/>
-              </a:lnSpc>
-            </a:pPr>
-            <a:r>
-              <a:rPr sz="1300" b="0">
+                <a:spcPct val="140000"/>
+              </a:lnSpc>
+            </a:pPr>
+            <a:r>
+              <a:rPr sz="1200" b="0">
                 <a:solidFill>
                   <a:srgbClr val="2B2B2B"/>
                 </a:solidFill>
                 <a:latin typeface="メイリオ"/>
                 <a:rFonts eastAsia="メイリオ" ascii="メイリオ" hAnsi="メイリオ"/>
               </a:rPr>
-              <a:t>第 6 回 (R8.1.16) ／ 第 7 回 (R8.2.19) ／ 第 8 回 (R8.3.27) ／ 第 9 回 (R8.4.24)</a:t>
+              <a:t>第6回(R8.1.16)／第7回(R8.2.19)／第8回(R8.3.27)／第9回(R8.4.24)</a:t>
             </a:r>
           </a:p>
         </p:txBody>
@@ -5248,8 +5197,8 @@
         </p:nvSpPr>
         <p:spPr>
           <a:xfrm>
-            <a:off x="0" y="6588000"/>
-            <a:ext cx="12192119" cy="270000"/>
+            <a:off x="0" y="6606001"/>
+            <a:ext cx="12192119" cy="251999"/>
           </a:xfrm>
           <a:prstGeom prst="rect">
             <a:avLst/>
@@ -5292,8 +5241,8 @@
         </p:nvSpPr>
         <p:spPr>
           <a:xfrm>
-            <a:off x="288000" y="6588000"/>
-            <a:ext cx="7200000" cy="270000"/>
+            <a:off x="288000" y="6606001"/>
+            <a:ext cx="7200000" cy="251999"/>
           </a:xfrm>
           <a:prstGeom prst="rect">
             <a:avLst/>
@@ -5301,18 +5250,18 @@
           <a:noFill/>
         </p:spPr>
         <p:txBody>
-          <a:bodyPr wrap="square" lIns="54000" rIns="54000" tIns="18000" bIns="18000" anchor="ctr">
+          <a:bodyPr wrap="square" lIns="43200" rIns="43200" tIns="18000" bIns="18000" anchor="ctr">
             <a:spAutoFit/>
           </a:bodyPr>
           <a:lstStyle/>
           <a:p>
             <a:pPr algn="l">
               <a:lnSpc>
-                <a:spcPct val="130000"/>
-              </a:lnSpc>
-            </a:pPr>
-            <a:r>
-              <a:rPr sz="1200" b="0">
+                <a:spcPct val="125000"/>
+              </a:lnSpc>
+            </a:pPr>
+            <a:r>
+              <a:rPr sz="1100" b="0">
                 <a:solidFill>
                   <a:srgbClr val="FFFFFF"/>
                 </a:solidFill>
@@ -5332,8 +5281,8 @@
         </p:nvSpPr>
         <p:spPr>
           <a:xfrm>
-            <a:off x="4680000" y="6588000"/>
-            <a:ext cx="7200000" cy="270000"/>
+            <a:off x="4680000" y="6606001"/>
+            <a:ext cx="7200000" cy="251999"/>
           </a:xfrm>
           <a:prstGeom prst="rect">
             <a:avLst/>
@@ -5341,18 +5290,18 @@
           <a:noFill/>
         </p:spPr>
         <p:txBody>
-          <a:bodyPr wrap="square" lIns="54000" rIns="54000" tIns="18000" bIns="18000" anchor="ctr">
+          <a:bodyPr wrap="square" lIns="43200" rIns="43200" tIns="18000" bIns="18000" anchor="ctr">
             <a:spAutoFit/>
           </a:bodyPr>
           <a:lstStyle/>
           <a:p>
             <a:pPr algn="r">
               <a:lnSpc>
-                <a:spcPct val="130000"/>
-              </a:lnSpc>
-            </a:pPr>
-            <a:r>
-              <a:rPr sz="1100" b="0">
+                <a:spcPct val="125000"/>
+              </a:lnSpc>
+            </a:pPr>
+            <a:r>
+              <a:rPr sz="1000" b="0">
                 <a:solidFill>
                   <a:srgbClr val="FFFFFF"/>
                 </a:solidFill>
@@ -5391,7 +5340,7 @@
         <p:spPr>
           <a:xfrm>
             <a:off x="0" y="0"/>
-            <a:ext cx="12192119" cy="1007999"/>
+            <a:ext cx="12192119" cy="936000"/>
           </a:xfrm>
           <a:prstGeom prst="rect">
             <a:avLst/>
@@ -5434,8 +5383,8 @@
         </p:nvSpPr>
         <p:spPr>
           <a:xfrm>
-            <a:off x="0" y="1007999"/>
-            <a:ext cx="12192119" cy="79200"/>
+            <a:off x="0" y="936000"/>
+            <a:ext cx="12192119" cy="72000"/>
           </a:xfrm>
           <a:prstGeom prst="rect">
             <a:avLst/>
@@ -5479,7 +5428,7 @@
         <p:spPr>
           <a:xfrm>
             <a:off x="288000" y="198000"/>
-            <a:ext cx="864000" cy="612000"/>
+            <a:ext cx="792000" cy="540000"/>
           </a:xfrm>
           <a:prstGeom prst="roundRect">
             <a:avLst>
@@ -5525,7 +5474,7 @@
         <p:spPr>
           <a:xfrm>
             <a:off x="288000" y="198000"/>
-            <a:ext cx="864000" cy="612000"/>
+            <a:ext cx="792000" cy="540000"/>
           </a:xfrm>
           <a:prstGeom prst="rect">
             <a:avLst/>
@@ -5533,18 +5482,18 @@
           <a:noFill/>
         </p:spPr>
         <p:txBody>
-          <a:bodyPr wrap="square" lIns="54000" rIns="54000" tIns="18000" bIns="18000" anchor="ctr">
+          <a:bodyPr wrap="square" lIns="43200" rIns="43200" tIns="18000" bIns="18000" anchor="ctr">
             <a:spAutoFit/>
           </a:bodyPr>
           <a:lstStyle/>
           <a:p>
             <a:pPr algn="ctr">
               <a:lnSpc>
-                <a:spcPct val="130000"/>
-              </a:lnSpc>
-            </a:pPr>
-            <a:r>
-              <a:rPr sz="3200" b="1">
+                <a:spcPct val="125000"/>
+              </a:lnSpc>
+            </a:pPr>
+            <a:r>
+              <a:rPr sz="2800" b="1">
                 <a:solidFill>
                   <a:srgbClr val="FFFFFF"/>
                 </a:solidFill>
@@ -5564,8 +5513,8 @@
         </p:nvSpPr>
         <p:spPr>
           <a:xfrm>
-            <a:off x="1296000" y="198000"/>
-            <a:ext cx="9360000" cy="612000"/>
+            <a:off x="1224000" y="198000"/>
+            <a:ext cx="9540000" cy="540000"/>
           </a:xfrm>
           <a:prstGeom prst="rect">
             <a:avLst/>
@@ -5573,25 +5522,25 @@
           <a:noFill/>
         </p:spPr>
         <p:txBody>
-          <a:bodyPr wrap="square" lIns="54000" rIns="54000" tIns="18000" bIns="18000" anchor="ctr">
+          <a:bodyPr wrap="square" lIns="43200" rIns="43200" tIns="18000" bIns="18000" anchor="ctr">
             <a:spAutoFit/>
           </a:bodyPr>
           <a:lstStyle/>
           <a:p>
             <a:pPr algn="l">
               <a:lnSpc>
-                <a:spcPct val="130000"/>
-              </a:lnSpc>
-            </a:pPr>
-            <a:r>
-              <a:rPr sz="3200" b="1">
+                <a:spcPct val="125000"/>
+              </a:lnSpc>
+            </a:pPr>
+            <a:r>
+              <a:rPr sz="2800" b="1">
                 <a:solidFill>
                   <a:srgbClr val="FFFFFF"/>
                 </a:solidFill>
                 <a:latin typeface="メイリオ"/>
                 <a:rFonts eastAsia="メイリオ" ascii="メイリオ" hAnsi="メイリオ"/>
               </a:rPr>
-              <a:t>体 育 科 の 中 心 と な る 考 え 方</a:t>
+              <a:t>体育科の 中心となる 考え方</a:t>
             </a:r>
           </a:p>
         </p:txBody>
@@ -5604,8 +5553,8 @@
         </p:nvSpPr>
         <p:spPr>
           <a:xfrm>
-            <a:off x="10872000" y="198000"/>
-            <a:ext cx="1116000" cy="612000"/>
+            <a:off x="10800000" y="198000"/>
+            <a:ext cx="1080000" cy="540000"/>
           </a:xfrm>
           <a:prstGeom prst="rect">
             <a:avLst/>
@@ -5613,18 +5562,18 @@
           <a:noFill/>
         </p:spPr>
         <p:txBody>
-          <a:bodyPr wrap="square" lIns="54000" rIns="54000" tIns="18000" bIns="18000" anchor="ctr">
+          <a:bodyPr wrap="square" lIns="43200" rIns="43200" tIns="18000" bIns="18000" anchor="ctr">
             <a:spAutoFit/>
           </a:bodyPr>
           <a:lstStyle/>
           <a:p>
             <a:pPr algn="r">
               <a:lnSpc>
-                <a:spcPct val="130000"/>
-              </a:lnSpc>
-            </a:pPr>
-            <a:r>
-              <a:rPr sz="1800" b="0">
+                <a:spcPct val="125000"/>
+              </a:lnSpc>
+            </a:pPr>
+            <a:r>
+              <a:rPr sz="1600" b="0">
                 <a:solidFill>
                   <a:srgbClr val="FFFFFF"/>
                 </a:solidFill>
@@ -5644,8 +5593,8 @@
         </p:nvSpPr>
         <p:spPr>
           <a:xfrm>
-            <a:off x="720000" y="1332000"/>
-            <a:ext cx="10728000" cy="1440000"/>
+            <a:off x="720000" y="1260000"/>
+            <a:ext cx="10728000" cy="1512000"/>
           </a:xfrm>
           <a:prstGeom prst="roundRect">
             <a:avLst>
@@ -5692,8 +5641,8 @@
         </p:nvSpPr>
         <p:spPr>
           <a:xfrm>
-            <a:off x="900000" y="1440000"/>
-            <a:ext cx="10368000" cy="432000"/>
+            <a:off x="900000" y="1404000"/>
+            <a:ext cx="10368000" cy="396000"/>
           </a:xfrm>
           <a:prstGeom prst="rect">
             <a:avLst/>
@@ -5701,18 +5650,18 @@
           <a:noFill/>
         </p:spPr>
         <p:txBody>
-          <a:bodyPr wrap="square" lIns="54000" rIns="54000" tIns="18000" bIns="18000" anchor="ctr">
+          <a:bodyPr wrap="square" lIns="43200" rIns="43200" tIns="18000" bIns="18000" anchor="ctr">
             <a:spAutoFit/>
           </a:bodyPr>
           <a:lstStyle/>
           <a:p>
             <a:pPr algn="l">
               <a:lnSpc>
-                <a:spcPct val="130000"/>
-              </a:lnSpc>
-            </a:pPr>
-            <a:r>
-              <a:rPr sz="2200" b="1">
+                <a:spcPct val="125000"/>
+              </a:lnSpc>
+            </a:pPr>
+            <a:r>
+              <a:rPr sz="2000" b="1">
                 <a:solidFill>
                   <a:srgbClr val="C0392B"/>
                 </a:solidFill>
@@ -5732,7 +5681,7 @@
         </p:nvSpPr>
         <p:spPr>
           <a:xfrm>
-            <a:off x="900000" y="1908000"/>
+            <a:off x="900000" y="1836000"/>
             <a:ext cx="10368000" cy="864000"/>
           </a:xfrm>
           <a:prstGeom prst="rect">
@@ -5741,25 +5690,25 @@
           <a:noFill/>
         </p:spPr>
         <p:txBody>
-          <a:bodyPr wrap="square" lIns="54000" rIns="54000" tIns="18000" bIns="18000" anchor="ctr">
+          <a:bodyPr wrap="square" lIns="43200" rIns="43200" tIns="18000" bIns="18000" anchor="ctr">
             <a:spAutoFit/>
           </a:bodyPr>
           <a:lstStyle/>
           <a:p>
             <a:pPr algn="ctr">
               <a:lnSpc>
-                <a:spcPct val="130000"/>
-              </a:lnSpc>
-            </a:pPr>
-            <a:r>
-              <a:rPr sz="3600" b="1">
+                <a:spcPct val="125000"/>
+              </a:lnSpc>
+            </a:pPr>
+            <a:r>
+              <a:rPr sz="4400" b="1">
                 <a:solidFill>
                   <a:srgbClr val="2B2B2B"/>
                 </a:solidFill>
                 <a:latin typeface="メイリオ"/>
                 <a:rFonts eastAsia="メイリオ" ascii="メイリオ" hAnsi="メイリオ"/>
               </a:rPr>
-              <a:t>種目 （バレー・跳び箱…） を 教える 授業</a:t>
+              <a:t>種目を 教える 授業</a:t>
             </a:r>
           </a:p>
         </p:txBody>
@@ -5772,7 +5721,7 @@
         </p:nvSpPr>
         <p:spPr>
           <a:xfrm>
-            <a:off x="5580000" y="2952000"/>
+            <a:off x="5580000" y="2915999"/>
             <a:ext cx="1080000" cy="648000"/>
           </a:xfrm>
           <a:prstGeom prst="downArrow">
@@ -5816,8 +5765,8 @@
         </p:nvSpPr>
         <p:spPr>
           <a:xfrm>
-            <a:off x="720000" y="3960000"/>
-            <a:ext cx="10728000" cy="1800000"/>
+            <a:off x="720000" y="3888000"/>
+            <a:ext cx="10728000" cy="1872000"/>
           </a:xfrm>
           <a:prstGeom prst="roundRect">
             <a:avLst>
@@ -5864,8 +5813,8 @@
         </p:nvSpPr>
         <p:spPr>
           <a:xfrm>
-            <a:off x="900000" y="4104000"/>
-            <a:ext cx="10368000" cy="432000"/>
+            <a:off x="900000" y="4068000"/>
+            <a:ext cx="10368000" cy="396000"/>
           </a:xfrm>
           <a:prstGeom prst="rect">
             <a:avLst/>
@@ -5873,18 +5822,18 @@
           <a:noFill/>
         </p:spPr>
         <p:txBody>
-          <a:bodyPr wrap="square" lIns="54000" rIns="54000" tIns="18000" bIns="18000" anchor="ctr">
+          <a:bodyPr wrap="square" lIns="43200" rIns="43200" tIns="18000" bIns="18000" anchor="ctr">
             <a:spAutoFit/>
           </a:bodyPr>
           <a:lstStyle/>
           <a:p>
             <a:pPr algn="l">
               <a:lnSpc>
-                <a:spcPct val="130000"/>
-              </a:lnSpc>
-            </a:pPr>
-            <a:r>
-              <a:rPr sz="2200" b="1">
+                <a:spcPct val="125000"/>
+              </a:lnSpc>
+            </a:pPr>
+            <a:r>
+              <a:rPr sz="2000" b="1">
                 <a:solidFill>
                   <a:srgbClr val="2E6FB8"/>
                 </a:solidFill>
@@ -5904,7 +5853,7 @@
         </p:nvSpPr>
         <p:spPr>
           <a:xfrm>
-            <a:off x="900000" y="4572000"/>
+            <a:off x="900000" y="4536000"/>
             <a:ext cx="10368000" cy="1080000"/>
           </a:xfrm>
           <a:prstGeom prst="rect">
@@ -5913,14 +5862,14 @@
           <a:noFill/>
         </p:spPr>
         <p:txBody>
-          <a:bodyPr wrap="square" lIns="54000" rIns="54000" tIns="18000" bIns="18000" anchor="ctr">
+          <a:bodyPr wrap="square" lIns="43200" rIns="43200" tIns="18000" bIns="18000" anchor="ctr">
             <a:spAutoFit/>
           </a:bodyPr>
           <a:lstStyle/>
           <a:p>
             <a:pPr algn="ctr">
               <a:lnSpc>
-                <a:spcPct val="130000"/>
+                <a:spcPct val="125000"/>
               </a:lnSpc>
             </a:pPr>
             <a:r>
@@ -5931,7 +5880,7 @@
                 <a:latin typeface="メイリオ"/>
                 <a:rFonts eastAsia="メイリオ" ascii="メイリオ" hAnsi="メイリオ"/>
               </a:rPr>
-              <a:t>資質・能力 を 育てる 授業 へ</a:t>
+              <a:t>資質・能力を 育てる 授業へ</a:t>
             </a:r>
           </a:p>
         </p:txBody>
@@ -5953,25 +5902,25 @@
           <a:noFill/>
         </p:spPr>
         <p:txBody>
-          <a:bodyPr wrap="square" lIns="54000" rIns="54000" tIns="18000" bIns="18000" anchor="ctr">
+          <a:bodyPr wrap="square" lIns="43200" rIns="43200" tIns="18000" bIns="18000" anchor="ctr">
             <a:spAutoFit/>
           </a:bodyPr>
           <a:lstStyle/>
           <a:p>
             <a:pPr algn="ctr">
               <a:lnSpc>
-                <a:spcPct val="130000"/>
-              </a:lnSpc>
-            </a:pPr>
-            <a:r>
-              <a:rPr sz="2400" b="1">
+                <a:spcPct val="125000"/>
+              </a:lnSpc>
+            </a:pPr>
+            <a:r>
+              <a:rPr sz="2200" b="1">
                 <a:solidFill>
                   <a:srgbClr val="E87A1E"/>
                 </a:solidFill>
                 <a:latin typeface="メイリオ"/>
                 <a:rFonts eastAsia="メイリオ" ascii="メイリオ" hAnsi="メイリオ"/>
               </a:rPr>
-              <a:t>種目 は、 資質・能力 を 育てるための 媒介 （手段）</a:t>
+              <a:t>─ 種目は、資質・能力を 育てる 媒介（手段） ─</a:t>
             </a:r>
           </a:p>
         </p:txBody>
@@ -5984,8 +5933,8 @@
         </p:nvSpPr>
         <p:spPr>
           <a:xfrm>
-            <a:off x="0" y="6588000"/>
-            <a:ext cx="12192119" cy="270000"/>
+            <a:off x="0" y="6606001"/>
+            <a:ext cx="12192119" cy="251999"/>
           </a:xfrm>
           <a:prstGeom prst="rect">
             <a:avLst/>
@@ -6028,8 +5977,8 @@
         </p:nvSpPr>
         <p:spPr>
           <a:xfrm>
-            <a:off x="288000" y="6588000"/>
-            <a:ext cx="7200000" cy="270000"/>
+            <a:off x="288000" y="6606001"/>
+            <a:ext cx="7200000" cy="251999"/>
           </a:xfrm>
           <a:prstGeom prst="rect">
             <a:avLst/>
@@ -6037,18 +5986,18 @@
           <a:noFill/>
         </p:spPr>
         <p:txBody>
-          <a:bodyPr wrap="square" lIns="54000" rIns="54000" tIns="18000" bIns="18000" anchor="ctr">
+          <a:bodyPr wrap="square" lIns="43200" rIns="43200" tIns="18000" bIns="18000" anchor="ctr">
             <a:spAutoFit/>
           </a:bodyPr>
           <a:lstStyle/>
           <a:p>
             <a:pPr algn="l">
               <a:lnSpc>
-                <a:spcPct val="130000"/>
-              </a:lnSpc>
-            </a:pPr>
-            <a:r>
-              <a:rPr sz="1200" b="0">
+                <a:spcPct val="125000"/>
+              </a:lnSpc>
+            </a:pPr>
+            <a:r>
+              <a:rPr sz="1100" b="0">
                 <a:solidFill>
                   <a:srgbClr val="FFFFFF"/>
                 </a:solidFill>
@@ -6068,8 +6017,8 @@
         </p:nvSpPr>
         <p:spPr>
           <a:xfrm>
-            <a:off x="4680000" y="6588000"/>
-            <a:ext cx="7200000" cy="270000"/>
+            <a:off x="4680000" y="6606001"/>
+            <a:ext cx="7200000" cy="251999"/>
           </a:xfrm>
           <a:prstGeom prst="rect">
             <a:avLst/>
@@ -6077,18 +6026,18 @@
           <a:noFill/>
         </p:spPr>
         <p:txBody>
-          <a:bodyPr wrap="square" lIns="54000" rIns="54000" tIns="18000" bIns="18000" anchor="ctr">
+          <a:bodyPr wrap="square" lIns="43200" rIns="43200" tIns="18000" bIns="18000" anchor="ctr">
             <a:spAutoFit/>
           </a:bodyPr>
           <a:lstStyle/>
           <a:p>
             <a:pPr algn="r">
               <a:lnSpc>
-                <a:spcPct val="130000"/>
-              </a:lnSpc>
-            </a:pPr>
-            <a:r>
-              <a:rPr sz="1100" b="0">
+                <a:spcPct val="125000"/>
+              </a:lnSpc>
+            </a:pPr>
+            <a:r>
+              <a:rPr sz="1000" b="0">
                 <a:solidFill>
                   <a:srgbClr val="FFFFFF"/>
                 </a:solidFill>
@@ -6127,7 +6076,7 @@
         <p:spPr>
           <a:xfrm>
             <a:off x="0" y="0"/>
-            <a:ext cx="12192119" cy="1007999"/>
+            <a:ext cx="12192119" cy="936000"/>
           </a:xfrm>
           <a:prstGeom prst="rect">
             <a:avLst/>
@@ -6170,8 +6119,8 @@
         </p:nvSpPr>
         <p:spPr>
           <a:xfrm>
-            <a:off x="0" y="1007999"/>
-            <a:ext cx="12192119" cy="79200"/>
+            <a:off x="0" y="936000"/>
+            <a:ext cx="12192119" cy="72000"/>
           </a:xfrm>
           <a:prstGeom prst="rect">
             <a:avLst/>
@@ -6215,7 +6164,7 @@
         <p:spPr>
           <a:xfrm>
             <a:off x="288000" y="198000"/>
-            <a:ext cx="864000" cy="612000"/>
+            <a:ext cx="792000" cy="540000"/>
           </a:xfrm>
           <a:prstGeom prst="roundRect">
             <a:avLst>
@@ -6261,7 +6210,7 @@
         <p:spPr>
           <a:xfrm>
             <a:off x="288000" y="198000"/>
-            <a:ext cx="864000" cy="612000"/>
+            <a:ext cx="792000" cy="540000"/>
           </a:xfrm>
           <a:prstGeom prst="rect">
             <a:avLst/>
@@ -6269,18 +6218,18 @@
           <a:noFill/>
         </p:spPr>
         <p:txBody>
-          <a:bodyPr wrap="square" lIns="54000" rIns="54000" tIns="18000" bIns="18000" anchor="ctr">
+          <a:bodyPr wrap="square" lIns="43200" rIns="43200" tIns="18000" bIns="18000" anchor="ctr">
             <a:spAutoFit/>
           </a:bodyPr>
           <a:lstStyle/>
           <a:p>
             <a:pPr algn="ctr">
               <a:lnSpc>
-                <a:spcPct val="130000"/>
-              </a:lnSpc>
-            </a:pPr>
-            <a:r>
-              <a:rPr sz="3200" b="1">
+                <a:spcPct val="125000"/>
+              </a:lnSpc>
+            </a:pPr>
+            <a:r>
+              <a:rPr sz="2800" b="1">
                 <a:solidFill>
                   <a:srgbClr val="FFFFFF"/>
                 </a:solidFill>
@@ -6300,8 +6249,8 @@
         </p:nvSpPr>
         <p:spPr>
           <a:xfrm>
-            <a:off x="1296000" y="198000"/>
-            <a:ext cx="9360000" cy="612000"/>
+            <a:off x="1224000" y="198000"/>
+            <a:ext cx="9540000" cy="540000"/>
           </a:xfrm>
           <a:prstGeom prst="rect">
             <a:avLst/>
@@ -6309,25 +6258,25 @@
           <a:noFill/>
         </p:spPr>
         <p:txBody>
-          <a:bodyPr wrap="square" lIns="54000" rIns="54000" tIns="18000" bIns="18000" anchor="ctr">
+          <a:bodyPr wrap="square" lIns="43200" rIns="43200" tIns="18000" bIns="18000" anchor="ctr">
             <a:spAutoFit/>
           </a:bodyPr>
           <a:lstStyle/>
           <a:p>
             <a:pPr algn="l">
               <a:lnSpc>
-                <a:spcPct val="130000"/>
-              </a:lnSpc>
-            </a:pPr>
-            <a:r>
-              <a:rPr sz="3200" b="1">
+                <a:spcPct val="125000"/>
+              </a:lnSpc>
+            </a:pPr>
+            <a:r>
+              <a:rPr sz="2800" b="1">
                 <a:solidFill>
                   <a:srgbClr val="FFFFFF"/>
                 </a:solidFill>
                 <a:latin typeface="メイリオ"/>
                 <a:rFonts eastAsia="メイリオ" ascii="メイリオ" hAnsi="メイリオ"/>
               </a:rPr>
-              <a:t>授 業 づ く り の 軸 「 高 次 の 資 質 ・ 能 力 」</a:t>
+              <a:t>授業の軸「高次の資質・能力」</a:t>
             </a:r>
           </a:p>
         </p:txBody>
@@ -6340,8 +6289,8 @@
         </p:nvSpPr>
         <p:spPr>
           <a:xfrm>
-            <a:off x="10872000" y="198000"/>
-            <a:ext cx="1116000" cy="612000"/>
+            <a:off x="10800000" y="198000"/>
+            <a:ext cx="1080000" cy="540000"/>
           </a:xfrm>
           <a:prstGeom prst="rect">
             <a:avLst/>
@@ -6349,18 +6298,18 @@
           <a:noFill/>
         </p:spPr>
         <p:txBody>
-          <a:bodyPr wrap="square" lIns="54000" rIns="54000" tIns="18000" bIns="18000" anchor="ctr">
+          <a:bodyPr wrap="square" lIns="43200" rIns="43200" tIns="18000" bIns="18000" anchor="ctr">
             <a:spAutoFit/>
           </a:bodyPr>
           <a:lstStyle/>
           <a:p>
             <a:pPr algn="r">
               <a:lnSpc>
-                <a:spcPct val="130000"/>
-              </a:lnSpc>
-            </a:pPr>
-            <a:r>
-              <a:rPr sz="1800" b="0">
+                <a:spcPct val="125000"/>
+              </a:lnSpc>
+            </a:pPr>
+            <a:r>
+              <a:rPr sz="1600" b="0">
                 <a:solidFill>
                   <a:srgbClr val="FFFFFF"/>
                 </a:solidFill>
@@ -6380,8 +6329,8 @@
         </p:nvSpPr>
         <p:spPr>
           <a:xfrm>
-            <a:off x="288000" y="1224000"/>
-            <a:ext cx="11627999" cy="503999"/>
+            <a:off x="288000" y="1080000"/>
+            <a:ext cx="11627999" cy="468000"/>
           </a:xfrm>
           <a:prstGeom prst="rect">
             <a:avLst/>
@@ -6389,25 +6338,25 @@
           <a:noFill/>
         </p:spPr>
         <p:txBody>
-          <a:bodyPr wrap="square" lIns="54000" rIns="54000" tIns="18000" bIns="18000" anchor="ctr">
+          <a:bodyPr wrap="square" lIns="43200" rIns="43200" tIns="18000" bIns="18000" anchor="ctr">
             <a:spAutoFit/>
           </a:bodyPr>
           <a:lstStyle/>
           <a:p>
             <a:pPr algn="ctr">
               <a:lnSpc>
-                <a:spcPct val="130000"/>
-              </a:lnSpc>
-            </a:pPr>
-            <a:r>
-              <a:rPr sz="2200" b="1">
+                <a:spcPct val="125000"/>
+              </a:lnSpc>
+            </a:pPr>
+            <a:r>
+              <a:rPr sz="2000" b="1">
                 <a:solidFill>
                   <a:srgbClr val="1F3A5F"/>
                 </a:solidFill>
                 <a:latin typeface="メイリオ"/>
                 <a:rFonts eastAsia="メイリオ" ascii="メイリオ" hAnsi="メイリオ"/>
               </a:rPr>
-              <a:t>個別の 知 ・ 技 を 関連付け、 深い学び に つなぐ 2 つ の 姿</a:t>
+              <a:t>個別の知・技を 関連付け、深い学びへ つなぐ 2つの姿</a:t>
             </a:r>
           </a:p>
         </p:txBody>
@@ -6420,8 +6369,8 @@
         </p:nvSpPr>
         <p:spPr>
           <a:xfrm>
-            <a:off x="306000" y="1908000"/>
-            <a:ext cx="5688000" cy="3780000"/>
+            <a:off x="306000" y="1692000"/>
+            <a:ext cx="5688000" cy="3960000"/>
           </a:xfrm>
           <a:prstGeom prst="roundRect">
             <a:avLst>
@@ -6468,8 +6417,8 @@
         </p:nvSpPr>
         <p:spPr>
           <a:xfrm>
-            <a:off x="306000" y="1908000"/>
-            <a:ext cx="5688000" cy="827999"/>
+            <a:off x="306000" y="1692000"/>
+            <a:ext cx="5688000" cy="792000"/>
           </a:xfrm>
           <a:prstGeom prst="rect">
             <a:avLst/>
@@ -6512,8 +6461,8 @@
         </p:nvSpPr>
         <p:spPr>
           <a:xfrm>
-            <a:off x="306000" y="1908000"/>
-            <a:ext cx="5688000" cy="827999"/>
+            <a:off x="306000" y="1692000"/>
+            <a:ext cx="5688000" cy="792000"/>
           </a:xfrm>
           <a:prstGeom prst="rect">
             <a:avLst/>
@@ -6521,18 +6470,18 @@
           <a:noFill/>
         </p:spPr>
         <p:txBody>
-          <a:bodyPr wrap="square" lIns="54000" rIns="54000" tIns="18000" bIns="18000" anchor="ctr">
+          <a:bodyPr wrap="square" lIns="43200" rIns="43200" tIns="18000" bIns="18000" anchor="ctr">
             <a:spAutoFit/>
           </a:bodyPr>
           <a:lstStyle/>
           <a:p>
             <a:pPr algn="ctr">
               <a:lnSpc>
-                <a:spcPct val="130000"/>
-              </a:lnSpc>
-            </a:pPr>
-            <a:r>
-              <a:rPr sz="3400" b="1">
+                <a:spcPct val="125000"/>
+              </a:lnSpc>
+            </a:pPr>
+            <a:r>
+              <a:rPr sz="3200" b="1">
                 <a:solidFill>
                   <a:srgbClr val="FFFFFF"/>
                 </a:solidFill>
@@ -6552,7 +6501,7 @@
         </p:nvSpPr>
         <p:spPr>
           <a:xfrm>
-            <a:off x="306000" y="2808000"/>
+            <a:off x="306000" y="2556000"/>
             <a:ext cx="5688000" cy="324000"/>
           </a:xfrm>
           <a:prstGeom prst="rect">
@@ -6561,14 +6510,14 @@
           <a:noFill/>
         </p:spPr>
         <p:txBody>
-          <a:bodyPr wrap="square" lIns="54000" rIns="54000" tIns="18000" bIns="18000" anchor="ctr">
+          <a:bodyPr wrap="square" lIns="43200" rIns="43200" tIns="18000" bIns="18000" anchor="ctr">
             <a:spAutoFit/>
           </a:bodyPr>
           <a:lstStyle/>
           <a:p>
             <a:pPr algn="ctr">
               <a:lnSpc>
-                <a:spcPct val="130000"/>
+                <a:spcPct val="125000"/>
               </a:lnSpc>
             </a:pPr>
             <a:r>
@@ -6579,7 +6528,7 @@
                 <a:latin typeface="メイリオ"/>
                 <a:rFonts eastAsia="メイリオ" ascii="メイリオ" hAnsi="メイリオ"/>
               </a:rPr>
-              <a:t>知 識 及 び 技 能</a:t>
+              <a:t>知識 及び 技能</a:t>
             </a:r>
           </a:p>
         </p:txBody>
@@ -6592,8 +6541,8 @@
         </p:nvSpPr>
         <p:spPr>
           <a:xfrm>
-            <a:off x="503999" y="3312000"/>
-            <a:ext cx="5292000" cy="2160000"/>
+            <a:off x="503999" y="3024000"/>
+            <a:ext cx="5292000" cy="2520000"/>
           </a:xfrm>
           <a:prstGeom prst="rect">
             <a:avLst/>
@@ -6601,18 +6550,18 @@
           <a:noFill/>
         </p:spPr>
         <p:txBody>
-          <a:bodyPr wrap="square" lIns="54000" rIns="54000" tIns="18000" bIns="18000" anchor="ctr">
+          <a:bodyPr wrap="square" lIns="43200" rIns="43200" tIns="18000" bIns="18000" anchor="ctr">
             <a:spAutoFit/>
           </a:bodyPr>
           <a:lstStyle/>
           <a:p>
             <a:pPr algn="ctr">
               <a:lnSpc>
-                <a:spcPct val="150000"/>
-              </a:lnSpc>
-            </a:pPr>
-            <a:r>
-              <a:rPr sz="2800" b="1">
+                <a:spcPct val="140000"/>
+              </a:lnSpc>
+            </a:pPr>
+            <a:r>
+              <a:rPr sz="2600" b="1">
                 <a:solidFill>
                   <a:srgbClr val="1F3A5F"/>
                 </a:solidFill>
@@ -6625,28 +6574,28 @@
           <a:p>
             <a:pPr algn="ctr">
               <a:lnSpc>
-                <a:spcPct val="150000"/>
-              </a:lnSpc>
-            </a:pPr>
-            <a:r>
-              <a:rPr sz="2800" b="1">
+                <a:spcPct val="140000"/>
+              </a:lnSpc>
+            </a:pPr>
+            <a:r>
+              <a:rPr sz="2600" b="1">
                 <a:solidFill>
                   <a:srgbClr val="1F3A5F"/>
                 </a:solidFill>
                 <a:latin typeface="メイリオ"/>
                 <a:rFonts eastAsia="メイリオ" ascii="メイリオ" hAnsi="メイリオ"/>
               </a:rPr>
-              <a:t>関連付け られ</a:t>
+              <a:t>関連付けられ</a:t>
             </a:r>
           </a:p>
           <a:p>
             <a:pPr algn="ctr">
               <a:lnSpc>
-                <a:spcPct val="150000"/>
-              </a:lnSpc>
-            </a:pPr>
-            <a:r>
-              <a:rPr sz="2800" b="1">
+                <a:spcPct val="140000"/>
+              </a:lnSpc>
+            </a:pPr>
+            <a:r>
+              <a:rPr sz="2600" b="1">
                 <a:solidFill>
                   <a:srgbClr val="1F3A5F"/>
                 </a:solidFill>
@@ -6659,11 +6608,11 @@
           <a:p>
             <a:pPr algn="ctr">
               <a:lnSpc>
-                <a:spcPct val="150000"/>
-              </a:lnSpc>
-            </a:pPr>
-            <a:r>
-              <a:rPr sz="2800" b="1">
+                <a:spcPct val="140000"/>
+              </a:lnSpc>
+            </a:pPr>
+            <a:r>
+              <a:rPr sz="2600" b="1">
                 <a:solidFill>
                   <a:srgbClr val="1F3A5F"/>
                 </a:solidFill>
@@ -6676,11 +6625,11 @@
           <a:p>
             <a:pPr algn="ctr">
               <a:lnSpc>
-                <a:spcPct val="150000"/>
-              </a:lnSpc>
-            </a:pPr>
-            <a:r>
-              <a:rPr sz="2800" b="1">
+                <a:spcPct val="140000"/>
+              </a:lnSpc>
+            </a:pPr>
+            <a:r>
+              <a:rPr sz="2600" b="1">
                 <a:solidFill>
                   <a:srgbClr val="1F3A5F"/>
                 </a:solidFill>
@@ -6700,8 +6649,8 @@
         </p:nvSpPr>
         <p:spPr>
           <a:xfrm>
-            <a:off x="6192000" y="1908000"/>
-            <a:ext cx="5688000" cy="3780000"/>
+            <a:off x="6192000" y="1692000"/>
+            <a:ext cx="5688000" cy="3960000"/>
           </a:xfrm>
           <a:prstGeom prst="roundRect">
             <a:avLst>
@@ -6748,8 +6697,8 @@
         </p:nvSpPr>
         <p:spPr>
           <a:xfrm>
-            <a:off x="6192000" y="1908000"/>
-            <a:ext cx="5688000" cy="827999"/>
+            <a:off x="6192000" y="1692000"/>
+            <a:ext cx="5688000" cy="792000"/>
           </a:xfrm>
           <a:prstGeom prst="rect">
             <a:avLst/>
@@ -6792,8 +6741,8 @@
         </p:nvSpPr>
         <p:spPr>
           <a:xfrm>
-            <a:off x="6192000" y="1908000"/>
-            <a:ext cx="5688000" cy="827999"/>
+            <a:off x="6192000" y="1692000"/>
+            <a:ext cx="5688000" cy="792000"/>
           </a:xfrm>
           <a:prstGeom prst="rect">
             <a:avLst/>
@@ -6801,18 +6750,18 @@
           <a:noFill/>
         </p:spPr>
         <p:txBody>
-          <a:bodyPr wrap="square" lIns="54000" rIns="54000" tIns="18000" bIns="18000" anchor="ctr">
+          <a:bodyPr wrap="square" lIns="43200" rIns="43200" tIns="18000" bIns="18000" anchor="ctr">
             <a:spAutoFit/>
           </a:bodyPr>
           <a:lstStyle/>
           <a:p>
             <a:pPr algn="ctr">
               <a:lnSpc>
-                <a:spcPct val="130000"/>
-              </a:lnSpc>
-            </a:pPr>
-            <a:r>
-              <a:rPr sz="3400" b="1">
+                <a:spcPct val="125000"/>
+              </a:lnSpc>
+            </a:pPr>
+            <a:r>
+              <a:rPr sz="3200" b="1">
                 <a:solidFill>
                   <a:srgbClr val="FFFFFF"/>
                 </a:solidFill>
@@ -6832,7 +6781,7 @@
         </p:nvSpPr>
         <p:spPr>
           <a:xfrm>
-            <a:off x="6192000" y="2808000"/>
+            <a:off x="6192000" y="2556000"/>
             <a:ext cx="5688000" cy="324000"/>
           </a:xfrm>
           <a:prstGeom prst="rect">
@@ -6841,14 +6790,14 @@
           <a:noFill/>
         </p:spPr>
         <p:txBody>
-          <a:bodyPr wrap="square" lIns="54000" rIns="54000" tIns="18000" bIns="18000" anchor="ctr">
+          <a:bodyPr wrap="square" lIns="43200" rIns="43200" tIns="18000" bIns="18000" anchor="ctr">
             <a:spAutoFit/>
           </a:bodyPr>
           <a:lstStyle/>
           <a:p>
             <a:pPr algn="ctr">
               <a:lnSpc>
-                <a:spcPct val="130000"/>
+                <a:spcPct val="125000"/>
               </a:lnSpc>
             </a:pPr>
             <a:r>
@@ -6859,7 +6808,7 @@
                 <a:latin typeface="メイリオ"/>
                 <a:rFonts eastAsia="メイリオ" ascii="メイリオ" hAnsi="メイリオ"/>
               </a:rPr>
-              <a:t>思 ・ 判 ・ 表</a:t>
+              <a:t>思考力・判断力・表現力 等</a:t>
             </a:r>
           </a:p>
         </p:txBody>
@@ -6872,8 +6821,8 @@
         </p:nvSpPr>
         <p:spPr>
           <a:xfrm>
-            <a:off x="6390000" y="3312000"/>
-            <a:ext cx="5292000" cy="2160000"/>
+            <a:off x="6390000" y="3024000"/>
+            <a:ext cx="5292000" cy="2520000"/>
           </a:xfrm>
           <a:prstGeom prst="rect">
             <a:avLst/>
@@ -6881,52 +6830,52 @@
           <a:noFill/>
         </p:spPr>
         <p:txBody>
-          <a:bodyPr wrap="square" lIns="54000" rIns="54000" tIns="18000" bIns="18000" anchor="ctr">
+          <a:bodyPr wrap="square" lIns="43200" rIns="43200" tIns="18000" bIns="18000" anchor="ctr">
             <a:spAutoFit/>
           </a:bodyPr>
           <a:lstStyle/>
           <a:p>
             <a:pPr algn="ctr">
               <a:lnSpc>
-                <a:spcPct val="150000"/>
-              </a:lnSpc>
-            </a:pPr>
-            <a:r>
-              <a:rPr sz="2800" b="1">
+                <a:spcPct val="140000"/>
+              </a:lnSpc>
+            </a:pPr>
+            <a:r>
+              <a:rPr sz="2600" b="1">
                 <a:solidFill>
                   <a:srgbClr val="2E8B57"/>
                 </a:solidFill>
                 <a:latin typeface="メイリオ"/>
                 <a:rFonts eastAsia="メイリオ" ascii="メイリオ" hAnsi="メイリオ"/>
               </a:rPr>
-              <a:t>状況に応じ 選び</a:t>
+              <a:t>状況に応じて 選び</a:t>
             </a:r>
           </a:p>
           <a:p>
             <a:pPr algn="ctr">
               <a:lnSpc>
-                <a:spcPct val="150000"/>
-              </a:lnSpc>
-            </a:pPr>
-            <a:r>
-              <a:rPr sz="2800" b="1">
+                <a:spcPct val="140000"/>
+              </a:lnSpc>
+            </a:pPr>
+            <a:r>
+              <a:rPr sz="2600" b="1">
                 <a:solidFill>
                   <a:srgbClr val="2E8B57"/>
                 </a:solidFill>
                 <a:latin typeface="メイリオ"/>
                 <a:rFonts eastAsia="メイリオ" ascii="メイリオ" hAnsi="メイリオ"/>
               </a:rPr>
-              <a:t>仲間と 課題解決 する 姿</a:t>
+              <a:t>仲間と 課題解決する 姿</a:t>
             </a:r>
           </a:p>
           <a:p>
             <a:pPr algn="ctr">
               <a:lnSpc>
-                <a:spcPct val="150000"/>
-              </a:lnSpc>
-            </a:pPr>
-            <a:r>
-              <a:rPr sz="2800" b="1">
+                <a:spcPct val="140000"/>
+              </a:lnSpc>
+            </a:pPr>
+            <a:r>
+              <a:rPr sz="2600" b="1">
                 <a:solidFill>
                   <a:srgbClr val="2E8B57"/>
                 </a:solidFill>
@@ -6939,11 +6888,11 @@
           <a:p>
             <a:pPr algn="ctr">
               <a:lnSpc>
-                <a:spcPct val="150000"/>
-              </a:lnSpc>
-            </a:pPr>
-            <a:r>
-              <a:rPr sz="2800" b="1">
+                <a:spcPct val="140000"/>
+              </a:lnSpc>
+            </a:pPr>
+            <a:r>
+              <a:rPr sz="2600" b="1">
                 <a:solidFill>
                   <a:srgbClr val="2E8B57"/>
                 </a:solidFill>
@@ -6964,7 +6913,7 @@
         <p:spPr>
           <a:xfrm>
             <a:off x="288000" y="5903999"/>
-            <a:ext cx="11627999" cy="503999"/>
+            <a:ext cx="11627999" cy="468000"/>
           </a:xfrm>
           <a:prstGeom prst="rect">
             <a:avLst/>
@@ -6972,25 +6921,25 @@
           <a:noFill/>
         </p:spPr>
         <p:txBody>
-          <a:bodyPr wrap="square" lIns="54000" rIns="54000" tIns="18000" bIns="18000" anchor="ctr">
+          <a:bodyPr wrap="square" lIns="43200" rIns="43200" tIns="18000" bIns="18000" anchor="ctr">
             <a:spAutoFit/>
           </a:bodyPr>
           <a:lstStyle/>
           <a:p>
             <a:pPr algn="ctr">
               <a:lnSpc>
-                <a:spcPct val="130000"/>
-              </a:lnSpc>
-            </a:pPr>
-            <a:r>
-              <a:rPr sz="2400" b="1">
+                <a:spcPct val="125000"/>
+              </a:lnSpc>
+            </a:pPr>
+            <a:r>
+              <a:rPr sz="2200" b="1">
                 <a:solidFill>
                   <a:srgbClr val="E87A1E"/>
                 </a:solidFill>
                 <a:latin typeface="メイリオ"/>
                 <a:rFonts eastAsia="メイリオ" ascii="メイリオ" hAnsi="メイリオ"/>
               </a:rPr>
-              <a:t>▶  2 つ を セット で、 単元 を 通して 育てる</a:t>
+              <a:t>▶  2つを セット で、 単元を通して 育てる</a:t>
             </a:r>
           </a:p>
         </p:txBody>
@@ -7003,8 +6952,8 @@
         </p:nvSpPr>
         <p:spPr>
           <a:xfrm>
-            <a:off x="0" y="6588000"/>
-            <a:ext cx="12192119" cy="270000"/>
+            <a:off x="0" y="6606001"/>
+            <a:ext cx="12192119" cy="251999"/>
           </a:xfrm>
           <a:prstGeom prst="rect">
             <a:avLst/>
@@ -7047,8 +6996,8 @@
         </p:nvSpPr>
         <p:spPr>
           <a:xfrm>
-            <a:off x="288000" y="6588000"/>
-            <a:ext cx="7200000" cy="270000"/>
+            <a:off x="288000" y="6606001"/>
+            <a:ext cx="7200000" cy="251999"/>
           </a:xfrm>
           <a:prstGeom prst="rect">
             <a:avLst/>
@@ -7056,18 +7005,18 @@
           <a:noFill/>
         </p:spPr>
         <p:txBody>
-          <a:bodyPr wrap="square" lIns="54000" rIns="54000" tIns="18000" bIns="18000" anchor="ctr">
+          <a:bodyPr wrap="square" lIns="43200" rIns="43200" tIns="18000" bIns="18000" anchor="ctr">
             <a:spAutoFit/>
           </a:bodyPr>
           <a:lstStyle/>
           <a:p>
             <a:pPr algn="l">
               <a:lnSpc>
-                <a:spcPct val="130000"/>
-              </a:lnSpc>
-            </a:pPr>
-            <a:r>
-              <a:rPr sz="1200" b="0">
+                <a:spcPct val="125000"/>
+              </a:lnSpc>
+            </a:pPr>
+            <a:r>
+              <a:rPr sz="1100" b="0">
                 <a:solidFill>
                   <a:srgbClr val="FFFFFF"/>
                 </a:solidFill>
@@ -7087,8 +7036,8 @@
         </p:nvSpPr>
         <p:spPr>
           <a:xfrm>
-            <a:off x="4680000" y="6588000"/>
-            <a:ext cx="7200000" cy="270000"/>
+            <a:off x="4680000" y="6606001"/>
+            <a:ext cx="7200000" cy="251999"/>
           </a:xfrm>
           <a:prstGeom prst="rect">
             <a:avLst/>
@@ -7096,18 +7045,18 @@
           <a:noFill/>
         </p:spPr>
         <p:txBody>
-          <a:bodyPr wrap="square" lIns="54000" rIns="54000" tIns="18000" bIns="18000" anchor="ctr">
+          <a:bodyPr wrap="square" lIns="43200" rIns="43200" tIns="18000" bIns="18000" anchor="ctr">
             <a:spAutoFit/>
           </a:bodyPr>
           <a:lstStyle/>
           <a:p>
             <a:pPr algn="r">
               <a:lnSpc>
-                <a:spcPct val="130000"/>
-              </a:lnSpc>
-            </a:pPr>
-            <a:r>
-              <a:rPr sz="1100" b="0">
+                <a:spcPct val="125000"/>
+              </a:lnSpc>
+            </a:pPr>
+            <a:r>
+              <a:rPr sz="1000" b="0">
                 <a:solidFill>
                   <a:srgbClr val="FFFFFF"/>
                 </a:solidFill>
@@ -7146,7 +7095,7 @@
         <p:spPr>
           <a:xfrm>
             <a:off x="0" y="0"/>
-            <a:ext cx="12192119" cy="1007999"/>
+            <a:ext cx="12192119" cy="936000"/>
           </a:xfrm>
           <a:prstGeom prst="rect">
             <a:avLst/>
@@ -7189,8 +7138,8 @@
         </p:nvSpPr>
         <p:spPr>
           <a:xfrm>
-            <a:off x="0" y="1007999"/>
-            <a:ext cx="12192119" cy="79200"/>
+            <a:off x="0" y="936000"/>
+            <a:ext cx="12192119" cy="72000"/>
           </a:xfrm>
           <a:prstGeom prst="rect">
             <a:avLst/>
@@ -7234,7 +7183,7 @@
         <p:spPr>
           <a:xfrm>
             <a:off x="288000" y="198000"/>
-            <a:ext cx="864000" cy="612000"/>
+            <a:ext cx="792000" cy="540000"/>
           </a:xfrm>
           <a:prstGeom prst="roundRect">
             <a:avLst>
@@ -7280,7 +7229,7 @@
         <p:spPr>
           <a:xfrm>
             <a:off x="288000" y="198000"/>
-            <a:ext cx="864000" cy="612000"/>
+            <a:ext cx="792000" cy="540000"/>
           </a:xfrm>
           <a:prstGeom prst="rect">
             <a:avLst/>
@@ -7288,18 +7237,18 @@
           <a:noFill/>
         </p:spPr>
         <p:txBody>
-          <a:bodyPr wrap="square" lIns="54000" rIns="54000" tIns="18000" bIns="18000" anchor="ctr">
+          <a:bodyPr wrap="square" lIns="43200" rIns="43200" tIns="18000" bIns="18000" anchor="ctr">
             <a:spAutoFit/>
           </a:bodyPr>
           <a:lstStyle/>
           <a:p>
             <a:pPr algn="ctr">
               <a:lnSpc>
-                <a:spcPct val="130000"/>
-              </a:lnSpc>
-            </a:pPr>
-            <a:r>
-              <a:rPr sz="3200" b="1">
+                <a:spcPct val="125000"/>
+              </a:lnSpc>
+            </a:pPr>
+            <a:r>
+              <a:rPr sz="2800" b="1">
                 <a:solidFill>
                   <a:srgbClr val="FFFFFF"/>
                 </a:solidFill>
@@ -7319,8 +7268,8 @@
         </p:nvSpPr>
         <p:spPr>
           <a:xfrm>
-            <a:off x="1296000" y="198000"/>
-            <a:ext cx="9360000" cy="612000"/>
+            <a:off x="1224000" y="198000"/>
+            <a:ext cx="9540000" cy="540000"/>
           </a:xfrm>
           <a:prstGeom prst="rect">
             <a:avLst/>
@@ -7328,25 +7277,25 @@
           <a:noFill/>
         </p:spPr>
         <p:txBody>
-          <a:bodyPr wrap="square" lIns="54000" rIns="54000" tIns="18000" bIns="18000" anchor="ctr">
+          <a:bodyPr wrap="square" lIns="43200" rIns="43200" tIns="18000" bIns="18000" anchor="ctr">
             <a:spAutoFit/>
           </a:bodyPr>
           <a:lstStyle/>
           <a:p>
             <a:pPr algn="l">
               <a:lnSpc>
-                <a:spcPct val="130000"/>
-              </a:lnSpc>
-            </a:pPr>
-            <a:r>
-              <a:rPr sz="3200" b="1">
+                <a:spcPct val="125000"/>
+              </a:lnSpc>
+            </a:pPr>
+            <a:r>
+              <a:rPr sz="2800" b="1">
                 <a:solidFill>
                   <a:srgbClr val="FFFFFF"/>
                 </a:solidFill>
                 <a:latin typeface="メイリオ"/>
                 <a:rFonts eastAsia="メイリオ" ascii="メイリオ" hAnsi="メイリオ"/>
               </a:rPr>
-              <a:t>学 習 指 導 要 領 の 示 し 方 が 変 わ る</a:t>
+              <a:t>学習指導要領の 示し方が変わる</a:t>
             </a:r>
           </a:p>
         </p:txBody>
@@ -7359,8 +7308,8 @@
         </p:nvSpPr>
         <p:spPr>
           <a:xfrm>
-            <a:off x="10872000" y="198000"/>
-            <a:ext cx="1116000" cy="612000"/>
+            <a:off x="10800000" y="198000"/>
+            <a:ext cx="1080000" cy="540000"/>
           </a:xfrm>
           <a:prstGeom prst="rect">
             <a:avLst/>
@@ -7368,18 +7317,18 @@
           <a:noFill/>
         </p:spPr>
         <p:txBody>
-          <a:bodyPr wrap="square" lIns="54000" rIns="54000" tIns="18000" bIns="18000" anchor="ctr">
+          <a:bodyPr wrap="square" lIns="43200" rIns="43200" tIns="18000" bIns="18000" anchor="ctr">
             <a:spAutoFit/>
           </a:bodyPr>
           <a:lstStyle/>
           <a:p>
             <a:pPr algn="r">
               <a:lnSpc>
-                <a:spcPct val="130000"/>
-              </a:lnSpc>
-            </a:pPr>
-            <a:r>
-              <a:rPr sz="1800" b="0">
+                <a:spcPct val="125000"/>
+              </a:lnSpc>
+            </a:pPr>
+            <a:r>
+              <a:rPr sz="1600" b="0">
                 <a:solidFill>
                   <a:srgbClr val="FFFFFF"/>
                 </a:solidFill>
@@ -7399,8 +7348,8 @@
         </p:nvSpPr>
         <p:spPr>
           <a:xfrm>
-            <a:off x="288000" y="1224000"/>
-            <a:ext cx="11627999" cy="503999"/>
+            <a:off x="288000" y="1080000"/>
+            <a:ext cx="11627999" cy="468000"/>
           </a:xfrm>
           <a:prstGeom prst="rect">
             <a:avLst/>
@@ -7408,25 +7357,25 @@
           <a:noFill/>
         </p:spPr>
         <p:txBody>
-          <a:bodyPr wrap="square" lIns="54000" rIns="54000" tIns="18000" bIns="18000" anchor="ctr">
+          <a:bodyPr wrap="square" lIns="43200" rIns="43200" tIns="18000" bIns="18000" anchor="ctr">
             <a:spAutoFit/>
           </a:bodyPr>
           <a:lstStyle/>
           <a:p>
             <a:pPr algn="ctr">
               <a:lnSpc>
-                <a:spcPct val="130000"/>
-              </a:lnSpc>
-            </a:pPr>
-            <a:r>
-              <a:rPr sz="2200" b="1">
+                <a:spcPct val="125000"/>
+              </a:lnSpc>
+            </a:pPr>
+            <a:r>
+              <a:rPr sz="2000" b="1">
                 <a:solidFill>
                   <a:srgbClr val="1F3A5F"/>
                 </a:solidFill>
                 <a:latin typeface="メイリオ"/>
                 <a:rFonts eastAsia="メイリオ" ascii="メイリオ" hAnsi="メイリオ"/>
               </a:rPr>
-              <a:t>発達段階 に 応じ、 示し方 を 工夫する 方向で 検討中</a:t>
+              <a:t>発達段階に応じ、示し方を 工夫する方向 で検討中</a:t>
             </a:r>
           </a:p>
         </p:txBody>
@@ -7439,8 +7388,8 @@
         </p:nvSpPr>
         <p:spPr>
           <a:xfrm>
-            <a:off x="306000" y="1872000"/>
-            <a:ext cx="5688000" cy="4176000"/>
+            <a:off x="306000" y="1692000"/>
+            <a:ext cx="5688000" cy="4320000"/>
           </a:xfrm>
           <a:prstGeom prst="roundRect">
             <a:avLst>
@@ -7487,7 +7436,7 @@
         </p:nvSpPr>
         <p:spPr>
           <a:xfrm>
-            <a:off x="306000" y="1872000"/>
+            <a:off x="306000" y="1692000"/>
             <a:ext cx="5688000" cy="792000"/>
           </a:xfrm>
           <a:prstGeom prst="rect">
@@ -7531,7 +7480,7 @@
         </p:nvSpPr>
         <p:spPr>
           <a:xfrm>
-            <a:off x="306000" y="1872000"/>
+            <a:off x="306000" y="1692000"/>
             <a:ext cx="5688000" cy="792000"/>
           </a:xfrm>
           <a:prstGeom prst="rect">
@@ -7540,25 +7489,25 @@
           <a:noFill/>
         </p:spPr>
         <p:txBody>
-          <a:bodyPr wrap="square" lIns="54000" rIns="54000" tIns="18000" bIns="18000" anchor="ctr">
+          <a:bodyPr wrap="square" lIns="43200" rIns="43200" tIns="18000" bIns="18000" anchor="ctr">
             <a:spAutoFit/>
           </a:bodyPr>
           <a:lstStyle/>
           <a:p>
             <a:pPr algn="ctr">
               <a:lnSpc>
-                <a:spcPct val="130000"/>
-              </a:lnSpc>
-            </a:pPr>
-            <a:r>
-              <a:rPr sz="3200" b="1">
+                <a:spcPct val="125000"/>
+              </a:lnSpc>
+            </a:pPr>
+            <a:r>
+              <a:rPr sz="3400" b="1">
                 <a:solidFill>
                   <a:srgbClr val="FFFFFF"/>
                 </a:solidFill>
                 <a:latin typeface="メイリオ"/>
                 <a:rFonts eastAsia="メイリオ" ascii="メイリオ" hAnsi="メイリオ"/>
               </a:rPr>
-              <a:t>小  1  〜  4  年</a:t>
+              <a:t>小1 〜 4年</a:t>
             </a:r>
           </a:p>
         </p:txBody>
@@ -7571,7 +7520,7 @@
         </p:nvSpPr>
         <p:spPr>
           <a:xfrm>
-            <a:off x="306000" y="2700000"/>
+            <a:off x="306000" y="2520000"/>
             <a:ext cx="5688000" cy="360000"/>
           </a:xfrm>
           <a:prstGeom prst="rect">
@@ -7580,14 +7529,14 @@
           <a:noFill/>
         </p:spPr>
         <p:txBody>
-          <a:bodyPr wrap="square" lIns="54000" rIns="54000" tIns="18000" bIns="18000" anchor="ctr">
+          <a:bodyPr wrap="square" lIns="43200" rIns="43200" tIns="18000" bIns="18000" anchor="ctr">
             <a:spAutoFit/>
           </a:bodyPr>
           <a:lstStyle/>
           <a:p>
             <a:pPr algn="ctr">
               <a:lnSpc>
-                <a:spcPct val="130000"/>
+                <a:spcPct val="125000"/>
               </a:lnSpc>
             </a:pPr>
             <a:r>
@@ -7598,7 +7547,7 @@
                 <a:latin typeface="メイリオ"/>
                 <a:rFonts eastAsia="メイリオ" ascii="メイリオ" hAnsi="メイリオ"/>
               </a:rPr>
-              <a:t>運動の 基礎 を 培う 時期</a:t>
+              <a:t>運動の基礎を培う時期</a:t>
             </a:r>
           </a:p>
         </p:txBody>
@@ -7611,8 +7560,8 @@
         </p:nvSpPr>
         <p:spPr>
           <a:xfrm>
-            <a:off x="503999" y="3240000"/>
-            <a:ext cx="5292000" cy="2664000"/>
+            <a:off x="503999" y="3060000"/>
+            <a:ext cx="5292000" cy="2880000"/>
           </a:xfrm>
           <a:prstGeom prst="rect">
             <a:avLst/>
@@ -7620,18 +7569,18 @@
           <a:noFill/>
         </p:spPr>
         <p:txBody>
-          <a:bodyPr wrap="square" lIns="54000" rIns="54000" tIns="18000" bIns="18000" anchor="ctr">
+          <a:bodyPr wrap="square" lIns="43200" rIns="43200" tIns="18000" bIns="18000" anchor="ctr">
             <a:spAutoFit/>
           </a:bodyPr>
           <a:lstStyle/>
           <a:p>
             <a:pPr algn="ctr">
               <a:lnSpc>
-                <a:spcPct val="150000"/>
-              </a:lnSpc>
-            </a:pPr>
-            <a:r>
-              <a:rPr sz="2600" b="1">
+                <a:spcPct val="140000"/>
+              </a:lnSpc>
+            </a:pPr>
+            <a:r>
+              <a:rPr sz="2800" b="1">
                 <a:solidFill>
                   <a:srgbClr val="2B2B2B"/>
                 </a:solidFill>
@@ -7644,11 +7593,11 @@
           <a:p>
             <a:pPr algn="ctr">
               <a:lnSpc>
-                <a:spcPct val="150000"/>
-              </a:lnSpc>
-            </a:pPr>
-            <a:r>
-              <a:rPr sz="2600" b="1">
+                <a:spcPct val="140000"/>
+              </a:lnSpc>
+            </a:pPr>
+            <a:r>
+              <a:rPr sz="2800" b="1">
                 <a:solidFill>
                   <a:srgbClr val="2B2B2B"/>
                 </a:solidFill>
@@ -7661,69 +7610,35 @@
           <a:p>
             <a:pPr algn="ctr">
               <a:lnSpc>
-                <a:spcPct val="150000"/>
-              </a:lnSpc>
-            </a:pPr>
-            <a:r>
-              <a:rPr sz="2600" b="1">
+                <a:spcPct val="140000"/>
+              </a:lnSpc>
+            </a:pPr>
+            <a:r>
+              <a:rPr sz="2800" b="1">
                 <a:solidFill>
                   <a:srgbClr val="2B2B2B"/>
                 </a:solidFill>
                 <a:latin typeface="メイリオ"/>
                 <a:rFonts eastAsia="メイリオ" ascii="メイリオ" hAnsi="メイリオ"/>
               </a:rPr>
-              <a:t/>
+              <a:t>を軸に</a:t>
             </a:r>
           </a:p>
           <a:p>
             <a:pPr algn="ctr">
               <a:lnSpc>
-                <a:spcPct val="150000"/>
-              </a:lnSpc>
-            </a:pPr>
-            <a:r>
-              <a:rPr sz="2600" b="1">
+                <a:spcPct val="140000"/>
+              </a:lnSpc>
+            </a:pPr>
+            <a:r>
+              <a:rPr sz="2800" b="1">
                 <a:solidFill>
                   <a:srgbClr val="2B2B2B"/>
                 </a:solidFill>
                 <a:latin typeface="メイリオ"/>
                 <a:rFonts eastAsia="メイリオ" ascii="メイリオ" hAnsi="メイリオ"/>
               </a:rPr>
-              <a:t>を 軸 に</a:t>
-            </a:r>
-          </a:p>
-          <a:p>
-            <a:pPr algn="ctr">
-              <a:lnSpc>
-                <a:spcPct val="150000"/>
-              </a:lnSpc>
-            </a:pPr>
-            <a:r>
-              <a:rPr sz="2600" b="1">
-                <a:solidFill>
-                  <a:srgbClr val="2B2B2B"/>
-                </a:solidFill>
-                <a:latin typeface="メイリオ"/>
-                <a:rFonts eastAsia="メイリオ" ascii="メイリオ" hAnsi="メイリオ"/>
-              </a:rPr>
-              <a:t>資質・能力 を</a:t>
-            </a:r>
-          </a:p>
-          <a:p>
-            <a:pPr algn="ctr">
-              <a:lnSpc>
-                <a:spcPct val="150000"/>
-              </a:lnSpc>
-            </a:pPr>
-            <a:r>
-              <a:rPr sz="2600" b="1">
-                <a:solidFill>
-                  <a:srgbClr val="2B2B2B"/>
-                </a:solidFill>
-                <a:latin typeface="メイリオ"/>
-                <a:rFonts eastAsia="メイリオ" ascii="メイリオ" hAnsi="メイリオ"/>
-              </a:rPr>
-              <a:t>分かりやすく 示す</a:t>
+              <a:t>資質・能力を示す</a:t>
             </a:r>
           </a:p>
         </p:txBody>
@@ -7736,8 +7651,8 @@
         </p:nvSpPr>
         <p:spPr>
           <a:xfrm>
-            <a:off x="6192000" y="1872000"/>
-            <a:ext cx="5688000" cy="4176000"/>
+            <a:off x="6192000" y="1692000"/>
+            <a:ext cx="5688000" cy="4320000"/>
           </a:xfrm>
           <a:prstGeom prst="roundRect">
             <a:avLst>
@@ -7784,7 +7699,7 @@
         </p:nvSpPr>
         <p:spPr>
           <a:xfrm>
-            <a:off x="6192000" y="1872000"/>
+            <a:off x="6192000" y="1692000"/>
             <a:ext cx="5688000" cy="792000"/>
           </a:xfrm>
           <a:prstGeom prst="rect">
@@ -7828,7 +7743,7 @@
         </p:nvSpPr>
         <p:spPr>
           <a:xfrm>
-            <a:off x="6192000" y="1872000"/>
+            <a:off x="6192000" y="1692000"/>
             <a:ext cx="5688000" cy="792000"/>
           </a:xfrm>
           <a:prstGeom prst="rect">
@@ -7837,25 +7752,25 @@
           <a:noFill/>
         </p:spPr>
         <p:txBody>
-          <a:bodyPr wrap="square" lIns="54000" rIns="54000" tIns="18000" bIns="18000" anchor="ctr">
+          <a:bodyPr wrap="square" lIns="43200" rIns="43200" tIns="18000" bIns="18000" anchor="ctr">
             <a:spAutoFit/>
           </a:bodyPr>
           <a:lstStyle/>
           <a:p>
             <a:pPr algn="ctr">
               <a:lnSpc>
-                <a:spcPct val="130000"/>
-              </a:lnSpc>
-            </a:pPr>
-            <a:r>
-              <a:rPr sz="3200" b="1">
+                <a:spcPct val="125000"/>
+              </a:lnSpc>
+            </a:pPr>
+            <a:r>
+              <a:rPr sz="3400" b="1">
                 <a:solidFill>
                   <a:srgbClr val="FFFFFF"/>
                 </a:solidFill>
                 <a:latin typeface="メイリオ"/>
                 <a:rFonts eastAsia="メイリオ" ascii="メイリオ" hAnsi="メイリオ"/>
               </a:rPr>
-              <a:t>小  5  以  降</a:t>
+              <a:t>小5 以降</a:t>
             </a:r>
           </a:p>
         </p:txBody>
@@ -7868,7 +7783,7 @@
         </p:nvSpPr>
         <p:spPr>
           <a:xfrm>
-            <a:off x="6192000" y="2700000"/>
+            <a:off x="6192000" y="2520000"/>
             <a:ext cx="5688000" cy="360000"/>
           </a:xfrm>
           <a:prstGeom prst="rect">
@@ -7877,14 +7792,14 @@
           <a:noFill/>
         </p:spPr>
         <p:txBody>
-          <a:bodyPr wrap="square" lIns="54000" rIns="54000" tIns="18000" bIns="18000" anchor="ctr">
+          <a:bodyPr wrap="square" lIns="43200" rIns="43200" tIns="18000" bIns="18000" anchor="ctr">
             <a:spAutoFit/>
           </a:bodyPr>
           <a:lstStyle/>
           <a:p>
             <a:pPr algn="ctr">
               <a:lnSpc>
-                <a:spcPct val="130000"/>
+                <a:spcPct val="125000"/>
               </a:lnSpc>
             </a:pPr>
             <a:r>
@@ -7895,7 +7810,7 @@
                 <a:latin typeface="メイリオ"/>
                 <a:rFonts eastAsia="メイリオ" ascii="メイリオ" hAnsi="メイリオ"/>
               </a:rPr>
-              <a:t>スポーツ を 豊かに 経験する 時期</a:t>
+              <a:t>スポーツを 豊かに経験する時期</a:t>
             </a:r>
           </a:p>
         </p:txBody>
@@ -7908,8 +7823,8 @@
         </p:nvSpPr>
         <p:spPr>
           <a:xfrm>
-            <a:off x="6390000" y="3240000"/>
-            <a:ext cx="5292000" cy="2664000"/>
+            <a:off x="6390000" y="3060000"/>
+            <a:ext cx="5292000" cy="2880000"/>
           </a:xfrm>
           <a:prstGeom prst="rect">
             <a:avLst/>
@@ -7917,110 +7832,76 @@
           <a:noFill/>
         </p:spPr>
         <p:txBody>
-          <a:bodyPr wrap="square" lIns="54000" rIns="54000" tIns="18000" bIns="18000" anchor="ctr">
+          <a:bodyPr wrap="square" lIns="43200" rIns="43200" tIns="18000" bIns="18000" anchor="ctr">
             <a:spAutoFit/>
           </a:bodyPr>
           <a:lstStyle/>
           <a:p>
             <a:pPr algn="ctr">
               <a:lnSpc>
-                <a:spcPct val="150000"/>
-              </a:lnSpc>
-            </a:pPr>
-            <a:r>
-              <a:rPr sz="2600" b="1">
+                <a:spcPct val="140000"/>
+              </a:lnSpc>
+            </a:pPr>
+            <a:r>
+              <a:rPr sz="2800" b="1">
                 <a:solidFill>
                   <a:srgbClr val="2B2B2B"/>
                 </a:solidFill>
                 <a:latin typeface="メイリオ"/>
                 <a:rFonts eastAsia="メイリオ" ascii="メイリオ" hAnsi="メイリオ"/>
               </a:rPr>
-              <a:t>種目 の 示し方 を</a:t>
+              <a:t>種目の示し方を</a:t>
             </a:r>
           </a:p>
           <a:p>
             <a:pPr algn="ctr">
               <a:lnSpc>
-                <a:spcPct val="150000"/>
-              </a:lnSpc>
-            </a:pPr>
-            <a:r>
-              <a:rPr sz="2600" b="1">
+                <a:spcPct val="140000"/>
+              </a:lnSpc>
+            </a:pPr>
+            <a:r>
+              <a:rPr sz="2800" b="1">
                 <a:solidFill>
                   <a:srgbClr val="2B2B2B"/>
                 </a:solidFill>
                 <a:latin typeface="メイリオ"/>
                 <a:rFonts eastAsia="メイリオ" ascii="メイリオ" hAnsi="メイリオ"/>
               </a:rPr>
-              <a:t>柔軟 に</a:t>
+              <a:t>柔軟にして</a:t>
             </a:r>
           </a:p>
           <a:p>
             <a:pPr algn="ctr">
               <a:lnSpc>
-                <a:spcPct val="150000"/>
-              </a:lnSpc>
-            </a:pPr>
-            <a:r>
-              <a:rPr sz="2600" b="1">
+                <a:spcPct val="140000"/>
+              </a:lnSpc>
+            </a:pPr>
+            <a:r>
+              <a:rPr sz="2800" b="1">
                 <a:solidFill>
                   <a:srgbClr val="2B2B2B"/>
                 </a:solidFill>
                 <a:latin typeface="メイリオ"/>
                 <a:rFonts eastAsia="メイリオ" ascii="メイリオ" hAnsi="メイリオ"/>
               </a:rPr>
-              <a:t/>
+              <a:t>教師の創意工夫を</a:t>
             </a:r>
           </a:p>
           <a:p>
             <a:pPr algn="ctr">
               <a:lnSpc>
-                <a:spcPct val="150000"/>
-              </a:lnSpc>
-            </a:pPr>
-            <a:r>
-              <a:rPr sz="2600" b="1">
+                <a:spcPct val="140000"/>
+              </a:lnSpc>
+            </a:pPr>
+            <a:r>
+              <a:rPr sz="2800" b="1">
                 <a:solidFill>
                   <a:srgbClr val="2B2B2B"/>
                 </a:solidFill>
                 <a:latin typeface="メイリオ"/>
                 <a:rFonts eastAsia="メイリオ" ascii="メイリオ" hAnsi="メイリオ"/>
               </a:rPr>
-              <a:t>教師 の 創意工夫</a:t>
-            </a:r>
-          </a:p>
-          <a:p>
-            <a:pPr algn="ctr">
-              <a:lnSpc>
-                <a:spcPct val="150000"/>
-              </a:lnSpc>
-            </a:pPr>
-            <a:r>
-              <a:rPr sz="2600" b="1">
-                <a:solidFill>
-                  <a:srgbClr val="2B2B2B"/>
-                </a:solidFill>
-                <a:latin typeface="メイリオ"/>
-                <a:rFonts eastAsia="メイリオ" ascii="メイリオ" hAnsi="メイリオ"/>
-              </a:rPr>
-              <a:t>余白 を</a:t>
-            </a:r>
-          </a:p>
-          <a:p>
-            <a:pPr algn="ctr">
-              <a:lnSpc>
-                <a:spcPct val="150000"/>
-              </a:lnSpc>
-            </a:pPr>
-            <a:r>
-              <a:rPr sz="2600" b="1">
-                <a:solidFill>
-                  <a:srgbClr val="2B2B2B"/>
-                </a:solidFill>
-                <a:latin typeface="メイリオ"/>
-                <a:rFonts eastAsia="メイリオ" ascii="メイリオ" hAnsi="メイリオ"/>
-              </a:rPr>
-              <a:t>最大限 引き出す</a:t>
+              <a:t>最大限引き出す</a:t>
             </a:r>
           </a:p>
         </p:txBody>
@@ -8033,8 +7914,8 @@
         </p:nvSpPr>
         <p:spPr>
           <a:xfrm>
-            <a:off x="0" y="6588000"/>
-            <a:ext cx="12192119" cy="270000"/>
+            <a:off x="0" y="6606001"/>
+            <a:ext cx="12192119" cy="251999"/>
           </a:xfrm>
           <a:prstGeom prst="rect">
             <a:avLst/>
@@ -8077,8 +7958,8 @@
         </p:nvSpPr>
         <p:spPr>
           <a:xfrm>
-            <a:off x="288000" y="6588000"/>
-            <a:ext cx="7200000" cy="270000"/>
+            <a:off x="288000" y="6606001"/>
+            <a:ext cx="7200000" cy="251999"/>
           </a:xfrm>
           <a:prstGeom prst="rect">
             <a:avLst/>
@@ -8086,18 +7967,18 @@
           <a:noFill/>
         </p:spPr>
         <p:txBody>
-          <a:bodyPr wrap="square" lIns="54000" rIns="54000" tIns="18000" bIns="18000" anchor="ctr">
+          <a:bodyPr wrap="square" lIns="43200" rIns="43200" tIns="18000" bIns="18000" anchor="ctr">
             <a:spAutoFit/>
           </a:bodyPr>
           <a:lstStyle/>
           <a:p>
             <a:pPr algn="l">
               <a:lnSpc>
-                <a:spcPct val="130000"/>
-              </a:lnSpc>
-            </a:pPr>
-            <a:r>
-              <a:rPr sz="1200" b="0">
+                <a:spcPct val="125000"/>
+              </a:lnSpc>
+            </a:pPr>
+            <a:r>
+              <a:rPr sz="1100" b="0">
                 <a:solidFill>
                   <a:srgbClr val="FFFFFF"/>
                 </a:solidFill>
@@ -8117,8 +7998,8 @@
         </p:nvSpPr>
         <p:spPr>
           <a:xfrm>
-            <a:off x="4680000" y="6588000"/>
-            <a:ext cx="7200000" cy="270000"/>
+            <a:off x="4680000" y="6606001"/>
+            <a:ext cx="7200000" cy="251999"/>
           </a:xfrm>
           <a:prstGeom prst="rect">
             <a:avLst/>
@@ -8126,18 +8007,18 @@
           <a:noFill/>
         </p:spPr>
         <p:txBody>
-          <a:bodyPr wrap="square" lIns="54000" rIns="54000" tIns="18000" bIns="18000" anchor="ctr">
+          <a:bodyPr wrap="square" lIns="43200" rIns="43200" tIns="18000" bIns="18000" anchor="ctr">
             <a:spAutoFit/>
           </a:bodyPr>
           <a:lstStyle/>
           <a:p>
             <a:pPr algn="r">
               <a:lnSpc>
-                <a:spcPct val="130000"/>
-              </a:lnSpc>
-            </a:pPr>
-            <a:r>
-              <a:rPr sz="1100" b="0">
+                <a:spcPct val="125000"/>
+              </a:lnSpc>
+            </a:pPr>
+            <a:r>
+              <a:rPr sz="1000" b="0">
                 <a:solidFill>
                   <a:srgbClr val="FFFFFF"/>
                 </a:solidFill>
@@ -8176,7 +8057,7 @@
         <p:spPr>
           <a:xfrm>
             <a:off x="0" y="0"/>
-            <a:ext cx="12192119" cy="1007999"/>
+            <a:ext cx="12192119" cy="936000"/>
           </a:xfrm>
           <a:prstGeom prst="rect">
             <a:avLst/>
@@ -8219,8 +8100,8 @@
         </p:nvSpPr>
         <p:spPr>
           <a:xfrm>
-            <a:off x="0" y="1007999"/>
-            <a:ext cx="12192119" cy="79200"/>
+            <a:off x="0" y="936000"/>
+            <a:ext cx="12192119" cy="72000"/>
           </a:xfrm>
           <a:prstGeom prst="rect">
             <a:avLst/>
@@ -8264,7 +8145,7 @@
         <p:spPr>
           <a:xfrm>
             <a:off x="288000" y="198000"/>
-            <a:ext cx="864000" cy="612000"/>
+            <a:ext cx="792000" cy="540000"/>
           </a:xfrm>
           <a:prstGeom prst="roundRect">
             <a:avLst>
@@ -8310,7 +8191,7 @@
         <p:spPr>
           <a:xfrm>
             <a:off x="288000" y="198000"/>
-            <a:ext cx="864000" cy="612000"/>
+            <a:ext cx="792000" cy="540000"/>
           </a:xfrm>
           <a:prstGeom prst="rect">
             <a:avLst/>
@@ -8318,18 +8199,18 @@
           <a:noFill/>
         </p:spPr>
         <p:txBody>
-          <a:bodyPr wrap="square" lIns="54000" rIns="54000" tIns="18000" bIns="18000" anchor="ctr">
+          <a:bodyPr wrap="square" lIns="43200" rIns="43200" tIns="18000" bIns="18000" anchor="ctr">
             <a:spAutoFit/>
           </a:bodyPr>
           <a:lstStyle/>
           <a:p>
             <a:pPr algn="ctr">
               <a:lnSpc>
-                <a:spcPct val="130000"/>
-              </a:lnSpc>
-            </a:pPr>
-            <a:r>
-              <a:rPr sz="3200" b="1">
+                <a:spcPct val="125000"/>
+              </a:lnSpc>
+            </a:pPr>
+            <a:r>
+              <a:rPr sz="2800" b="1">
                 <a:solidFill>
                   <a:srgbClr val="FFFFFF"/>
                 </a:solidFill>
@@ -8349,8 +8230,8 @@
         </p:nvSpPr>
         <p:spPr>
           <a:xfrm>
-            <a:off x="1296000" y="198000"/>
-            <a:ext cx="9360000" cy="612000"/>
+            <a:off x="1224000" y="198000"/>
+            <a:ext cx="9540000" cy="540000"/>
           </a:xfrm>
           <a:prstGeom prst="rect">
             <a:avLst/>
@@ -8358,25 +8239,25 @@
           <a:noFill/>
         </p:spPr>
         <p:txBody>
-          <a:bodyPr wrap="square" lIns="54000" rIns="54000" tIns="18000" bIns="18000" anchor="ctr">
+          <a:bodyPr wrap="square" lIns="43200" rIns="43200" tIns="18000" bIns="18000" anchor="ctr">
             <a:spAutoFit/>
           </a:bodyPr>
           <a:lstStyle/>
           <a:p>
             <a:pPr algn="l">
               <a:lnSpc>
-                <a:spcPct val="130000"/>
-              </a:lnSpc>
-            </a:pPr>
-            <a:r>
-              <a:rPr sz="3200" b="1">
+                <a:spcPct val="125000"/>
+              </a:lnSpc>
+            </a:pPr>
+            <a:r>
+              <a:rPr sz="2800" b="1">
                 <a:solidFill>
                   <a:srgbClr val="FFFFFF"/>
                 </a:solidFill>
                 <a:latin typeface="メイリオ"/>
                 <a:rFonts eastAsia="メイリオ" ascii="メイリオ" hAnsi="メイリオ"/>
               </a:rPr>
-              <a:t>「 余 白 」 を 生 み 出 す 体 育 へ</a:t>
+              <a:t>「余白」を生み出す 体育へ</a:t>
             </a:r>
           </a:p>
         </p:txBody>
@@ -8389,8 +8270,8 @@
         </p:nvSpPr>
         <p:spPr>
           <a:xfrm>
-            <a:off x="10872000" y="198000"/>
-            <a:ext cx="1116000" cy="612000"/>
+            <a:off x="10800000" y="198000"/>
+            <a:ext cx="1080000" cy="540000"/>
           </a:xfrm>
           <a:prstGeom prst="rect">
             <a:avLst/>
@@ -8398,18 +8279,18 @@
           <a:noFill/>
         </p:spPr>
         <p:txBody>
-          <a:bodyPr wrap="square" lIns="54000" rIns="54000" tIns="18000" bIns="18000" anchor="ctr">
+          <a:bodyPr wrap="square" lIns="43200" rIns="43200" tIns="18000" bIns="18000" anchor="ctr">
             <a:spAutoFit/>
           </a:bodyPr>
           <a:lstStyle/>
           <a:p>
             <a:pPr algn="r">
               <a:lnSpc>
-                <a:spcPct val="130000"/>
-              </a:lnSpc>
-            </a:pPr>
-            <a:r>
-              <a:rPr sz="1800" b="0">
+                <a:spcPct val="125000"/>
+              </a:lnSpc>
+            </a:pPr>
+            <a:r>
+              <a:rPr sz="1600" b="0">
                 <a:solidFill>
                   <a:srgbClr val="FFFFFF"/>
                 </a:solidFill>
@@ -8429,8 +8310,8 @@
         </p:nvSpPr>
         <p:spPr>
           <a:xfrm>
-            <a:off x="288000" y="1224000"/>
-            <a:ext cx="11627999" cy="503999"/>
+            <a:off x="288000" y="1080000"/>
+            <a:ext cx="11627999" cy="468000"/>
           </a:xfrm>
           <a:prstGeom prst="rect">
             <a:avLst/>
@@ -8438,25 +8319,25 @@
           <a:noFill/>
         </p:spPr>
         <p:txBody>
-          <a:bodyPr wrap="square" lIns="54000" rIns="54000" tIns="18000" bIns="18000" anchor="ctr">
+          <a:bodyPr wrap="square" lIns="43200" rIns="43200" tIns="18000" bIns="18000" anchor="ctr">
             <a:spAutoFit/>
           </a:bodyPr>
           <a:lstStyle/>
           <a:p>
             <a:pPr algn="ctr">
               <a:lnSpc>
-                <a:spcPct val="130000"/>
-              </a:lnSpc>
-            </a:pPr>
-            <a:r>
-              <a:rPr sz="2200" b="1">
+                <a:spcPct val="125000"/>
+              </a:lnSpc>
+            </a:pPr>
+            <a:r>
+              <a:rPr sz="2000" b="1">
                 <a:solidFill>
                   <a:srgbClr val="1F3A5F"/>
                 </a:solidFill>
                 <a:latin typeface="メイリオ"/>
                 <a:rFonts eastAsia="メイリオ" ascii="メイリオ" hAnsi="メイリオ"/>
               </a:rPr>
-              <a:t>深い学び の 余地 と、 多様性 を 包む 余地 を</a:t>
+              <a:t>深い学びの余地 と、多様性を 包む余地 を</a:t>
             </a:r>
           </a:p>
         </p:txBody>
@@ -8469,8 +8350,8 @@
         </p:nvSpPr>
         <p:spPr>
           <a:xfrm>
-            <a:off x="720000" y="1872000"/>
-            <a:ext cx="10728000" cy="1872000"/>
+            <a:off x="720000" y="1692000"/>
+            <a:ext cx="10728000" cy="1692000"/>
           </a:xfrm>
           <a:prstGeom prst="roundRect">
             <a:avLst>
@@ -8515,8 +8396,8 @@
         </p:nvSpPr>
         <p:spPr>
           <a:xfrm>
-            <a:off x="900000" y="2015999"/>
-            <a:ext cx="10368000" cy="432000"/>
+            <a:off x="900000" y="1800000"/>
+            <a:ext cx="10368000" cy="360000"/>
           </a:xfrm>
           <a:prstGeom prst="rect">
             <a:avLst/>
@@ -8524,25 +8405,25 @@
           <a:noFill/>
         </p:spPr>
         <p:txBody>
-          <a:bodyPr wrap="square" lIns="54000" rIns="54000" tIns="18000" bIns="18000" anchor="ctr">
+          <a:bodyPr wrap="square" lIns="43200" rIns="43200" tIns="18000" bIns="18000" anchor="ctr">
             <a:spAutoFit/>
           </a:bodyPr>
           <a:lstStyle/>
           <a:p>
             <a:pPr algn="ctr">
               <a:lnSpc>
-                <a:spcPct val="130000"/>
-              </a:lnSpc>
-            </a:pPr>
-            <a:r>
-              <a:rPr sz="2000" b="0">
+                <a:spcPct val="125000"/>
+              </a:lnSpc>
+            </a:pPr>
+            <a:r>
+              <a:rPr sz="1800" b="0">
                 <a:solidFill>
                   <a:srgbClr val="CCDDEE"/>
                 </a:solidFill>
                 <a:latin typeface="メイリオ"/>
                 <a:rFonts eastAsia="メイリオ" ascii="メイリオ" hAnsi="メイリオ"/>
               </a:rPr>
-              <a:t>今 回 の 改 訂 が 目 指 す</a:t>
+              <a:t>今回の改訂が 目指す</a:t>
             </a:r>
           </a:p>
         </p:txBody>
@@ -8555,8 +8436,8 @@
         </p:nvSpPr>
         <p:spPr>
           <a:xfrm>
-            <a:off x="900000" y="2520000"/>
-            <a:ext cx="10368000" cy="1080000"/>
+            <a:off x="900000" y="2232000"/>
+            <a:ext cx="10368000" cy="1007999"/>
           </a:xfrm>
           <a:prstGeom prst="rect">
             <a:avLst/>
@@ -8564,25 +8445,25 @@
           <a:noFill/>
         </p:spPr>
         <p:txBody>
-          <a:bodyPr wrap="square" lIns="54000" rIns="54000" tIns="18000" bIns="18000" anchor="ctr">
+          <a:bodyPr wrap="square" lIns="43200" rIns="43200" tIns="18000" bIns="18000" anchor="ctr">
             <a:spAutoFit/>
           </a:bodyPr>
           <a:lstStyle/>
           <a:p>
             <a:pPr algn="ctr">
               <a:lnSpc>
-                <a:spcPct val="130000"/>
-              </a:lnSpc>
-            </a:pPr>
-            <a:r>
-              <a:rPr sz="3600" b="1">
+                <a:spcPct val="125000"/>
+              </a:lnSpc>
+            </a:pPr>
+            <a:r>
+              <a:rPr sz="3200" b="1">
                 <a:solidFill>
                   <a:srgbClr val="FFFFFF"/>
                 </a:solidFill>
                 <a:latin typeface="メイリオ"/>
                 <a:rFonts eastAsia="メイリオ" ascii="メイリオ" hAnsi="メイリオ"/>
               </a:rPr>
-              <a:t>教師 の 余白  ＝  児童 の 深い学び の 余地</a:t>
+              <a:t>教師の余白 ＝ 児童の 深い学びの余地</a:t>
             </a:r>
           </a:p>
         </p:txBody>
@@ -8595,12 +8476,12 @@
         </p:nvSpPr>
         <p:spPr>
           <a:xfrm>
-            <a:off x="468000" y="3960000"/>
-            <a:ext cx="3671999" cy="1980000"/>
+            <a:off x="468000" y="3600000"/>
+            <a:ext cx="3671999" cy="2304000"/>
           </a:xfrm>
           <a:prstGeom prst="roundRect">
             <a:avLst>
-              <a:gd name="adj" fmla="val 5000"/>
+              <a:gd name="adj" fmla="val 4000"/>
             </a:avLst>
           </a:prstGeom>
           <a:solidFill>
@@ -8643,7 +8524,7 @@
         </p:nvSpPr>
         <p:spPr>
           <a:xfrm>
-            <a:off x="612000" y="4104000"/>
+            <a:off x="612000" y="3744000"/>
             <a:ext cx="540000" cy="540000"/>
           </a:xfrm>
           <a:prstGeom prst="roundRect">
@@ -8689,7 +8570,7 @@
         </p:nvSpPr>
         <p:spPr>
           <a:xfrm>
-            <a:off x="612000" y="4104000"/>
+            <a:off x="612000" y="3744000"/>
             <a:ext cx="540000" cy="540000"/>
           </a:xfrm>
           <a:prstGeom prst="rect">
@@ -8698,14 +8579,14 @@
           <a:noFill/>
         </p:spPr>
         <p:txBody>
-          <a:bodyPr wrap="square" lIns="54000" rIns="54000" tIns="18000" bIns="18000" anchor="ctr">
+          <a:bodyPr wrap="square" lIns="43200" rIns="43200" tIns="18000" bIns="18000" anchor="ctr">
             <a:spAutoFit/>
           </a:bodyPr>
           <a:lstStyle/>
           <a:p>
             <a:pPr algn="ctr">
               <a:lnSpc>
-                <a:spcPct val="130000"/>
+                <a:spcPct val="125000"/>
               </a:lnSpc>
             </a:pPr>
             <a:r>
@@ -8729,7 +8610,7 @@
         </p:nvSpPr>
         <p:spPr>
           <a:xfrm>
-            <a:off x="1224000" y="4158000"/>
+            <a:off x="1224000" y="3798000"/>
             <a:ext cx="2844000" cy="432000"/>
           </a:xfrm>
           <a:prstGeom prst="rect">
@@ -8738,14 +8619,14 @@
           <a:noFill/>
         </p:spPr>
         <p:txBody>
-          <a:bodyPr wrap="square" lIns="54000" rIns="54000" tIns="18000" bIns="18000" anchor="ctr">
+          <a:bodyPr wrap="square" lIns="43200" rIns="43200" tIns="18000" bIns="18000" anchor="ctr">
             <a:spAutoFit/>
           </a:bodyPr>
           <a:lstStyle/>
           <a:p>
             <a:pPr algn="l">
               <a:lnSpc>
-                <a:spcPct val="130000"/>
+                <a:spcPct val="125000"/>
               </a:lnSpc>
             </a:pPr>
             <a:r>
@@ -8756,7 +8637,7 @@
                 <a:latin typeface="メイリオ"/>
                 <a:rFonts eastAsia="メイリオ" ascii="メイリオ" hAnsi="メイリオ"/>
               </a:rPr>
-              <a:t>内容 の 精選</a:t>
+              <a:t>内容の精選</a:t>
             </a:r>
           </a:p>
         </p:txBody>
@@ -8769,8 +8650,8 @@
         </p:nvSpPr>
         <p:spPr>
           <a:xfrm>
-            <a:off x="612000" y="4824000"/>
-            <a:ext cx="3383999" cy="1007999"/>
+            <a:off x="612000" y="4536000"/>
+            <a:ext cx="3383999" cy="1296000"/>
           </a:xfrm>
           <a:prstGeom prst="rect">
             <a:avLst/>
@@ -8778,7 +8659,7 @@
           <a:noFill/>
         </p:spPr>
         <p:txBody>
-          <a:bodyPr wrap="square" lIns="54000" rIns="54000" tIns="18000" bIns="18000" anchor="ctr">
+          <a:bodyPr wrap="square" lIns="43200" rIns="43200" tIns="18000" bIns="18000" anchor="ctr">
             <a:spAutoFit/>
           </a:bodyPr>
           <a:lstStyle/>
@@ -8789,7 +8670,7 @@
               </a:lnSpc>
             </a:pPr>
             <a:r>
-              <a:rPr sz="1800" b="0">
+              <a:rPr sz="2000" b="0">
                 <a:solidFill>
                   <a:srgbClr val="2B2B2B"/>
                 </a:solidFill>
@@ -8806,7 +8687,7 @@
               </a:lnSpc>
             </a:pPr>
             <a:r>
-              <a:rPr sz="1800" b="0">
+              <a:rPr sz="2000" b="0">
                 <a:solidFill>
                   <a:srgbClr val="2B2B2B"/>
                 </a:solidFill>
@@ -8826,12 +8707,12 @@
         </p:nvSpPr>
         <p:spPr>
           <a:xfrm>
-            <a:off x="4301999" y="3960000"/>
-            <a:ext cx="3671999" cy="1980000"/>
+            <a:off x="4301999" y="3600000"/>
+            <a:ext cx="3671999" cy="2304000"/>
           </a:xfrm>
           <a:prstGeom prst="roundRect">
             <a:avLst>
-              <a:gd name="adj" fmla="val 5000"/>
+              <a:gd name="adj" fmla="val 4000"/>
             </a:avLst>
           </a:prstGeom>
           <a:solidFill>
@@ -8874,7 +8755,7 @@
         </p:nvSpPr>
         <p:spPr>
           <a:xfrm>
-            <a:off x="4445999" y="4104000"/>
+            <a:off x="4445999" y="3744000"/>
             <a:ext cx="540000" cy="540000"/>
           </a:xfrm>
           <a:prstGeom prst="roundRect">
@@ -8920,7 +8801,7 @@
         </p:nvSpPr>
         <p:spPr>
           <a:xfrm>
-            <a:off x="4445999" y="4104000"/>
+            <a:off x="4445999" y="3744000"/>
             <a:ext cx="540000" cy="540000"/>
           </a:xfrm>
           <a:prstGeom prst="rect">
@@ -8929,14 +8810,14 @@
           <a:noFill/>
         </p:spPr>
         <p:txBody>
-          <a:bodyPr wrap="square" lIns="54000" rIns="54000" tIns="18000" bIns="18000" anchor="ctr">
+          <a:bodyPr wrap="square" lIns="43200" rIns="43200" tIns="18000" bIns="18000" anchor="ctr">
             <a:spAutoFit/>
           </a:bodyPr>
           <a:lstStyle/>
           <a:p>
             <a:pPr algn="ctr">
               <a:lnSpc>
-                <a:spcPct val="130000"/>
+                <a:spcPct val="125000"/>
               </a:lnSpc>
             </a:pPr>
             <a:r>
@@ -8960,7 +8841,7 @@
         </p:nvSpPr>
         <p:spPr>
           <a:xfrm>
-            <a:off x="5057999" y="4158000"/>
+            <a:off x="5057999" y="3798000"/>
             <a:ext cx="2844000" cy="432000"/>
           </a:xfrm>
           <a:prstGeom prst="rect">
@@ -8969,14 +8850,14 @@
           <a:noFill/>
         </p:spPr>
         <p:txBody>
-          <a:bodyPr wrap="square" lIns="54000" rIns="54000" tIns="18000" bIns="18000" anchor="ctr">
+          <a:bodyPr wrap="square" lIns="43200" rIns="43200" tIns="18000" bIns="18000" anchor="ctr">
             <a:spAutoFit/>
           </a:bodyPr>
           <a:lstStyle/>
           <a:p>
             <a:pPr algn="l">
               <a:lnSpc>
-                <a:spcPct val="130000"/>
+                <a:spcPct val="125000"/>
               </a:lnSpc>
             </a:pPr>
             <a:r>
@@ -9000,8 +8881,8 @@
         </p:nvSpPr>
         <p:spPr>
           <a:xfrm>
-            <a:off x="4445999" y="4824000"/>
-            <a:ext cx="3383999" cy="1007999"/>
+            <a:off x="4445999" y="4536000"/>
+            <a:ext cx="3383999" cy="1296000"/>
           </a:xfrm>
           <a:prstGeom prst="rect">
             <a:avLst/>
@@ -9009,7 +8890,7 @@
           <a:noFill/>
         </p:spPr>
         <p:txBody>
-          <a:bodyPr wrap="square" lIns="54000" rIns="54000" tIns="18000" bIns="18000" anchor="ctr">
+          <a:bodyPr wrap="square" lIns="43200" rIns="43200" tIns="18000" bIns="18000" anchor="ctr">
             <a:spAutoFit/>
           </a:bodyPr>
           <a:lstStyle/>
@@ -9020,14 +8901,14 @@
               </a:lnSpc>
             </a:pPr>
             <a:r>
-              <a:rPr sz="1800" b="0">
+              <a:rPr sz="2000" b="0">
                 <a:solidFill>
                   <a:srgbClr val="2B2B2B"/>
                 </a:solidFill>
                 <a:latin typeface="メイリオ"/>
                 <a:rFonts eastAsia="メイリオ" ascii="メイリオ" hAnsi="メイリオ"/>
               </a:rPr>
-              <a:t>活動例 は 別途</a:t>
+              <a:t>活動例は別途</a:t>
             </a:r>
           </a:p>
           <a:p>
@@ -9037,14 +8918,14 @@
               </a:lnSpc>
             </a:pPr>
             <a:r>
-              <a:rPr sz="1800" b="0">
+              <a:rPr sz="2000" b="0">
                 <a:solidFill>
                   <a:srgbClr val="2B2B2B"/>
                 </a:solidFill>
                 <a:latin typeface="メイリオ"/>
                 <a:rFonts eastAsia="メイリオ" ascii="メイリオ" hAnsi="メイリオ"/>
               </a:rPr>
-              <a:t>現場の工夫を阻まない</a:t>
+              <a:t>現場の工夫を活かす</a:t>
             </a:r>
           </a:p>
         </p:txBody>
@@ -9057,12 +8938,12 @@
         </p:nvSpPr>
         <p:spPr>
           <a:xfrm>
-            <a:off x="8135998" y="3960000"/>
-            <a:ext cx="3671999" cy="1980000"/>
+            <a:off x="8135998" y="3600000"/>
+            <a:ext cx="3671999" cy="2304000"/>
           </a:xfrm>
           <a:prstGeom prst="roundRect">
             <a:avLst>
-              <a:gd name="adj" fmla="val 5000"/>
+              <a:gd name="adj" fmla="val 4000"/>
             </a:avLst>
           </a:prstGeom>
           <a:solidFill>
@@ -9105,7 +8986,7 @@
         </p:nvSpPr>
         <p:spPr>
           <a:xfrm>
-            <a:off x="8279998" y="4104000"/>
+            <a:off x="8279998" y="3744000"/>
             <a:ext cx="540000" cy="540000"/>
           </a:xfrm>
           <a:prstGeom prst="roundRect">
@@ -9151,7 +9032,7 @@
         </p:nvSpPr>
         <p:spPr>
           <a:xfrm>
-            <a:off x="8279998" y="4104000"/>
+            <a:off x="8279998" y="3744000"/>
             <a:ext cx="540000" cy="540000"/>
           </a:xfrm>
           <a:prstGeom prst="rect">
@@ -9160,14 +9041,14 @@
           <a:noFill/>
         </p:spPr>
         <p:txBody>
-          <a:bodyPr wrap="square" lIns="54000" rIns="54000" tIns="18000" bIns="18000" anchor="ctr">
+          <a:bodyPr wrap="square" lIns="43200" rIns="43200" tIns="18000" bIns="18000" anchor="ctr">
             <a:spAutoFit/>
           </a:bodyPr>
           <a:lstStyle/>
           <a:p>
             <a:pPr algn="ctr">
               <a:lnSpc>
-                <a:spcPct val="130000"/>
+                <a:spcPct val="125000"/>
               </a:lnSpc>
             </a:pPr>
             <a:r>
@@ -9191,7 +9072,7 @@
         </p:nvSpPr>
         <p:spPr>
           <a:xfrm>
-            <a:off x="8891998" y="4158000"/>
+            <a:off x="8891998" y="3798000"/>
             <a:ext cx="2844000" cy="432000"/>
           </a:xfrm>
           <a:prstGeom prst="rect">
@@ -9200,14 +9081,14 @@
           <a:noFill/>
         </p:spPr>
         <p:txBody>
-          <a:bodyPr wrap="square" lIns="54000" rIns="54000" tIns="18000" bIns="18000" anchor="ctr">
+          <a:bodyPr wrap="square" lIns="43200" rIns="43200" tIns="18000" bIns="18000" anchor="ctr">
             <a:spAutoFit/>
           </a:bodyPr>
           <a:lstStyle/>
           <a:p>
             <a:pPr algn="l">
               <a:lnSpc>
-                <a:spcPct val="130000"/>
+                <a:spcPct val="125000"/>
               </a:lnSpc>
             </a:pPr>
             <a:r>
@@ -9218,7 +9099,7 @@
                 <a:latin typeface="メイリオ"/>
                 <a:rFonts eastAsia="メイリオ" ascii="メイリオ" hAnsi="メイリオ"/>
               </a:rPr>
-              <a:t>調整授業時数 制度</a:t>
+              <a:t>調整授業時数制度</a:t>
             </a:r>
           </a:p>
         </p:txBody>
@@ -9231,8 +9112,8 @@
         </p:nvSpPr>
         <p:spPr>
           <a:xfrm>
-            <a:off x="8279998" y="4824000"/>
-            <a:ext cx="3383999" cy="1007999"/>
+            <a:off x="8279998" y="4536000"/>
+            <a:ext cx="3383999" cy="1296000"/>
           </a:xfrm>
           <a:prstGeom prst="rect">
             <a:avLst/>
@@ -9240,7 +9121,7 @@
           <a:noFill/>
         </p:spPr>
         <p:txBody>
-          <a:bodyPr wrap="square" lIns="54000" rIns="54000" tIns="18000" bIns="18000" anchor="ctr">
+          <a:bodyPr wrap="square" lIns="43200" rIns="43200" tIns="18000" bIns="18000" anchor="ctr">
             <a:spAutoFit/>
           </a:bodyPr>
           <a:lstStyle/>
@@ -9251,14 +9132,14 @@
               </a:lnSpc>
             </a:pPr>
             <a:r>
-              <a:rPr sz="1800" b="0">
+              <a:rPr sz="2000" b="0">
                 <a:solidFill>
                   <a:srgbClr val="2B2B2B"/>
                 </a:solidFill>
                 <a:latin typeface="メイリオ"/>
                 <a:rFonts eastAsia="メイリオ" ascii="メイリオ" hAnsi="メイリオ"/>
               </a:rPr>
-              <a:t>1割以上を 柔軟に</a:t>
+              <a:t>1割以上を柔軟に</a:t>
             </a:r>
           </a:p>
           <a:p>
@@ -9268,14 +9149,14 @@
               </a:lnSpc>
             </a:pPr>
             <a:r>
-              <a:rPr sz="1800" b="0">
+              <a:rPr sz="2000" b="0">
                 <a:solidFill>
                   <a:srgbClr val="2B2B2B"/>
                 </a:solidFill>
                 <a:latin typeface="メイリオ"/>
                 <a:rFonts eastAsia="メイリオ" ascii="メイリオ" hAnsi="メイリオ"/>
               </a:rPr>
-              <a:t>上乗せ・新教科 等</a:t>
+              <a:t>上乗せ・新教科等</a:t>
             </a:r>
           </a:p>
         </p:txBody>
@@ -9288,8 +9169,8 @@
         </p:nvSpPr>
         <p:spPr>
           <a:xfrm>
-            <a:off x="0" y="6588000"/>
-            <a:ext cx="12192119" cy="270000"/>
+            <a:off x="0" y="6606001"/>
+            <a:ext cx="12192119" cy="251999"/>
           </a:xfrm>
           <a:prstGeom prst="rect">
             <a:avLst/>
@@ -9332,8 +9213,8 @@
         </p:nvSpPr>
         <p:spPr>
           <a:xfrm>
-            <a:off x="288000" y="6588000"/>
-            <a:ext cx="7200000" cy="270000"/>
+            <a:off x="288000" y="6606001"/>
+            <a:ext cx="7200000" cy="251999"/>
           </a:xfrm>
           <a:prstGeom prst="rect">
             <a:avLst/>
@@ -9341,18 +9222,18 @@
           <a:noFill/>
         </p:spPr>
         <p:txBody>
-          <a:bodyPr wrap="square" lIns="54000" rIns="54000" tIns="18000" bIns="18000" anchor="ctr">
+          <a:bodyPr wrap="square" lIns="43200" rIns="43200" tIns="18000" bIns="18000" anchor="ctr">
             <a:spAutoFit/>
           </a:bodyPr>
           <a:lstStyle/>
           <a:p>
             <a:pPr algn="l">
               <a:lnSpc>
-                <a:spcPct val="130000"/>
-              </a:lnSpc>
-            </a:pPr>
-            <a:r>
-              <a:rPr sz="1200" b="0">
+                <a:spcPct val="125000"/>
+              </a:lnSpc>
+            </a:pPr>
+            <a:r>
+              <a:rPr sz="1100" b="0">
                 <a:solidFill>
                   <a:srgbClr val="FFFFFF"/>
                 </a:solidFill>
@@ -9372,8 +9253,8 @@
         </p:nvSpPr>
         <p:spPr>
           <a:xfrm>
-            <a:off x="4680000" y="6588000"/>
-            <a:ext cx="7200000" cy="270000"/>
+            <a:off x="4680000" y="6606001"/>
+            <a:ext cx="7200000" cy="251999"/>
           </a:xfrm>
           <a:prstGeom prst="rect">
             <a:avLst/>
@@ -9381,18 +9262,18 @@
           <a:noFill/>
         </p:spPr>
         <p:txBody>
-          <a:bodyPr wrap="square" lIns="54000" rIns="54000" tIns="18000" bIns="18000" anchor="ctr">
+          <a:bodyPr wrap="square" lIns="43200" rIns="43200" tIns="18000" bIns="18000" anchor="ctr">
             <a:spAutoFit/>
           </a:bodyPr>
           <a:lstStyle/>
           <a:p>
             <a:pPr algn="r">
               <a:lnSpc>
-                <a:spcPct val="130000"/>
-              </a:lnSpc>
-            </a:pPr>
-            <a:r>
-              <a:rPr sz="1100" b="0">
+                <a:spcPct val="125000"/>
+              </a:lnSpc>
+            </a:pPr>
+            <a:r>
+              <a:rPr sz="1000" b="0">
                 <a:solidFill>
                   <a:srgbClr val="FFFFFF"/>
                 </a:solidFill>
@@ -9431,7 +9312,7 @@
         <p:spPr>
           <a:xfrm>
             <a:off x="0" y="0"/>
-            <a:ext cx="12192119" cy="1007999"/>
+            <a:ext cx="12192119" cy="936000"/>
           </a:xfrm>
           <a:prstGeom prst="rect">
             <a:avLst/>
@@ -9474,8 +9355,8 @@
         </p:nvSpPr>
         <p:spPr>
           <a:xfrm>
-            <a:off x="0" y="1007999"/>
-            <a:ext cx="12192119" cy="79200"/>
+            <a:off x="0" y="936000"/>
+            <a:ext cx="12192119" cy="72000"/>
           </a:xfrm>
           <a:prstGeom prst="rect">
             <a:avLst/>
@@ -9519,7 +9400,7 @@
         <p:spPr>
           <a:xfrm>
             <a:off x="288000" y="198000"/>
-            <a:ext cx="864000" cy="612000"/>
+            <a:ext cx="792000" cy="540000"/>
           </a:xfrm>
           <a:prstGeom prst="roundRect">
             <a:avLst>
@@ -9565,7 +9446,7 @@
         <p:spPr>
           <a:xfrm>
             <a:off x="288000" y="198000"/>
-            <a:ext cx="864000" cy="612000"/>
+            <a:ext cx="792000" cy="540000"/>
           </a:xfrm>
           <a:prstGeom prst="rect">
             <a:avLst/>
@@ -9573,18 +9454,18 @@
           <a:noFill/>
         </p:spPr>
         <p:txBody>
-          <a:bodyPr wrap="square" lIns="54000" rIns="54000" tIns="18000" bIns="18000" anchor="ctr">
+          <a:bodyPr wrap="square" lIns="43200" rIns="43200" tIns="18000" bIns="18000" anchor="ctr">
             <a:spAutoFit/>
           </a:bodyPr>
           <a:lstStyle/>
           <a:p>
             <a:pPr algn="ctr">
               <a:lnSpc>
-                <a:spcPct val="130000"/>
-              </a:lnSpc>
-            </a:pPr>
-            <a:r>
-              <a:rPr sz="3200" b="1">
+                <a:spcPct val="125000"/>
+              </a:lnSpc>
+            </a:pPr>
+            <a:r>
+              <a:rPr sz="2800" b="1">
                 <a:solidFill>
                   <a:srgbClr val="FFFFFF"/>
                 </a:solidFill>
@@ -9604,8 +9485,8 @@
         </p:nvSpPr>
         <p:spPr>
           <a:xfrm>
-            <a:off x="1296000" y="198000"/>
-            <a:ext cx="9360000" cy="612000"/>
+            <a:off x="1224000" y="198000"/>
+            <a:ext cx="9540000" cy="540000"/>
           </a:xfrm>
           <a:prstGeom prst="rect">
             <a:avLst/>
@@ -9613,25 +9494,25 @@
           <a:noFill/>
         </p:spPr>
         <p:txBody>
-          <a:bodyPr wrap="square" lIns="54000" rIns="54000" tIns="18000" bIns="18000" anchor="ctr">
+          <a:bodyPr wrap="square" lIns="43200" rIns="43200" tIns="18000" bIns="18000" anchor="ctr">
             <a:spAutoFit/>
           </a:bodyPr>
           <a:lstStyle/>
           <a:p>
             <a:pPr algn="l">
               <a:lnSpc>
-                <a:spcPct val="130000"/>
-              </a:lnSpc>
-            </a:pPr>
-            <a:r>
-              <a:rPr sz="3200" b="1">
+                <a:spcPct val="125000"/>
+              </a:lnSpc>
+            </a:pPr>
+            <a:r>
+              <a:rPr sz="2800" b="1">
                 <a:solidFill>
                   <a:srgbClr val="FFFFFF"/>
                 </a:solidFill>
                 <a:latin typeface="メイリオ"/>
                 <a:rFonts eastAsia="メイリオ" ascii="メイリオ" hAnsi="メイリオ"/>
               </a:rPr>
-              <a:t>全 員 が 主 役 に な る 体 育 へ</a:t>
+              <a:t>全員が 主役になる 体育へ</a:t>
             </a:r>
           </a:p>
         </p:txBody>
@@ -9644,8 +9525,8 @@
         </p:nvSpPr>
         <p:spPr>
           <a:xfrm>
-            <a:off x="10872000" y="198000"/>
-            <a:ext cx="1116000" cy="612000"/>
+            <a:off x="10800000" y="198000"/>
+            <a:ext cx="1080000" cy="540000"/>
           </a:xfrm>
           <a:prstGeom prst="rect">
             <a:avLst/>
@@ -9653,18 +9534,18 @@
           <a:noFill/>
         </p:spPr>
         <p:txBody>
-          <a:bodyPr wrap="square" lIns="54000" rIns="54000" tIns="18000" bIns="18000" anchor="ctr">
+          <a:bodyPr wrap="square" lIns="43200" rIns="43200" tIns="18000" bIns="18000" anchor="ctr">
             <a:spAutoFit/>
           </a:bodyPr>
           <a:lstStyle/>
           <a:p>
             <a:pPr algn="r">
               <a:lnSpc>
-                <a:spcPct val="130000"/>
-              </a:lnSpc>
-            </a:pPr>
-            <a:r>
-              <a:rPr sz="1800" b="0">
+                <a:spcPct val="125000"/>
+              </a:lnSpc>
+            </a:pPr>
+            <a:r>
+              <a:rPr sz="1600" b="0">
                 <a:solidFill>
                   <a:srgbClr val="FFFFFF"/>
                 </a:solidFill>
@@ -9684,8 +9565,8 @@
         </p:nvSpPr>
         <p:spPr>
           <a:xfrm>
-            <a:off x="288000" y="1224000"/>
-            <a:ext cx="11627999" cy="503999"/>
+            <a:off x="288000" y="1080000"/>
+            <a:ext cx="11627999" cy="468000"/>
           </a:xfrm>
           <a:prstGeom prst="rect">
             <a:avLst/>
@@ -9693,25 +9574,25 @@
           <a:noFill/>
         </p:spPr>
         <p:txBody>
-          <a:bodyPr wrap="square" lIns="54000" rIns="54000" tIns="18000" bIns="18000" anchor="ctr">
+          <a:bodyPr wrap="square" lIns="43200" rIns="43200" tIns="18000" bIns="18000" anchor="ctr">
             <a:spAutoFit/>
           </a:bodyPr>
           <a:lstStyle/>
           <a:p>
             <a:pPr algn="ctr">
               <a:lnSpc>
-                <a:spcPct val="130000"/>
-              </a:lnSpc>
-            </a:pPr>
-            <a:r>
-              <a:rPr sz="2200" b="1">
+                <a:spcPct val="125000"/>
+              </a:lnSpc>
+            </a:pPr>
+            <a:r>
+              <a:rPr sz="2000" b="1">
                 <a:solidFill>
                   <a:srgbClr val="1F3A5F"/>
                 </a:solidFill>
                 <a:latin typeface="メイリオ"/>
                 <a:rFonts eastAsia="メイリオ" ascii="メイリオ" hAnsi="メイリオ"/>
               </a:rPr>
-              <a:t>「できる ／ できない」 を 超えて、 関わり方 を 広げる</a:t>
+              <a:t>「できる/できない」を超えて、関わり方を広げる</a:t>
             </a:r>
           </a:p>
         </p:txBody>
@@ -9724,8 +9605,8 @@
         </p:nvSpPr>
         <p:spPr>
           <a:xfrm>
-            <a:off x="378000" y="1944000"/>
-            <a:ext cx="2736000" cy="3311999"/>
+            <a:off x="378000" y="1764000"/>
+            <a:ext cx="2736000" cy="3240000"/>
           </a:xfrm>
           <a:prstGeom prst="roundRect">
             <a:avLst>
@@ -9772,7 +9653,7 @@
         </p:nvSpPr>
         <p:spPr>
           <a:xfrm>
-            <a:off x="378000" y="1944000"/>
+            <a:off x="378000" y="1764000"/>
             <a:ext cx="2736000" cy="251999"/>
           </a:xfrm>
           <a:prstGeom prst="rect">
@@ -9816,8 +9697,8 @@
         </p:nvSpPr>
         <p:spPr>
           <a:xfrm>
-            <a:off x="378000" y="2484000"/>
-            <a:ext cx="2736000" cy="1368000"/>
+            <a:off x="450000" y="2267999"/>
+            <a:ext cx="2592000" cy="1296000"/>
           </a:xfrm>
           <a:prstGeom prst="rect">
             <a:avLst/>
@@ -9825,18 +9706,18 @@
           <a:noFill/>
         </p:spPr>
         <p:txBody>
-          <a:bodyPr wrap="square" lIns="54000" rIns="54000" tIns="18000" bIns="18000" anchor="ctr">
+          <a:bodyPr wrap="square" lIns="43200" rIns="43200" tIns="18000" bIns="18000" anchor="ctr">
             <a:spAutoFit/>
           </a:bodyPr>
           <a:lstStyle/>
           <a:p>
             <a:pPr algn="ctr">
               <a:lnSpc>
-                <a:spcPct val="130000"/>
-              </a:lnSpc>
-            </a:pPr>
-            <a:r>
-              <a:rPr sz="6600" b="1">
+                <a:spcPct val="125000"/>
+              </a:lnSpc>
+            </a:pPr>
+            <a:r>
+              <a:rPr sz="6000" b="1">
                 <a:solidFill>
                   <a:srgbClr val="1F3A5F"/>
                 </a:solidFill>
@@ -9856,8 +9737,8 @@
         </p:nvSpPr>
         <p:spPr>
           <a:xfrm>
-            <a:off x="918000" y="3959999"/>
-            <a:ext cx="1656000" cy="36000"/>
+            <a:off x="918000" y="3708000"/>
+            <a:ext cx="1656000" cy="28800"/>
           </a:xfrm>
           <a:prstGeom prst="rect">
             <a:avLst/>
@@ -9900,8 +9781,8 @@
         </p:nvSpPr>
         <p:spPr>
           <a:xfrm>
-            <a:off x="378000" y="4176000"/>
-            <a:ext cx="2736000" cy="936000"/>
+            <a:off x="450000" y="3888000"/>
+            <a:ext cx="2592000" cy="900000"/>
           </a:xfrm>
           <a:prstGeom prst="rect">
             <a:avLst/>
@@ -9909,25 +9790,25 @@
           <a:noFill/>
         </p:spPr>
         <p:txBody>
-          <a:bodyPr wrap="square" lIns="54000" rIns="54000" tIns="18000" bIns="18000" anchor="ctr">
+          <a:bodyPr wrap="square" lIns="43200" rIns="43200" tIns="18000" bIns="18000" anchor="ctr">
             <a:spAutoFit/>
           </a:bodyPr>
           <a:lstStyle/>
           <a:p>
             <a:pPr algn="ctr">
               <a:lnSpc>
-                <a:spcPct val="130000"/>
-              </a:lnSpc>
-            </a:pPr>
-            <a:r>
-              <a:rPr sz="2400" b="1">
+                <a:spcPct val="125000"/>
+              </a:lnSpc>
+            </a:pPr>
+            <a:r>
+              <a:rPr sz="2200" b="1">
                 <a:solidFill>
                   <a:srgbClr val="2B2B2B"/>
                 </a:solidFill>
                 <a:latin typeface="メイリオ"/>
                 <a:rFonts eastAsia="メイリオ" ascii="メイリオ" hAnsi="メイリオ"/>
               </a:rPr>
-              <a:t>やって 楽しむ</a:t>
+              <a:t>やって楽しむ</a:t>
             </a:r>
           </a:p>
         </p:txBody>
@@ -9940,8 +9821,8 @@
         </p:nvSpPr>
         <p:spPr>
           <a:xfrm>
-            <a:off x="3276000" y="1944000"/>
-            <a:ext cx="2736000" cy="3311999"/>
+            <a:off x="3276000" y="1764000"/>
+            <a:ext cx="2736000" cy="3240000"/>
           </a:xfrm>
           <a:prstGeom prst="roundRect">
             <a:avLst>
@@ -9988,7 +9869,7 @@
         </p:nvSpPr>
         <p:spPr>
           <a:xfrm>
-            <a:off x="3276000" y="1944000"/>
+            <a:off x="3276000" y="1764000"/>
             <a:ext cx="2736000" cy="251999"/>
           </a:xfrm>
           <a:prstGeom prst="rect">
@@ -10032,8 +9913,8 @@
         </p:nvSpPr>
         <p:spPr>
           <a:xfrm>
-            <a:off x="3276000" y="2484000"/>
-            <a:ext cx="2736000" cy="1368000"/>
+            <a:off x="3348000" y="2267999"/>
+            <a:ext cx="2592000" cy="1296000"/>
           </a:xfrm>
           <a:prstGeom prst="rect">
             <a:avLst/>
@@ -10041,18 +9922,18 @@
           <a:noFill/>
         </p:spPr>
         <p:txBody>
-          <a:bodyPr wrap="square" lIns="54000" rIns="54000" tIns="18000" bIns="18000" anchor="ctr">
+          <a:bodyPr wrap="square" lIns="43200" rIns="43200" tIns="18000" bIns="18000" anchor="ctr">
             <a:spAutoFit/>
           </a:bodyPr>
           <a:lstStyle/>
           <a:p>
             <a:pPr algn="ctr">
               <a:lnSpc>
-                <a:spcPct val="130000"/>
-              </a:lnSpc>
-            </a:pPr>
-            <a:r>
-              <a:rPr sz="6600" b="1">
+                <a:spcPct val="125000"/>
+              </a:lnSpc>
+            </a:pPr>
+            <a:r>
+              <a:rPr sz="6000" b="1">
                 <a:solidFill>
                   <a:srgbClr val="2E6FB8"/>
                 </a:solidFill>
@@ -10072,8 +9953,8 @@
         </p:nvSpPr>
         <p:spPr>
           <a:xfrm>
-            <a:off x="3816000" y="3959999"/>
-            <a:ext cx="1656000" cy="36000"/>
+            <a:off x="3816000" y="3708000"/>
+            <a:ext cx="1656000" cy="28800"/>
           </a:xfrm>
           <a:prstGeom prst="rect">
             <a:avLst/>
@@ -10116,8 +9997,8 @@
         </p:nvSpPr>
         <p:spPr>
           <a:xfrm>
-            <a:off x="3276000" y="4176000"/>
-            <a:ext cx="2736000" cy="936000"/>
+            <a:off x="3348000" y="3888000"/>
+            <a:ext cx="2592000" cy="900000"/>
           </a:xfrm>
           <a:prstGeom prst="rect">
             <a:avLst/>
@@ -10125,25 +10006,25 @@
           <a:noFill/>
         </p:spPr>
         <p:txBody>
-          <a:bodyPr wrap="square" lIns="54000" rIns="54000" tIns="18000" bIns="18000" anchor="ctr">
+          <a:bodyPr wrap="square" lIns="43200" rIns="43200" tIns="18000" bIns="18000" anchor="ctr">
             <a:spAutoFit/>
           </a:bodyPr>
           <a:lstStyle/>
           <a:p>
             <a:pPr algn="ctr">
               <a:lnSpc>
-                <a:spcPct val="130000"/>
-              </a:lnSpc>
-            </a:pPr>
-            <a:r>
-              <a:rPr sz="2400" b="1">
+                <a:spcPct val="125000"/>
+              </a:lnSpc>
+            </a:pPr>
+            <a:r>
+              <a:rPr sz="2200" b="1">
                 <a:solidFill>
                   <a:srgbClr val="2B2B2B"/>
                 </a:solidFill>
                 <a:latin typeface="メイリオ"/>
                 <a:rFonts eastAsia="メイリオ" ascii="メイリオ" hAnsi="メイリオ"/>
               </a:rPr>
-              <a:t>観察して 学ぶ</a:t>
+              <a:t>観察して学ぶ</a:t>
             </a:r>
           </a:p>
         </p:txBody>
@@ -10156,8 +10037,8 @@
         </p:nvSpPr>
         <p:spPr>
           <a:xfrm>
-            <a:off x="6174000" y="1944000"/>
-            <a:ext cx="2736000" cy="3311999"/>
+            <a:off x="6174000" y="1764000"/>
+            <a:ext cx="2736000" cy="3240000"/>
           </a:xfrm>
           <a:prstGeom prst="roundRect">
             <a:avLst>
@@ -10204,7 +10085,7 @@
         </p:nvSpPr>
         <p:spPr>
           <a:xfrm>
-            <a:off x="6174000" y="1944000"/>
+            <a:off x="6174000" y="1764000"/>
             <a:ext cx="2736000" cy="251999"/>
           </a:xfrm>
           <a:prstGeom prst="rect">
@@ -10248,8 +10129,8 @@
         </p:nvSpPr>
         <p:spPr>
           <a:xfrm>
-            <a:off x="6174000" y="2484000"/>
-            <a:ext cx="2736000" cy="1368000"/>
+            <a:off x="6246000" y="2267999"/>
+            <a:ext cx="2592000" cy="1296000"/>
           </a:xfrm>
           <a:prstGeom prst="rect">
             <a:avLst/>
@@ -10257,18 +10138,18 @@
           <a:noFill/>
         </p:spPr>
         <p:txBody>
-          <a:bodyPr wrap="square" lIns="54000" rIns="54000" tIns="18000" bIns="18000" anchor="ctr">
+          <a:bodyPr wrap="square" lIns="43200" rIns="43200" tIns="18000" bIns="18000" anchor="ctr">
             <a:spAutoFit/>
           </a:bodyPr>
           <a:lstStyle/>
           <a:p>
             <a:pPr algn="ctr">
               <a:lnSpc>
-                <a:spcPct val="130000"/>
-              </a:lnSpc>
-            </a:pPr>
-            <a:r>
-              <a:rPr sz="6600" b="1">
+                <a:spcPct val="125000"/>
+              </a:lnSpc>
+            </a:pPr>
+            <a:r>
+              <a:rPr sz="6000" b="1">
                 <a:solidFill>
                   <a:srgbClr val="2E8B57"/>
                 </a:solidFill>
@@ -10288,8 +10169,8 @@
         </p:nvSpPr>
         <p:spPr>
           <a:xfrm>
-            <a:off x="6714000" y="3959999"/>
-            <a:ext cx="1656000" cy="36000"/>
+            <a:off x="6714000" y="3708000"/>
+            <a:ext cx="1656000" cy="28800"/>
           </a:xfrm>
           <a:prstGeom prst="rect">
             <a:avLst/>
@@ -10332,8 +10213,8 @@
         </p:nvSpPr>
         <p:spPr>
           <a:xfrm>
-            <a:off x="6174000" y="4176000"/>
-            <a:ext cx="2736000" cy="936000"/>
+            <a:off x="6246000" y="3888000"/>
+            <a:ext cx="2592000" cy="900000"/>
           </a:xfrm>
           <a:prstGeom prst="rect">
             <a:avLst/>
@@ -10341,25 +10222,25 @@
           <a:noFill/>
         </p:spPr>
         <p:txBody>
-          <a:bodyPr wrap="square" lIns="54000" rIns="54000" tIns="18000" bIns="18000" anchor="ctr">
+          <a:bodyPr wrap="square" lIns="43200" rIns="43200" tIns="18000" bIns="18000" anchor="ctr">
             <a:spAutoFit/>
           </a:bodyPr>
           <a:lstStyle/>
           <a:p>
             <a:pPr algn="ctr">
               <a:lnSpc>
-                <a:spcPct val="130000"/>
-              </a:lnSpc>
-            </a:pPr>
-            <a:r>
-              <a:rPr sz="2400" b="1">
+                <a:spcPct val="125000"/>
+              </a:lnSpc>
+            </a:pPr>
+            <a:r>
+              <a:rPr sz="2200" b="1">
                 <a:solidFill>
                   <a:srgbClr val="2B2B2B"/>
                 </a:solidFill>
                 <a:latin typeface="メイリオ"/>
                 <a:rFonts eastAsia="メイリオ" ascii="メイリオ" hAnsi="メイリオ"/>
               </a:rPr>
-              <a:t>仲間を 助ける</a:t>
+              <a:t>仲間を助ける</a:t>
             </a:r>
           </a:p>
         </p:txBody>
@@ -10372,8 +10253,8 @@
         </p:nvSpPr>
         <p:spPr>
           <a:xfrm>
-            <a:off x="9072000" y="1944000"/>
-            <a:ext cx="2736000" cy="3311999"/>
+            <a:off x="9072000" y="1764000"/>
+            <a:ext cx="2736000" cy="3240000"/>
           </a:xfrm>
           <a:prstGeom prst="roundRect">
             <a:avLst>
@@ -10420,7 +10301,7 @@
         </p:nvSpPr>
         <p:spPr>
           <a:xfrm>
-            <a:off x="9072000" y="1944000"/>
+            <a:off x="9072000" y="1764000"/>
             <a:ext cx="2736000" cy="251999"/>
           </a:xfrm>
           <a:prstGeom prst="rect">
@@ -10464,8 +10345,8 @@
         </p:nvSpPr>
         <p:spPr>
           <a:xfrm>
-            <a:off x="9072000" y="2484000"/>
-            <a:ext cx="2736000" cy="1368000"/>
+            <a:off x="9144000" y="2267999"/>
+            <a:ext cx="2592000" cy="1296000"/>
           </a:xfrm>
           <a:prstGeom prst="rect">
             <a:avLst/>
@@ -10473,18 +10354,18 @@
           <a:noFill/>
         </p:spPr>
         <p:txBody>
-          <a:bodyPr wrap="square" lIns="54000" rIns="54000" tIns="18000" bIns="18000" anchor="ctr">
+          <a:bodyPr wrap="square" lIns="43200" rIns="43200" tIns="18000" bIns="18000" anchor="ctr">
             <a:spAutoFit/>
           </a:bodyPr>
           <a:lstStyle/>
           <a:p>
             <a:pPr algn="ctr">
               <a:lnSpc>
-                <a:spcPct val="130000"/>
-              </a:lnSpc>
-            </a:pPr>
-            <a:r>
-              <a:rPr sz="6600" b="1">
+                <a:spcPct val="125000"/>
+              </a:lnSpc>
+            </a:pPr>
+            <a:r>
+              <a:rPr sz="6000" b="1">
                 <a:solidFill>
                   <a:srgbClr val="E87A1E"/>
                 </a:solidFill>
@@ -10504,8 +10385,8 @@
         </p:nvSpPr>
         <p:spPr>
           <a:xfrm>
-            <a:off x="9612000" y="3959999"/>
-            <a:ext cx="1656000" cy="36000"/>
+            <a:off x="9612000" y="3708000"/>
+            <a:ext cx="1656000" cy="28800"/>
           </a:xfrm>
           <a:prstGeom prst="rect">
             <a:avLst/>
@@ -10548,8 +10429,8 @@
         </p:nvSpPr>
         <p:spPr>
           <a:xfrm>
-            <a:off x="9072000" y="4176000"/>
-            <a:ext cx="2736000" cy="936000"/>
+            <a:off x="9144000" y="3888000"/>
+            <a:ext cx="2592000" cy="900000"/>
           </a:xfrm>
           <a:prstGeom prst="rect">
             <a:avLst/>
@@ -10557,25 +10438,25 @@
           <a:noFill/>
         </p:spPr>
         <p:txBody>
-          <a:bodyPr wrap="square" lIns="54000" rIns="54000" tIns="18000" bIns="18000" anchor="ctr">
+          <a:bodyPr wrap="square" lIns="43200" rIns="43200" tIns="18000" bIns="18000" anchor="ctr">
             <a:spAutoFit/>
           </a:bodyPr>
           <a:lstStyle/>
           <a:p>
             <a:pPr algn="ctr">
               <a:lnSpc>
-                <a:spcPct val="130000"/>
-              </a:lnSpc>
-            </a:pPr>
-            <a:r>
-              <a:rPr sz="2400" b="1">
+                <a:spcPct val="125000"/>
+              </a:lnSpc>
+            </a:pPr>
+            <a:r>
+              <a:rPr sz="2200" b="1">
                 <a:solidFill>
                   <a:srgbClr val="2B2B2B"/>
                 </a:solidFill>
                 <a:latin typeface="メイリオ"/>
                 <a:rFonts eastAsia="メイリオ" ascii="メイリオ" hAnsi="メイリオ"/>
               </a:rPr>
-              <a:t>意味を 知る</a:t>
+              <a:t>意味を知る</a:t>
             </a:r>
           </a:p>
         </p:txBody>
@@ -10588,12 +10469,12 @@
         </p:nvSpPr>
         <p:spPr>
           <a:xfrm>
-            <a:off x="306000" y="5472000"/>
-            <a:ext cx="11574000" cy="972000"/>
+            <a:off x="306000" y="5220000"/>
+            <a:ext cx="11574000" cy="1224000"/>
           </a:xfrm>
           <a:prstGeom prst="roundRect">
             <a:avLst>
-              <a:gd name="adj" fmla="val 10000"/>
+              <a:gd name="adj" fmla="val 8000"/>
             </a:avLst>
           </a:prstGeom>
           <a:solidFill>
@@ -10636,8 +10517,8 @@
         </p:nvSpPr>
         <p:spPr>
           <a:xfrm>
-            <a:off x="306000" y="5472000"/>
-            <a:ext cx="11574000" cy="972000"/>
+            <a:off x="540000" y="5220000"/>
+            <a:ext cx="11160000" cy="1224000"/>
           </a:xfrm>
           <a:prstGeom prst="rect">
             <a:avLst/>
@@ -10645,14 +10526,14 @@
           <a:noFill/>
         </p:spPr>
         <p:txBody>
-          <a:bodyPr wrap="square" lIns="54000" rIns="54000" tIns="18000" bIns="18000" anchor="ctr">
+          <a:bodyPr wrap="square" lIns="43200" rIns="43200" tIns="18000" bIns="18000" anchor="ctr">
             <a:spAutoFit/>
           </a:bodyPr>
           <a:lstStyle/>
           <a:p>
             <a:pPr algn="ctr">
               <a:lnSpc>
-                <a:spcPct val="145000"/>
+                <a:spcPct val="150000"/>
               </a:lnSpc>
             </a:pPr>
             <a:r>
@@ -10663,13 +10544,13 @@
                 <a:latin typeface="メイリオ"/>
                 <a:rFonts eastAsia="メイリオ" ascii="メイリオ" hAnsi="メイリオ"/>
               </a:rPr>
-              <a:t>用具 ・ ルール ・ 場 の 工夫 で、</a:t>
+              <a:t>用具・ルール・場の工夫で、</a:t>
             </a:r>
           </a:p>
           <a:p>
             <a:pPr algn="ctr">
               <a:lnSpc>
-                <a:spcPct val="145000"/>
+                <a:spcPct val="150000"/>
               </a:lnSpc>
             </a:pPr>
             <a:r>
@@ -10680,7 +10561,7 @@
                 <a:latin typeface="メイリオ"/>
                 <a:rFonts eastAsia="メイリオ" ascii="メイリオ" hAnsi="メイリオ"/>
               </a:rPr>
-              <a:t>運動が苦手な子も 自分の 変化 を 実感できる</a:t>
+              <a:t>運動が苦手な子も 自分の変化を 実感できる</a:t>
             </a:r>
           </a:p>
         </p:txBody>
@@ -10693,8 +10574,8 @@
         </p:nvSpPr>
         <p:spPr>
           <a:xfrm>
-            <a:off x="0" y="6588000"/>
-            <a:ext cx="12192119" cy="270000"/>
+            <a:off x="0" y="6606001"/>
+            <a:ext cx="12192119" cy="251999"/>
           </a:xfrm>
           <a:prstGeom prst="rect">
             <a:avLst/>
@@ -10737,8 +10618,8 @@
         </p:nvSpPr>
         <p:spPr>
           <a:xfrm>
-            <a:off x="288000" y="6588000"/>
-            <a:ext cx="7200000" cy="270000"/>
+            <a:off x="288000" y="6606001"/>
+            <a:ext cx="7200000" cy="251999"/>
           </a:xfrm>
           <a:prstGeom prst="rect">
             <a:avLst/>
@@ -10746,18 +10627,18 @@
           <a:noFill/>
         </p:spPr>
         <p:txBody>
-          <a:bodyPr wrap="square" lIns="54000" rIns="54000" tIns="18000" bIns="18000" anchor="ctr">
+          <a:bodyPr wrap="square" lIns="43200" rIns="43200" tIns="18000" bIns="18000" anchor="ctr">
             <a:spAutoFit/>
           </a:bodyPr>
           <a:lstStyle/>
           <a:p>
             <a:pPr algn="l">
               <a:lnSpc>
-                <a:spcPct val="130000"/>
-              </a:lnSpc>
-            </a:pPr>
-            <a:r>
-              <a:rPr sz="1200" b="0">
+                <a:spcPct val="125000"/>
+              </a:lnSpc>
+            </a:pPr>
+            <a:r>
+              <a:rPr sz="1100" b="0">
                 <a:solidFill>
                   <a:srgbClr val="FFFFFF"/>
                 </a:solidFill>
@@ -10777,8 +10658,8 @@
         </p:nvSpPr>
         <p:spPr>
           <a:xfrm>
-            <a:off x="4680000" y="6588000"/>
-            <a:ext cx="7200000" cy="270000"/>
+            <a:off x="4680000" y="6606001"/>
+            <a:ext cx="7200000" cy="251999"/>
           </a:xfrm>
           <a:prstGeom prst="rect">
             <a:avLst/>
@@ -10786,18 +10667,18 @@
           <a:noFill/>
         </p:spPr>
         <p:txBody>
-          <a:bodyPr wrap="square" lIns="54000" rIns="54000" tIns="18000" bIns="18000" anchor="ctr">
+          <a:bodyPr wrap="square" lIns="43200" rIns="43200" tIns="18000" bIns="18000" anchor="ctr">
             <a:spAutoFit/>
           </a:bodyPr>
           <a:lstStyle/>
           <a:p>
             <a:pPr algn="r">
               <a:lnSpc>
-                <a:spcPct val="130000"/>
-              </a:lnSpc>
-            </a:pPr>
-            <a:r>
-              <a:rPr sz="1100" b="0">
+                <a:spcPct val="125000"/>
+              </a:lnSpc>
+            </a:pPr>
+            <a:r>
+              <a:rPr sz="1000" b="0">
                 <a:solidFill>
                   <a:srgbClr val="FFFFFF"/>
                 </a:solidFill>
@@ -10836,7 +10717,7 @@
         <p:spPr>
           <a:xfrm>
             <a:off x="0" y="0"/>
-            <a:ext cx="12192119" cy="1007999"/>
+            <a:ext cx="12192119" cy="936000"/>
           </a:xfrm>
           <a:prstGeom prst="rect">
             <a:avLst/>
@@ -10879,8 +10760,8 @@
         </p:nvSpPr>
         <p:spPr>
           <a:xfrm>
-            <a:off x="0" y="1007999"/>
-            <a:ext cx="12192119" cy="79200"/>
+            <a:off x="0" y="936000"/>
+            <a:ext cx="12192119" cy="72000"/>
           </a:xfrm>
           <a:prstGeom prst="rect">
             <a:avLst/>
@@ -10924,7 +10805,7 @@
         <p:spPr>
           <a:xfrm>
             <a:off x="288000" y="198000"/>
-            <a:ext cx="864000" cy="612000"/>
+            <a:ext cx="792000" cy="540000"/>
           </a:xfrm>
           <a:prstGeom prst="roundRect">
             <a:avLst>
@@ -10970,7 +10851,7 @@
         <p:spPr>
           <a:xfrm>
             <a:off x="288000" y="198000"/>
-            <a:ext cx="864000" cy="612000"/>
+            <a:ext cx="792000" cy="540000"/>
           </a:xfrm>
           <a:prstGeom prst="rect">
             <a:avLst/>
@@ -10978,18 +10859,18 @@
           <a:noFill/>
         </p:spPr>
         <p:txBody>
-          <a:bodyPr wrap="square" lIns="54000" rIns="54000" tIns="18000" bIns="18000" anchor="ctr">
+          <a:bodyPr wrap="square" lIns="43200" rIns="43200" tIns="18000" bIns="18000" anchor="ctr">
             <a:spAutoFit/>
           </a:bodyPr>
           <a:lstStyle/>
           <a:p>
             <a:pPr algn="ctr">
               <a:lnSpc>
-                <a:spcPct val="130000"/>
-              </a:lnSpc>
-            </a:pPr>
-            <a:r>
-              <a:rPr sz="3200" b="1">
+                <a:spcPct val="125000"/>
+              </a:lnSpc>
+            </a:pPr>
+            <a:r>
+              <a:rPr sz="2800" b="1">
                 <a:solidFill>
                   <a:srgbClr val="FFFFFF"/>
                 </a:solidFill>
@@ -11009,8 +10890,8 @@
         </p:nvSpPr>
         <p:spPr>
           <a:xfrm>
-            <a:off x="1296000" y="198000"/>
-            <a:ext cx="9360000" cy="612000"/>
+            <a:off x="1224000" y="198000"/>
+            <a:ext cx="9540000" cy="540000"/>
           </a:xfrm>
           <a:prstGeom prst="rect">
             <a:avLst/>
@@ -11018,25 +10899,25 @@
           <a:noFill/>
         </p:spPr>
         <p:txBody>
-          <a:bodyPr wrap="square" lIns="54000" rIns="54000" tIns="18000" bIns="18000" anchor="ctr">
+          <a:bodyPr wrap="square" lIns="43200" rIns="43200" tIns="18000" bIns="18000" anchor="ctr">
             <a:spAutoFit/>
           </a:bodyPr>
           <a:lstStyle/>
           <a:p>
             <a:pPr algn="l">
               <a:lnSpc>
-                <a:spcPct val="130000"/>
-              </a:lnSpc>
-            </a:pPr>
-            <a:r>
-              <a:rPr sz="3200" b="1">
+                <a:spcPct val="125000"/>
+              </a:lnSpc>
+            </a:pPr>
+            <a:r>
+              <a:rPr sz="2800" b="1">
                 <a:solidFill>
                   <a:srgbClr val="FFFFFF"/>
                 </a:solidFill>
                 <a:latin typeface="メイリオ"/>
                 <a:rFonts eastAsia="メイリオ" ascii="メイリオ" hAnsi="メイリオ"/>
               </a:rPr>
-              <a:t>I C T × 体 育  ─  深 い 学 び の 道 具 と し て</a:t>
+              <a:t>ICT × 体育 ─ 深い学びの道具として</a:t>
             </a:r>
           </a:p>
         </p:txBody>
@@ -11049,8 +10930,8 @@
         </p:nvSpPr>
         <p:spPr>
           <a:xfrm>
-            <a:off x="10872000" y="198000"/>
-            <a:ext cx="1116000" cy="612000"/>
+            <a:off x="10800000" y="198000"/>
+            <a:ext cx="1080000" cy="540000"/>
           </a:xfrm>
           <a:prstGeom prst="rect">
             <a:avLst/>
@@ -11058,18 +10939,18 @@
           <a:noFill/>
         </p:spPr>
         <p:txBody>
-          <a:bodyPr wrap="square" lIns="54000" rIns="54000" tIns="18000" bIns="18000" anchor="ctr">
+          <a:bodyPr wrap="square" lIns="43200" rIns="43200" tIns="18000" bIns="18000" anchor="ctr">
             <a:spAutoFit/>
           </a:bodyPr>
           <a:lstStyle/>
           <a:p>
             <a:pPr algn="r">
               <a:lnSpc>
-                <a:spcPct val="130000"/>
-              </a:lnSpc>
-            </a:pPr>
-            <a:r>
-              <a:rPr sz="1800" b="0">
+                <a:spcPct val="125000"/>
+              </a:lnSpc>
+            </a:pPr>
+            <a:r>
+              <a:rPr sz="1600" b="0">
                 <a:solidFill>
                   <a:srgbClr val="FFFFFF"/>
                 </a:solidFill>
@@ -11089,8 +10970,8 @@
         </p:nvSpPr>
         <p:spPr>
           <a:xfrm>
-            <a:off x="288000" y="1224000"/>
-            <a:ext cx="11627999" cy="503999"/>
+            <a:off x="288000" y="1080000"/>
+            <a:ext cx="11627999" cy="468000"/>
           </a:xfrm>
           <a:prstGeom prst="rect">
             <a:avLst/>
@@ -11098,25 +10979,25 @@
           <a:noFill/>
         </p:spPr>
         <p:txBody>
-          <a:bodyPr wrap="square" lIns="54000" rIns="54000" tIns="18000" bIns="18000" anchor="ctr">
+          <a:bodyPr wrap="square" lIns="43200" rIns="43200" tIns="18000" bIns="18000" anchor="ctr">
             <a:spAutoFit/>
           </a:bodyPr>
           <a:lstStyle/>
           <a:p>
             <a:pPr algn="ctr">
               <a:lnSpc>
-                <a:spcPct val="130000"/>
-              </a:lnSpc>
-            </a:pPr>
-            <a:r>
-              <a:rPr sz="2200" b="1">
+                <a:spcPct val="125000"/>
+              </a:lnSpc>
+            </a:pPr>
+            <a:r>
+              <a:rPr sz="2000" b="1">
                 <a:solidFill>
                   <a:srgbClr val="1F3A5F"/>
                 </a:solidFill>
                 <a:latin typeface="メイリオ"/>
                 <a:rFonts eastAsia="メイリオ" ascii="メイリオ" hAnsi="メイリオ"/>
               </a:rPr>
-              <a:t>「何のため に 使うか」 を 常に 問い直す</a:t>
+              <a:t>「何のために使うか」を 常に 問い直す</a:t>
             </a:r>
           </a:p>
         </p:txBody>
@@ -11129,8 +11010,8 @@
         </p:nvSpPr>
         <p:spPr>
           <a:xfrm>
-            <a:off x="306000" y="1872000"/>
-            <a:ext cx="5688000" cy="4212000"/>
+            <a:off x="306000" y="1692000"/>
+            <a:ext cx="5688000" cy="4320000"/>
           </a:xfrm>
           <a:prstGeom prst="roundRect">
             <a:avLst>
@@ -11177,7 +11058,7 @@
         </p:nvSpPr>
         <p:spPr>
           <a:xfrm>
-            <a:off x="306000" y="1872000"/>
+            <a:off x="306000" y="1692000"/>
             <a:ext cx="5688000" cy="720000"/>
           </a:xfrm>
           <a:prstGeom prst="rect">
@@ -11221,7 +11102,7 @@
         </p:nvSpPr>
         <p:spPr>
           <a:xfrm>
-            <a:off x="306000" y="1872000"/>
+            <a:off x="306000" y="1692000"/>
             <a:ext cx="5688000" cy="720000"/>
           </a:xfrm>
           <a:prstGeom prst="rect">
@@ -11230,14 +11111,14 @@
           <a:noFill/>
         </p:spPr>
         <p:txBody>
-          <a:bodyPr wrap="square" lIns="54000" rIns="54000" tIns="18000" bIns="18000" anchor="ctr">
+          <a:bodyPr wrap="square" lIns="43200" rIns="43200" tIns="18000" bIns="18000" anchor="ctr">
             <a:spAutoFit/>
           </a:bodyPr>
           <a:lstStyle/>
           <a:p>
             <a:pPr algn="ctr">
               <a:lnSpc>
-                <a:spcPct val="130000"/>
+                <a:spcPct val="125000"/>
               </a:lnSpc>
             </a:pPr>
             <a:r>
@@ -11248,7 +11129,7 @@
                 <a:latin typeface="メイリオ"/>
                 <a:rFonts eastAsia="メイリオ" ascii="メイリオ" hAnsi="メイリオ"/>
               </a:rPr>
-              <a:t>活 か す  使 い 方</a:t>
+              <a:t>活かす 使い方</a:t>
             </a:r>
           </a:p>
         </p:txBody>
@@ -11261,8 +11142,8 @@
         </p:nvSpPr>
         <p:spPr>
           <a:xfrm>
-            <a:off x="503999" y="2700000"/>
-            <a:ext cx="5292000" cy="3240000"/>
+            <a:off x="503999" y="2556000"/>
+            <a:ext cx="5292000" cy="3384000"/>
           </a:xfrm>
           <a:prstGeom prst="rect">
             <a:avLst/>
@@ -11270,14 +11151,14 @@
           <a:noFill/>
         </p:spPr>
         <p:txBody>
-          <a:bodyPr wrap="square" lIns="54000" rIns="54000" tIns="18000" bIns="18000" anchor="t">
+          <a:bodyPr wrap="square" lIns="43200" rIns="43200" tIns="18000" bIns="18000" anchor="t">
             <a:spAutoFit/>
           </a:bodyPr>
           <a:lstStyle/>
           <a:p>
             <a:pPr algn="l">
               <a:lnSpc>
-                <a:spcPct val="150000"/>
+                <a:spcPct val="165000"/>
               </a:lnSpc>
             </a:pPr>
             <a:r>
@@ -11294,7 +11175,7 @@
           <a:p>
             <a:pPr algn="l">
               <a:lnSpc>
-                <a:spcPct val="150000"/>
+                <a:spcPct val="165000"/>
               </a:lnSpc>
             </a:pPr>
             <a:r>
@@ -11305,13 +11186,13 @@
                 <a:latin typeface="メイリオ"/>
                 <a:rFonts eastAsia="メイリオ" ascii="メイリオ" hAnsi="メイリオ"/>
               </a:rPr>
-              <a:t>　 （動画で 自分・仲間を 見る）</a:t>
+              <a:t>　（動画で 振り返り）</a:t>
             </a:r>
           </a:p>
           <a:p>
             <a:pPr algn="l">
               <a:lnSpc>
-                <a:spcPct val="150000"/>
+                <a:spcPct val="165000"/>
               </a:lnSpc>
             </a:pPr>
             <a:r>
@@ -11322,13 +11203,13 @@
                 <a:latin typeface="メイリオ"/>
                 <a:rFonts eastAsia="メイリオ" ascii="メイリオ" hAnsi="メイリオ"/>
               </a:rPr>
-              <a:t/>
+              <a:t>● データ で 検証</a:t>
             </a:r>
           </a:p>
           <a:p>
             <a:pPr algn="l">
               <a:lnSpc>
-                <a:spcPct val="150000"/>
+                <a:spcPct val="165000"/>
               </a:lnSpc>
             </a:pPr>
             <a:r>
@@ -11339,13 +11220,13 @@
                 <a:latin typeface="メイリオ"/>
                 <a:rFonts eastAsia="メイリオ" ascii="メイリオ" hAnsi="メイリオ"/>
               </a:rPr>
-              <a:t>● データ で 振り返り</a:t>
+              <a:t>　（タイム・歩数 等）</a:t>
             </a:r>
           </a:p>
           <a:p>
             <a:pPr algn="l">
               <a:lnSpc>
-                <a:spcPct val="150000"/>
+                <a:spcPct val="165000"/>
               </a:lnSpc>
             </a:pPr>
             <a:r>
@@ -11356,13 +11237,13 @@
                 <a:latin typeface="メイリオ"/>
                 <a:rFonts eastAsia="メイリオ" ascii="メイリオ" hAnsi="メイリオ"/>
               </a:rPr>
-              <a:t>　 （ラップタイム・心拍 等）</a:t>
+              <a:t>● クラウド で 共有</a:t>
             </a:r>
           </a:p>
           <a:p>
             <a:pPr algn="l">
               <a:lnSpc>
-                <a:spcPct val="150000"/>
+                <a:spcPct val="165000"/>
               </a:lnSpc>
             </a:pPr>
             <a:r>
@@ -11373,41 +11254,7 @@
                 <a:latin typeface="メイリオ"/>
                 <a:rFonts eastAsia="メイリオ" ascii="メイリオ" hAnsi="メイリオ"/>
               </a:rPr>
-              <a:t/>
-            </a:r>
-          </a:p>
-          <a:p>
-            <a:pPr algn="l">
-              <a:lnSpc>
-                <a:spcPct val="150000"/>
-              </a:lnSpc>
-            </a:pPr>
-            <a:r>
-              <a:rPr sz="2200" b="0">
-                <a:solidFill>
-                  <a:srgbClr val="2B2B2B"/>
-                </a:solidFill>
-                <a:latin typeface="メイリオ"/>
-                <a:rFonts eastAsia="メイリオ" ascii="メイリオ" hAnsi="メイリオ"/>
-              </a:rPr>
-              <a:t>● クラウド で 即時共有</a:t>
-            </a:r>
-          </a:p>
-          <a:p>
-            <a:pPr algn="l">
-              <a:lnSpc>
-                <a:spcPct val="150000"/>
-              </a:lnSpc>
-            </a:pPr>
-            <a:r>
-              <a:rPr sz="2200" b="0">
-                <a:solidFill>
-                  <a:srgbClr val="2B2B2B"/>
-                </a:solidFill>
-                <a:latin typeface="メイリオ"/>
-                <a:rFonts eastAsia="メイリオ" ascii="メイリオ" hAnsi="メイリオ"/>
-              </a:rPr>
-              <a:t>　 （作戦 ・ 気付き）</a:t>
+              <a:t>　（作戦・気付き）</a:t>
             </a:r>
           </a:p>
         </p:txBody>
@@ -11420,8 +11267,8 @@
         </p:nvSpPr>
         <p:spPr>
           <a:xfrm>
-            <a:off x="6192000" y="1872000"/>
-            <a:ext cx="5688000" cy="4212000"/>
+            <a:off x="6192000" y="1692000"/>
+            <a:ext cx="5688000" cy="4320000"/>
           </a:xfrm>
           <a:prstGeom prst="roundRect">
             <a:avLst>
@@ -11468,7 +11315,7 @@
         </p:nvSpPr>
         <p:spPr>
           <a:xfrm>
-            <a:off x="6192000" y="1872000"/>
+            <a:off x="6192000" y="1692000"/>
             <a:ext cx="5688000" cy="720000"/>
           </a:xfrm>
           <a:prstGeom prst="rect">
@@ -11512,7 +11359,7 @@
         </p:nvSpPr>
         <p:spPr>
           <a:xfrm>
-            <a:off x="6192000" y="1872000"/>
+            <a:off x="6192000" y="1692000"/>
             <a:ext cx="5688000" cy="720000"/>
           </a:xfrm>
           <a:prstGeom prst="rect">
@@ -11521,14 +11368,14 @@
           <a:noFill/>
         </p:spPr>
         <p:txBody>
-          <a:bodyPr wrap="square" lIns="54000" rIns="54000" tIns="18000" bIns="18000" anchor="ctr">
+          <a:bodyPr wrap="square" lIns="43200" rIns="43200" tIns="18000" bIns="18000" anchor="ctr">
             <a:spAutoFit/>
           </a:bodyPr>
           <a:lstStyle/>
           <a:p>
             <a:pPr algn="ctr">
               <a:lnSpc>
-                <a:spcPct val="130000"/>
+                <a:spcPct val="125000"/>
               </a:lnSpc>
             </a:pPr>
             <a:r>
@@ -11539,7 +11386,7 @@
                 <a:latin typeface="メイリオ"/>
                 <a:rFonts eastAsia="メイリオ" ascii="メイリオ" hAnsi="メイリオ"/>
               </a:rPr>
-              <a:t>避 け た い こ と</a:t>
+              <a:t>避けたい こと</a:t>
             </a:r>
           </a:p>
         </p:txBody>
@@ -11552,8 +11399,8 @@
         </p:nvSpPr>
         <p:spPr>
           <a:xfrm>
-            <a:off x="6372000" y="2700000"/>
-            <a:ext cx="5328000" cy="3240000"/>
+            <a:off x="6390000" y="2556000"/>
+            <a:ext cx="5292000" cy="3384000"/>
           </a:xfrm>
           <a:prstGeom prst="rect">
             <a:avLst/>
@@ -11561,14 +11408,14 @@
           <a:noFill/>
         </p:spPr>
         <p:txBody>
-          <a:bodyPr wrap="square" lIns="54000" rIns="54000" tIns="18000" bIns="18000" anchor="t">
+          <a:bodyPr wrap="square" lIns="43200" rIns="43200" tIns="18000" bIns="18000" anchor="t">
             <a:spAutoFit/>
           </a:bodyPr>
           <a:lstStyle/>
           <a:p>
             <a:pPr algn="l">
               <a:lnSpc>
-                <a:spcPct val="150000"/>
+                <a:spcPct val="165000"/>
               </a:lnSpc>
             </a:pPr>
             <a:r>
@@ -11579,13 +11426,13 @@
                 <a:latin typeface="メイリオ"/>
                 <a:rFonts eastAsia="メイリオ" ascii="メイリオ" hAnsi="メイリオ"/>
               </a:rPr>
-              <a:t>● 機器操作 の 目的化</a:t>
+              <a:t>● 機器操作の 目的化</a:t>
             </a:r>
           </a:p>
           <a:p>
             <a:pPr algn="l">
               <a:lnSpc>
-                <a:spcPct val="150000"/>
+                <a:spcPct val="165000"/>
               </a:lnSpc>
             </a:pPr>
             <a:r>
@@ -11596,13 +11443,13 @@
                 <a:latin typeface="メイリオ"/>
                 <a:rFonts eastAsia="メイリオ" ascii="メイリオ" hAnsi="メイリオ"/>
               </a:rPr>
-              <a:t>　 （触ることが 目的になる）</a:t>
+              <a:t>　（触ることが目的に）</a:t>
             </a:r>
           </a:p>
           <a:p>
             <a:pPr algn="l">
               <a:lnSpc>
-                <a:spcPct val="150000"/>
+                <a:spcPct val="165000"/>
               </a:lnSpc>
             </a:pPr>
             <a:r>
@@ -11613,13 +11460,13 @@
                 <a:latin typeface="メイリオ"/>
                 <a:rFonts eastAsia="メイリオ" ascii="メイリオ" hAnsi="メイリオ"/>
               </a:rPr>
-              <a:t/>
+              <a:t>● 身体活動時間の 減少</a:t>
             </a:r>
           </a:p>
           <a:p>
             <a:pPr algn="l">
               <a:lnSpc>
-                <a:spcPct val="150000"/>
+                <a:spcPct val="165000"/>
               </a:lnSpc>
             </a:pPr>
             <a:r>
@@ -11630,13 +11477,13 @@
                 <a:latin typeface="メイリオ"/>
                 <a:rFonts eastAsia="メイリオ" ascii="メイリオ" hAnsi="メイリオ"/>
               </a:rPr>
-              <a:t>● 身体活動時間 の 減少</a:t>
+              <a:t>　（動く時間を 削らない）</a:t>
             </a:r>
           </a:p>
           <a:p>
             <a:pPr algn="l">
               <a:lnSpc>
-                <a:spcPct val="150000"/>
+                <a:spcPct val="165000"/>
               </a:lnSpc>
             </a:pPr>
             <a:r>
@@ -11647,13 +11494,13 @@
                 <a:latin typeface="メイリオ"/>
                 <a:rFonts eastAsia="メイリオ" ascii="メイリオ" hAnsi="メイリオ"/>
               </a:rPr>
-              <a:t>　 （動く時間を 削らない）</a:t>
+              <a:t>● 端末頼みの 一斉視聴</a:t>
             </a:r>
           </a:p>
           <a:p>
             <a:pPr algn="l">
               <a:lnSpc>
-                <a:spcPct val="150000"/>
+                <a:spcPct val="165000"/>
               </a:lnSpc>
             </a:pPr>
             <a:r>
@@ -11664,41 +11511,7 @@
                 <a:latin typeface="メイリオ"/>
                 <a:rFonts eastAsia="メイリオ" ascii="メイリオ" hAnsi="メイリオ"/>
               </a:rPr>
-              <a:t/>
-            </a:r>
-          </a:p>
-          <a:p>
-            <a:pPr algn="l">
-              <a:lnSpc>
-                <a:spcPct val="150000"/>
-              </a:lnSpc>
-            </a:pPr>
-            <a:r>
-              <a:rPr sz="2200" b="0">
-                <a:solidFill>
-                  <a:srgbClr val="2B2B2B"/>
-                </a:solidFill>
-                <a:latin typeface="メイリオ"/>
-                <a:rFonts eastAsia="メイリオ" ascii="メイリオ" hAnsi="メイリオ"/>
-              </a:rPr>
-              <a:t>● 端末頼み の 一斉視聴</a:t>
-            </a:r>
-          </a:p>
-          <a:p>
-            <a:pPr algn="l">
-              <a:lnSpc>
-                <a:spcPct val="150000"/>
-              </a:lnSpc>
-            </a:pPr>
-            <a:r>
-              <a:rPr sz="2200" b="0">
-                <a:solidFill>
-                  <a:srgbClr val="2B2B2B"/>
-                </a:solidFill>
-                <a:latin typeface="メイリオ"/>
-                <a:rFonts eastAsia="メイリオ" ascii="メイリオ" hAnsi="メイリオ"/>
-              </a:rPr>
-              <a:t>　 （主体性 を 奪わない）</a:t>
+              <a:t>　（主体性を 奪わない）</a:t>
             </a:r>
           </a:p>
         </p:txBody>
@@ -11711,8 +11524,8 @@
         </p:nvSpPr>
         <p:spPr>
           <a:xfrm>
-            <a:off x="0" y="6588000"/>
-            <a:ext cx="12192119" cy="270000"/>
+            <a:off x="0" y="6606001"/>
+            <a:ext cx="12192119" cy="251999"/>
           </a:xfrm>
           <a:prstGeom prst="rect">
             <a:avLst/>
@@ -11755,8 +11568,8 @@
         </p:nvSpPr>
         <p:spPr>
           <a:xfrm>
-            <a:off x="288000" y="6588000"/>
-            <a:ext cx="7200000" cy="270000"/>
+            <a:off x="288000" y="6606001"/>
+            <a:ext cx="7200000" cy="251999"/>
           </a:xfrm>
           <a:prstGeom prst="rect">
             <a:avLst/>
@@ -11764,18 +11577,18 @@
           <a:noFill/>
         </p:spPr>
         <p:txBody>
-          <a:bodyPr wrap="square" lIns="54000" rIns="54000" tIns="18000" bIns="18000" anchor="ctr">
+          <a:bodyPr wrap="square" lIns="43200" rIns="43200" tIns="18000" bIns="18000" anchor="ctr">
             <a:spAutoFit/>
           </a:bodyPr>
           <a:lstStyle/>
           <a:p>
             <a:pPr algn="l">
               <a:lnSpc>
-                <a:spcPct val="130000"/>
-              </a:lnSpc>
-            </a:pPr>
-            <a:r>
-              <a:rPr sz="1200" b="0">
+                <a:spcPct val="125000"/>
+              </a:lnSpc>
+            </a:pPr>
+            <a:r>
+              <a:rPr sz="1100" b="0">
                 <a:solidFill>
                   <a:srgbClr val="FFFFFF"/>
                 </a:solidFill>
@@ -11795,8 +11608,8 @@
         </p:nvSpPr>
         <p:spPr>
           <a:xfrm>
-            <a:off x="4680000" y="6588000"/>
-            <a:ext cx="7200000" cy="270000"/>
+            <a:off x="4680000" y="6606001"/>
+            <a:ext cx="7200000" cy="251999"/>
           </a:xfrm>
           <a:prstGeom prst="rect">
             <a:avLst/>
@@ -11804,18 +11617,18 @@
           <a:noFill/>
         </p:spPr>
         <p:txBody>
-          <a:bodyPr wrap="square" lIns="54000" rIns="54000" tIns="18000" bIns="18000" anchor="ctr">
+          <a:bodyPr wrap="square" lIns="43200" rIns="43200" tIns="18000" bIns="18000" anchor="ctr">
             <a:spAutoFit/>
           </a:bodyPr>
           <a:lstStyle/>
           <a:p>
             <a:pPr algn="r">
               <a:lnSpc>
-                <a:spcPct val="130000"/>
-              </a:lnSpc>
-            </a:pPr>
-            <a:r>
-              <a:rPr sz="1100" b="0">
+                <a:spcPct val="125000"/>
+              </a:lnSpc>
+            </a:pPr>
+            <a:r>
+              <a:rPr sz="1000" b="0">
                 <a:solidFill>
                   <a:srgbClr val="FFFFFF"/>
                 </a:solidFill>
@@ -11854,7 +11667,7 @@
         <p:spPr>
           <a:xfrm>
             <a:off x="0" y="0"/>
-            <a:ext cx="12192119" cy="1007999"/>
+            <a:ext cx="12192119" cy="936000"/>
           </a:xfrm>
           <a:prstGeom prst="rect">
             <a:avLst/>
@@ -11897,8 +11710,8 @@
         </p:nvSpPr>
         <p:spPr>
           <a:xfrm>
-            <a:off x="0" y="1007999"/>
-            <a:ext cx="12192119" cy="79200"/>
+            <a:off x="0" y="936000"/>
+            <a:ext cx="12192119" cy="72000"/>
           </a:xfrm>
           <a:prstGeom prst="rect">
             <a:avLst/>
@@ -11942,7 +11755,7 @@
         <p:spPr>
           <a:xfrm>
             <a:off x="288000" y="198000"/>
-            <a:ext cx="864000" cy="612000"/>
+            <a:ext cx="792000" cy="540000"/>
           </a:xfrm>
           <a:prstGeom prst="roundRect">
             <a:avLst>
@@ -11988,7 +11801,7 @@
         <p:spPr>
           <a:xfrm>
             <a:off x="288000" y="198000"/>
-            <a:ext cx="864000" cy="612000"/>
+            <a:ext cx="792000" cy="540000"/>
           </a:xfrm>
           <a:prstGeom prst="rect">
             <a:avLst/>
@@ -11996,18 +11809,18 @@
           <a:noFill/>
         </p:spPr>
         <p:txBody>
-          <a:bodyPr wrap="square" lIns="54000" rIns="54000" tIns="18000" bIns="18000" anchor="ctr">
+          <a:bodyPr wrap="square" lIns="43200" rIns="43200" tIns="18000" bIns="18000" anchor="ctr">
             <a:spAutoFit/>
           </a:bodyPr>
           <a:lstStyle/>
           <a:p>
             <a:pPr algn="ctr">
               <a:lnSpc>
-                <a:spcPct val="130000"/>
-              </a:lnSpc>
-            </a:pPr>
-            <a:r>
-              <a:rPr sz="3200" b="1">
+                <a:spcPct val="125000"/>
+              </a:lnSpc>
+            </a:pPr>
+            <a:r>
+              <a:rPr sz="2800" b="1">
                 <a:solidFill>
                   <a:srgbClr val="FFFFFF"/>
                 </a:solidFill>
@@ -12027,8 +11840,8 @@
         </p:nvSpPr>
         <p:spPr>
           <a:xfrm>
-            <a:off x="1296000" y="198000"/>
-            <a:ext cx="9360000" cy="612000"/>
+            <a:off x="1224000" y="198000"/>
+            <a:ext cx="9540000" cy="540000"/>
           </a:xfrm>
           <a:prstGeom prst="rect">
             <a:avLst/>
@@ -12036,25 +11849,25 @@
           <a:noFill/>
         </p:spPr>
         <p:txBody>
-          <a:bodyPr wrap="square" lIns="54000" rIns="54000" tIns="18000" bIns="18000" anchor="ctr">
+          <a:bodyPr wrap="square" lIns="43200" rIns="43200" tIns="18000" bIns="18000" anchor="ctr">
             <a:spAutoFit/>
           </a:bodyPr>
           <a:lstStyle/>
           <a:p>
             <a:pPr algn="l">
               <a:lnSpc>
-                <a:spcPct val="130000"/>
-              </a:lnSpc>
-            </a:pPr>
-            <a:r>
-              <a:rPr sz="3200" b="1">
+                <a:spcPct val="125000"/>
+              </a:lnSpc>
+            </a:pPr>
+            <a:r>
+              <a:rPr sz="2800" b="1">
                 <a:solidFill>
                   <a:srgbClr val="FFFFFF"/>
                 </a:solidFill>
                 <a:latin typeface="メイリオ"/>
                 <a:rFonts eastAsia="メイリオ" ascii="メイリオ" hAnsi="メイリオ"/>
               </a:rPr>
-              <a:t>発 育 ・ 発 達 を 踏 ま え た 指 導 へ</a:t>
+              <a:t>発育・発達を 踏まえた指導へ</a:t>
             </a:r>
           </a:p>
         </p:txBody>
@@ -12067,8 +11880,8 @@
         </p:nvSpPr>
         <p:spPr>
           <a:xfrm>
-            <a:off x="10872000" y="198000"/>
-            <a:ext cx="1116000" cy="612000"/>
+            <a:off x="10800000" y="198000"/>
+            <a:ext cx="1080000" cy="540000"/>
           </a:xfrm>
           <a:prstGeom prst="rect">
             <a:avLst/>
@@ -12076,18 +11889,18 @@
           <a:noFill/>
         </p:spPr>
         <p:txBody>
-          <a:bodyPr wrap="square" lIns="54000" rIns="54000" tIns="18000" bIns="18000" anchor="ctr">
+          <a:bodyPr wrap="square" lIns="43200" rIns="43200" tIns="18000" bIns="18000" anchor="ctr">
             <a:spAutoFit/>
           </a:bodyPr>
           <a:lstStyle/>
           <a:p>
             <a:pPr algn="r">
               <a:lnSpc>
-                <a:spcPct val="130000"/>
-              </a:lnSpc>
-            </a:pPr>
-            <a:r>
-              <a:rPr sz="1800" b="0">
+                <a:spcPct val="125000"/>
+              </a:lnSpc>
+            </a:pPr>
+            <a:r>
+              <a:rPr sz="1600" b="0">
                 <a:solidFill>
                   <a:srgbClr val="FFFFFF"/>
                 </a:solidFill>
@@ -12107,8 +11920,8 @@
         </p:nvSpPr>
         <p:spPr>
           <a:xfrm>
-            <a:off x="288000" y="1224000"/>
-            <a:ext cx="11627999" cy="503999"/>
+            <a:off x="288000" y="1080000"/>
+            <a:ext cx="11627999" cy="468000"/>
           </a:xfrm>
           <a:prstGeom prst="rect">
             <a:avLst/>
@@ -12116,25 +11929,25 @@
           <a:noFill/>
         </p:spPr>
         <p:txBody>
-          <a:bodyPr wrap="square" lIns="54000" rIns="54000" tIns="18000" bIns="18000" anchor="ctr">
+          <a:bodyPr wrap="square" lIns="43200" rIns="43200" tIns="18000" bIns="18000" anchor="ctr">
             <a:spAutoFit/>
           </a:bodyPr>
           <a:lstStyle/>
           <a:p>
             <a:pPr algn="ctr">
               <a:lnSpc>
-                <a:spcPct val="130000"/>
-              </a:lnSpc>
-            </a:pPr>
-            <a:r>
-              <a:rPr sz="2200" b="1">
+                <a:spcPct val="125000"/>
+              </a:lnSpc>
+            </a:pPr>
+            <a:r>
+              <a:rPr sz="2000" b="1">
                 <a:solidFill>
                   <a:srgbClr val="1F3A5F"/>
                 </a:solidFill>
                 <a:latin typeface="メイリオ"/>
                 <a:rFonts eastAsia="メイリオ" ascii="メイリオ" hAnsi="メイリオ"/>
               </a:rPr>
-              <a:t>段階性 に 応じた 指導 が、 安全 と 深い学び を 支える</a:t>
+              <a:t>段階性に応じた指導 が、安全 と 深い学び を支える</a:t>
             </a:r>
           </a:p>
         </p:txBody>
@@ -12147,8 +11960,8 @@
         </p:nvSpPr>
         <p:spPr>
           <a:xfrm>
-            <a:off x="720000" y="1908000"/>
-            <a:ext cx="10728000" cy="3780000"/>
+            <a:off x="720000" y="1692000"/>
+            <a:ext cx="10728000" cy="4140000"/>
           </a:xfrm>
           <a:prstGeom prst="roundRect">
             <a:avLst>
@@ -12195,8 +12008,8 @@
         </p:nvSpPr>
         <p:spPr>
           <a:xfrm>
-            <a:off x="900000" y="2015999"/>
-            <a:ext cx="10368000" cy="432000"/>
+            <a:off x="900000" y="1835999"/>
+            <a:ext cx="10368000" cy="360000"/>
           </a:xfrm>
           <a:prstGeom prst="rect">
             <a:avLst/>
@@ -12204,25 +12017,25 @@
           <a:noFill/>
         </p:spPr>
         <p:txBody>
-          <a:bodyPr wrap="square" lIns="54000" rIns="54000" tIns="18000" bIns="18000" anchor="ctr">
+          <a:bodyPr wrap="square" lIns="43200" rIns="43200" tIns="18000" bIns="18000" anchor="ctr">
             <a:spAutoFit/>
           </a:bodyPr>
           <a:lstStyle/>
           <a:p>
             <a:pPr algn="ctr">
               <a:lnSpc>
-                <a:spcPct val="130000"/>
-              </a:lnSpc>
-            </a:pPr>
-            <a:r>
-              <a:rPr sz="2200" b="1">
+                <a:spcPct val="125000"/>
+              </a:lnSpc>
+            </a:pPr>
+            <a:r>
+              <a:rPr sz="2000" b="1">
                 <a:solidFill>
                   <a:srgbClr val="2E6FB8"/>
                 </a:solidFill>
                 <a:latin typeface="メイリオ"/>
                 <a:rFonts eastAsia="メイリオ" ascii="メイリオ" hAnsi="メイリオ"/>
               </a:rPr>
-              <a:t>神 経 系 の 発 達 が 完 成 に 近 づ く 時 期</a:t>
+              <a:t>神経系の発達が完成に近づく時期</a:t>
             </a:r>
           </a:p>
         </p:txBody>
@@ -12235,8 +12048,8 @@
         </p:nvSpPr>
         <p:spPr>
           <a:xfrm>
-            <a:off x="900000" y="2520000"/>
-            <a:ext cx="10368000" cy="1080000"/>
+            <a:off x="900000" y="2340000"/>
+            <a:ext cx="10368000" cy="900000"/>
           </a:xfrm>
           <a:prstGeom prst="rect">
             <a:avLst/>
@@ -12244,25 +12057,25 @@
           <a:noFill/>
         </p:spPr>
         <p:txBody>
-          <a:bodyPr wrap="square" lIns="54000" rIns="54000" tIns="18000" bIns="18000" anchor="ctr">
+          <a:bodyPr wrap="square" lIns="43200" rIns="43200" tIns="18000" bIns="18000" anchor="ctr">
             <a:spAutoFit/>
           </a:bodyPr>
           <a:lstStyle/>
           <a:p>
             <a:pPr algn="ctr">
               <a:lnSpc>
-                <a:spcPct val="130000"/>
-              </a:lnSpc>
-            </a:pPr>
-            <a:r>
-              <a:rPr sz="4400" b="1">
+                <a:spcPct val="125000"/>
+              </a:lnSpc>
+            </a:pPr>
+            <a:r>
+              <a:rPr sz="4000" b="1">
                 <a:solidFill>
                   <a:srgbClr val="1F3A5F"/>
                 </a:solidFill>
                 <a:latin typeface="メイリオ"/>
                 <a:rFonts eastAsia="メイリオ" ascii="メイリオ" hAnsi="メイリオ"/>
               </a:rPr>
-              <a:t>9 〜 12 歳  ／  ゴ ー ル デ ン エ イ ジ</a:t>
+              <a:t>9〜12歳  ／  ゴールデンエイジ</a:t>
             </a:r>
           </a:p>
         </p:txBody>
@@ -12275,8 +12088,8 @@
         </p:nvSpPr>
         <p:spPr>
           <a:xfrm>
-            <a:off x="2880000" y="3708000"/>
-            <a:ext cx="6426000" cy="43200"/>
+            <a:off x="3240000" y="3384000"/>
+            <a:ext cx="5706000" cy="36000"/>
           </a:xfrm>
           <a:prstGeom prst="rect">
             <a:avLst/>
@@ -12319,8 +12132,8 @@
         </p:nvSpPr>
         <p:spPr>
           <a:xfrm>
-            <a:off x="900000" y="3851999"/>
-            <a:ext cx="10368000" cy="1728000"/>
+            <a:off x="1080000" y="3528000"/>
+            <a:ext cx="10080000" cy="2160000"/>
           </a:xfrm>
           <a:prstGeom prst="rect">
             <a:avLst/>
@@ -12328,93 +12141,59 @@
           <a:noFill/>
         </p:spPr>
         <p:txBody>
-          <a:bodyPr wrap="square" lIns="54000" rIns="54000" tIns="18000" bIns="18000" anchor="ctr">
+          <a:bodyPr wrap="square" lIns="43200" rIns="43200" tIns="18000" bIns="18000" anchor="ctr">
             <a:spAutoFit/>
           </a:bodyPr>
           <a:lstStyle/>
           <a:p>
             <a:pPr algn="l">
               <a:lnSpc>
-                <a:spcPct val="150000"/>
-              </a:lnSpc>
-            </a:pPr>
-            <a:r>
-              <a:rPr sz="2400" b="0">
+                <a:spcPct val="220000"/>
+              </a:lnSpc>
+            </a:pPr>
+            <a:r>
+              <a:rPr sz="2200" b="0">
                 <a:solidFill>
                   <a:srgbClr val="2B2B2B"/>
                 </a:solidFill>
                 <a:latin typeface="メイリオ"/>
                 <a:rFonts eastAsia="メイリオ" ascii="メイリオ" hAnsi="メイリオ"/>
               </a:rPr>
-              <a:t>● 新しい 動作 や 技 を 短時間で 正確に 習得できる</a:t>
+              <a:t>● 新しい動作や技を 短時間で 習得できる時期</a:t>
             </a:r>
           </a:p>
           <a:p>
             <a:pPr algn="l">
               <a:lnSpc>
-                <a:spcPct val="150000"/>
-              </a:lnSpc>
-            </a:pPr>
-            <a:r>
-              <a:rPr sz="2400" b="0">
+                <a:spcPct val="220000"/>
+              </a:lnSpc>
+            </a:pPr>
+            <a:r>
+              <a:rPr sz="2200" b="0">
                 <a:solidFill>
                   <a:srgbClr val="2B2B2B"/>
                 </a:solidFill>
                 <a:latin typeface="メイリオ"/>
                 <a:rFonts eastAsia="メイリオ" ascii="メイリオ" hAnsi="メイリオ"/>
               </a:rPr>
-              <a:t/>
+              <a:t>● 多様な動きの経験 が一生の財産になる</a:t>
             </a:r>
           </a:p>
           <a:p>
             <a:pPr algn="l">
               <a:lnSpc>
-                <a:spcPct val="150000"/>
-              </a:lnSpc>
-            </a:pPr>
-            <a:r>
-              <a:rPr sz="2400" b="0">
+                <a:spcPct val="220000"/>
+              </a:lnSpc>
+            </a:pPr>
+            <a:r>
+              <a:rPr sz="2200" b="0">
                 <a:solidFill>
                   <a:srgbClr val="2B2B2B"/>
                 </a:solidFill>
                 <a:latin typeface="メイリオ"/>
                 <a:rFonts eastAsia="メイリオ" ascii="メイリオ" hAnsi="メイリオ"/>
               </a:rPr>
-              <a:t>● この時期の 多様な動きの経験 が 一生の財産 に</a:t>
-            </a:r>
-          </a:p>
-          <a:p>
-            <a:pPr algn="l">
-              <a:lnSpc>
-                <a:spcPct val="150000"/>
-              </a:lnSpc>
-            </a:pPr>
-            <a:r>
-              <a:rPr sz="2400" b="0">
-                <a:solidFill>
-                  <a:srgbClr val="2B2B2B"/>
-                </a:solidFill>
-                <a:latin typeface="メイリオ"/>
-                <a:rFonts eastAsia="メイリオ" ascii="メイリオ" hAnsi="メイリオ"/>
-              </a:rPr>
-              <a:t/>
-            </a:r>
-          </a:p>
-          <a:p>
-            <a:pPr algn="l">
-              <a:lnSpc>
-                <a:spcPct val="150000"/>
-              </a:lnSpc>
-            </a:pPr>
-            <a:r>
-              <a:rPr sz="2400" b="0">
-                <a:solidFill>
-                  <a:srgbClr val="2B2B2B"/>
-                </a:solidFill>
-                <a:latin typeface="メイリオ"/>
-                <a:rFonts eastAsia="メイリオ" ascii="メイリオ" hAnsi="メイリオ"/>
-              </a:rPr>
-              <a:t>● 過度な 同一運動 ・ 早期専門化 は スポーツ障害 のリスク</a:t>
+              <a:t>● 過度な同一運動・早期専門化は 障害のリスク</a:t>
             </a:r>
           </a:p>
         </p:txBody>
@@ -12427,8 +12206,8 @@
         </p:nvSpPr>
         <p:spPr>
           <a:xfrm>
-            <a:off x="306000" y="5868000"/>
-            <a:ext cx="11574000" cy="576000"/>
+            <a:off x="306000" y="5940000"/>
+            <a:ext cx="11574000" cy="503999"/>
           </a:xfrm>
           <a:prstGeom prst="roundRect">
             <a:avLst>
@@ -12473,8 +12252,8 @@
         </p:nvSpPr>
         <p:spPr>
           <a:xfrm>
-            <a:off x="306000" y="5868000"/>
-            <a:ext cx="11574000" cy="576000"/>
+            <a:off x="306000" y="5940000"/>
+            <a:ext cx="11574000" cy="503999"/>
           </a:xfrm>
           <a:prstGeom prst="rect">
             <a:avLst/>
@@ -12482,14 +12261,14 @@
           <a:noFill/>
         </p:spPr>
         <p:txBody>
-          <a:bodyPr wrap="square" lIns="54000" rIns="54000" tIns="18000" bIns="18000" anchor="ctr">
+          <a:bodyPr wrap="square" lIns="43200" rIns="43200" tIns="18000" bIns="18000" anchor="ctr">
             <a:spAutoFit/>
           </a:bodyPr>
           <a:lstStyle/>
           <a:p>
             <a:pPr algn="ctr">
               <a:lnSpc>
-                <a:spcPct val="130000"/>
+                <a:spcPct val="125000"/>
               </a:lnSpc>
             </a:pPr>
             <a:r>
@@ -12500,7 +12279,7 @@
                 <a:latin typeface="メイリオ"/>
                 <a:rFonts eastAsia="メイリオ" ascii="メイリオ" hAnsi="メイリオ"/>
               </a:rPr>
-              <a:t>「 体力テスト で 計れない 多様な動き 」 を 小学校 で 経験させる</a:t>
+              <a:t>体力テストで計れない 多様な動きを 小学校で経験させる</a:t>
             </a:r>
           </a:p>
         </p:txBody>
@@ -12513,8 +12292,8 @@
         </p:nvSpPr>
         <p:spPr>
           <a:xfrm>
-            <a:off x="0" y="6588000"/>
-            <a:ext cx="12192119" cy="270000"/>
+            <a:off x="0" y="6606001"/>
+            <a:ext cx="12192119" cy="251999"/>
           </a:xfrm>
           <a:prstGeom prst="rect">
             <a:avLst/>
@@ -12557,8 +12336,8 @@
         </p:nvSpPr>
         <p:spPr>
           <a:xfrm>
-            <a:off x="288000" y="6588000"/>
-            <a:ext cx="7200000" cy="270000"/>
+            <a:off x="288000" y="6606001"/>
+            <a:ext cx="7200000" cy="251999"/>
           </a:xfrm>
           <a:prstGeom prst="rect">
             <a:avLst/>
@@ -12566,18 +12345,18 @@
           <a:noFill/>
         </p:spPr>
         <p:txBody>
-          <a:bodyPr wrap="square" lIns="54000" rIns="54000" tIns="18000" bIns="18000" anchor="ctr">
+          <a:bodyPr wrap="square" lIns="43200" rIns="43200" tIns="18000" bIns="18000" anchor="ctr">
             <a:spAutoFit/>
           </a:bodyPr>
           <a:lstStyle/>
           <a:p>
             <a:pPr algn="l">
               <a:lnSpc>
-                <a:spcPct val="130000"/>
-              </a:lnSpc>
-            </a:pPr>
-            <a:r>
-              <a:rPr sz="1200" b="0">
+                <a:spcPct val="125000"/>
+              </a:lnSpc>
+            </a:pPr>
+            <a:r>
+              <a:rPr sz="1100" b="0">
                 <a:solidFill>
                   <a:srgbClr val="FFFFFF"/>
                 </a:solidFill>
@@ -12597,8 +12376,8 @@
         </p:nvSpPr>
         <p:spPr>
           <a:xfrm>
-            <a:off x="4680000" y="6588000"/>
-            <a:ext cx="7200000" cy="270000"/>
+            <a:off x="4680000" y="6606001"/>
+            <a:ext cx="7200000" cy="251999"/>
           </a:xfrm>
           <a:prstGeom prst="rect">
             <a:avLst/>
@@ -12606,18 +12385,18 @@
           <a:noFill/>
         </p:spPr>
         <p:txBody>
-          <a:bodyPr wrap="square" lIns="54000" rIns="54000" tIns="18000" bIns="18000" anchor="ctr">
+          <a:bodyPr wrap="square" lIns="43200" rIns="43200" tIns="18000" bIns="18000" anchor="ctr">
             <a:spAutoFit/>
           </a:bodyPr>
           <a:lstStyle/>
           <a:p>
             <a:pPr algn="r">
               <a:lnSpc>
-                <a:spcPct val="130000"/>
-              </a:lnSpc>
-            </a:pPr>
-            <a:r>
-              <a:rPr sz="1100" b="0">
+                <a:spcPct val="125000"/>
+              </a:lnSpc>
+            </a:pPr>
+            <a:r>
+              <a:rPr sz="1000" b="0">
                 <a:solidFill>
                   <a:srgbClr val="FFFFFF"/>
                 </a:solidFill>
@@ -12656,7 +12435,7 @@
         <p:spPr>
           <a:xfrm>
             <a:off x="0" y="0"/>
-            <a:ext cx="12192119" cy="1007999"/>
+            <a:ext cx="12192119" cy="936000"/>
           </a:xfrm>
           <a:prstGeom prst="rect">
             <a:avLst/>
@@ -12699,8 +12478,8 @@
         </p:nvSpPr>
         <p:spPr>
           <a:xfrm>
-            <a:off x="0" y="1007999"/>
-            <a:ext cx="12192119" cy="79200"/>
+            <a:off x="0" y="936000"/>
+            <a:ext cx="12192119" cy="72000"/>
           </a:xfrm>
           <a:prstGeom prst="rect">
             <a:avLst/>
@@ -12744,7 +12523,7 @@
         <p:spPr>
           <a:xfrm>
             <a:off x="288000" y="198000"/>
-            <a:ext cx="864000" cy="612000"/>
+            <a:ext cx="792000" cy="540000"/>
           </a:xfrm>
           <a:prstGeom prst="roundRect">
             <a:avLst>
@@ -12790,7 +12569,7 @@
         <p:spPr>
           <a:xfrm>
             <a:off x="288000" y="198000"/>
-            <a:ext cx="864000" cy="612000"/>
+            <a:ext cx="792000" cy="540000"/>
           </a:xfrm>
           <a:prstGeom prst="rect">
             <a:avLst/>
@@ -12798,18 +12577,18 @@
           <a:noFill/>
         </p:spPr>
         <p:txBody>
-          <a:bodyPr wrap="square" lIns="54000" rIns="54000" tIns="18000" bIns="18000" anchor="ctr">
+          <a:bodyPr wrap="square" lIns="43200" rIns="43200" tIns="18000" bIns="18000" anchor="ctr">
             <a:spAutoFit/>
           </a:bodyPr>
           <a:lstStyle/>
           <a:p>
             <a:pPr algn="ctr">
               <a:lnSpc>
-                <a:spcPct val="130000"/>
-              </a:lnSpc>
-            </a:pPr>
-            <a:r>
-              <a:rPr sz="3200" b="1">
+                <a:spcPct val="125000"/>
+              </a:lnSpc>
+            </a:pPr>
+            <a:r>
+              <a:rPr sz="2800" b="1">
                 <a:solidFill>
                   <a:srgbClr val="FFFFFF"/>
                 </a:solidFill>
@@ -12829,8 +12608,8 @@
         </p:nvSpPr>
         <p:spPr>
           <a:xfrm>
-            <a:off x="1296000" y="198000"/>
-            <a:ext cx="9360000" cy="612000"/>
+            <a:off x="1224000" y="198000"/>
+            <a:ext cx="9540000" cy="540000"/>
           </a:xfrm>
           <a:prstGeom prst="rect">
             <a:avLst/>
@@ -12838,25 +12617,25 @@
           <a:noFill/>
         </p:spPr>
         <p:txBody>
-          <a:bodyPr wrap="square" lIns="54000" rIns="54000" tIns="18000" bIns="18000" anchor="ctr">
+          <a:bodyPr wrap="square" lIns="43200" rIns="43200" tIns="18000" bIns="18000" anchor="ctr">
             <a:spAutoFit/>
           </a:bodyPr>
           <a:lstStyle/>
           <a:p>
             <a:pPr algn="l">
               <a:lnSpc>
-                <a:spcPct val="130000"/>
-              </a:lnSpc>
-            </a:pPr>
-            <a:r>
-              <a:rPr sz="3200" b="1">
+                <a:spcPct val="125000"/>
+              </a:lnSpc>
+            </a:pPr>
+            <a:r>
+              <a:rPr sz="2800" b="1">
                 <a:solidFill>
                   <a:srgbClr val="FFFFFF"/>
                 </a:solidFill>
                 <a:latin typeface="メイリオ"/>
                 <a:rFonts eastAsia="メイリオ" ascii="メイリオ" hAnsi="メイリオ"/>
               </a:rPr>
-              <a:t>本 日 の 授 業 を 振 り 返 る 4 つ の 視 点</a:t>
+              <a:t>本日の授業を 振り返る 4つの視点</a:t>
             </a:r>
           </a:p>
         </p:txBody>
@@ -12869,8 +12648,8 @@
         </p:nvSpPr>
         <p:spPr>
           <a:xfrm>
-            <a:off x="10872000" y="198000"/>
-            <a:ext cx="1116000" cy="612000"/>
+            <a:off x="10800000" y="198000"/>
+            <a:ext cx="1080000" cy="540000"/>
           </a:xfrm>
           <a:prstGeom prst="rect">
             <a:avLst/>
@@ -12878,18 +12657,18 @@
           <a:noFill/>
         </p:spPr>
         <p:txBody>
-          <a:bodyPr wrap="square" lIns="54000" rIns="54000" tIns="18000" bIns="18000" anchor="ctr">
+          <a:bodyPr wrap="square" lIns="43200" rIns="43200" tIns="18000" bIns="18000" anchor="ctr">
             <a:spAutoFit/>
           </a:bodyPr>
           <a:lstStyle/>
           <a:p>
             <a:pPr algn="r">
               <a:lnSpc>
-                <a:spcPct val="130000"/>
-              </a:lnSpc>
-            </a:pPr>
-            <a:r>
-              <a:rPr sz="1800" b="0">
+                <a:spcPct val="125000"/>
+              </a:lnSpc>
+            </a:pPr>
+            <a:r>
+              <a:rPr sz="1600" b="0">
                 <a:solidFill>
                   <a:srgbClr val="FFFFFF"/>
                 </a:solidFill>
@@ -12909,8 +12688,8 @@
         </p:nvSpPr>
         <p:spPr>
           <a:xfrm>
-            <a:off x="306000" y="1260000"/>
-            <a:ext cx="11574000" cy="1188000"/>
+            <a:off x="306000" y="1152000"/>
+            <a:ext cx="11574000" cy="1224000"/>
           </a:xfrm>
           <a:prstGeom prst="roundRect">
             <a:avLst>
@@ -12957,7 +12736,7 @@
         </p:nvSpPr>
         <p:spPr>
           <a:xfrm>
-            <a:off x="486000" y="1458000"/>
+            <a:off x="486000" y="1350000"/>
             <a:ext cx="792000" cy="792000"/>
           </a:xfrm>
           <a:prstGeom prst="roundRect">
@@ -13003,7 +12782,7 @@
         </p:nvSpPr>
         <p:spPr>
           <a:xfrm>
-            <a:off x="486000" y="1458000"/>
+            <a:off x="486000" y="1350000"/>
             <a:ext cx="792000" cy="792000"/>
           </a:xfrm>
           <a:prstGeom prst="rect">
@@ -13012,14 +12791,14 @@
           <a:noFill/>
         </p:spPr>
         <p:txBody>
-          <a:bodyPr wrap="square" lIns="54000" rIns="54000" tIns="18000" bIns="18000" anchor="ctr">
+          <a:bodyPr wrap="square" lIns="43200" rIns="43200" tIns="18000" bIns="18000" anchor="ctr">
             <a:spAutoFit/>
           </a:bodyPr>
           <a:lstStyle/>
           <a:p>
             <a:pPr algn="ctr">
               <a:lnSpc>
-                <a:spcPct val="130000"/>
+                <a:spcPct val="125000"/>
               </a:lnSpc>
             </a:pPr>
             <a:r>
@@ -13043,8 +12822,8 @@
         </p:nvSpPr>
         <p:spPr>
           <a:xfrm>
-            <a:off x="1458000" y="1385999"/>
-            <a:ext cx="4500000" cy="396000"/>
+            <a:off x="1458000" y="1296000"/>
+            <a:ext cx="10260000" cy="396000"/>
           </a:xfrm>
           <a:prstGeom prst="rect">
             <a:avLst/>
@@ -13052,18 +12831,18 @@
           <a:noFill/>
         </p:spPr>
         <p:txBody>
-          <a:bodyPr wrap="square" lIns="54000" rIns="54000" tIns="18000" bIns="18000" anchor="ctr">
+          <a:bodyPr wrap="square" lIns="43200" rIns="43200" tIns="18000" bIns="18000" anchor="ctr">
             <a:spAutoFit/>
           </a:bodyPr>
           <a:lstStyle/>
           <a:p>
             <a:pPr algn="l">
               <a:lnSpc>
-                <a:spcPct val="130000"/>
-              </a:lnSpc>
-            </a:pPr>
-            <a:r>
-              <a:rPr sz="2400" b="1">
+                <a:spcPct val="125000"/>
+              </a:lnSpc>
+            </a:pPr>
+            <a:r>
+              <a:rPr sz="2200" b="1">
                 <a:solidFill>
                   <a:srgbClr val="2E6FB8"/>
                 </a:solidFill>
@@ -13083,8 +12862,8 @@
         </p:nvSpPr>
         <p:spPr>
           <a:xfrm>
-            <a:off x="1458000" y="1836000"/>
-            <a:ext cx="10260000" cy="540000"/>
+            <a:off x="1458000" y="1764000"/>
+            <a:ext cx="10260000" cy="503999"/>
           </a:xfrm>
           <a:prstGeom prst="rect">
             <a:avLst/>
@@ -13092,25 +12871,25 @@
           <a:noFill/>
         </p:spPr>
         <p:txBody>
-          <a:bodyPr wrap="square" lIns="54000" rIns="54000" tIns="18000" bIns="18000" anchor="ctr">
+          <a:bodyPr wrap="square" lIns="43200" rIns="43200" tIns="18000" bIns="18000" anchor="ctr">
             <a:spAutoFit/>
           </a:bodyPr>
           <a:lstStyle/>
           <a:p>
             <a:pPr algn="l">
               <a:lnSpc>
-                <a:spcPct val="130000"/>
-              </a:lnSpc>
-            </a:pPr>
-            <a:r>
-              <a:rPr sz="2000" b="0">
+                <a:spcPct val="125000"/>
+              </a:lnSpc>
+            </a:pPr>
+            <a:r>
+              <a:rPr sz="1800" b="0">
                 <a:solidFill>
                   <a:srgbClr val="2B2B2B"/>
                 </a:solidFill>
                 <a:latin typeface="メイリオ"/>
                 <a:rFonts eastAsia="メイリオ" ascii="メイリオ" hAnsi="メイリオ"/>
               </a:rPr>
-              <a:t>どんな 動き ・ 楽しみ方 が 育まれたか</a:t>
+              <a:t>どんな動き・楽しみ方が 育まれたか</a:t>
             </a:r>
           </a:p>
         </p:txBody>
@@ -13123,8 +12902,8 @@
         </p:nvSpPr>
         <p:spPr>
           <a:xfrm>
-            <a:off x="306000" y="2512800"/>
-            <a:ext cx="11574000" cy="1188000"/>
+            <a:off x="306000" y="2448000"/>
+            <a:ext cx="11574000" cy="1224000"/>
           </a:xfrm>
           <a:prstGeom prst="roundRect">
             <a:avLst>
@@ -13171,7 +12950,7 @@
         </p:nvSpPr>
         <p:spPr>
           <a:xfrm>
-            <a:off x="486000" y="2710800"/>
+            <a:off x="486000" y="2646000"/>
             <a:ext cx="792000" cy="792000"/>
           </a:xfrm>
           <a:prstGeom prst="roundRect">
@@ -13217,7 +12996,7 @@
         </p:nvSpPr>
         <p:spPr>
           <a:xfrm>
-            <a:off x="486000" y="2710800"/>
+            <a:off x="486000" y="2646000"/>
             <a:ext cx="792000" cy="792000"/>
           </a:xfrm>
           <a:prstGeom prst="rect">
@@ -13226,14 +13005,14 @@
           <a:noFill/>
         </p:spPr>
         <p:txBody>
-          <a:bodyPr wrap="square" lIns="54000" rIns="54000" tIns="18000" bIns="18000" anchor="ctr">
+          <a:bodyPr wrap="square" lIns="43200" rIns="43200" tIns="18000" bIns="18000" anchor="ctr">
             <a:spAutoFit/>
           </a:bodyPr>
           <a:lstStyle/>
           <a:p>
             <a:pPr algn="ctr">
               <a:lnSpc>
-                <a:spcPct val="130000"/>
+                <a:spcPct val="125000"/>
               </a:lnSpc>
             </a:pPr>
             <a:r>
@@ -13257,8 +13036,8 @@
         </p:nvSpPr>
         <p:spPr>
           <a:xfrm>
-            <a:off x="1458000" y="2638799"/>
-            <a:ext cx="4500000" cy="396000"/>
+            <a:off x="1458000" y="2592000"/>
+            <a:ext cx="10260000" cy="396000"/>
           </a:xfrm>
           <a:prstGeom prst="rect">
             <a:avLst/>
@@ -13266,25 +13045,25 @@
           <a:noFill/>
         </p:spPr>
         <p:txBody>
-          <a:bodyPr wrap="square" lIns="54000" rIns="54000" tIns="18000" bIns="18000" anchor="ctr">
+          <a:bodyPr wrap="square" lIns="43200" rIns="43200" tIns="18000" bIns="18000" anchor="ctr">
             <a:spAutoFit/>
           </a:bodyPr>
           <a:lstStyle/>
           <a:p>
             <a:pPr algn="l">
               <a:lnSpc>
-                <a:spcPct val="130000"/>
-              </a:lnSpc>
-            </a:pPr>
-            <a:r>
-              <a:rPr sz="2400" b="1">
+                <a:spcPct val="125000"/>
+              </a:lnSpc>
+            </a:pPr>
+            <a:r>
+              <a:rPr sz="2200" b="1">
                 <a:solidFill>
                   <a:srgbClr val="2E8B57"/>
                 </a:solidFill>
                 <a:latin typeface="メイリオ"/>
                 <a:rFonts eastAsia="メイリオ" ascii="メイリオ" hAnsi="メイリオ"/>
               </a:rPr>
-              <a:t>多様性 の 包摂</a:t>
+              <a:t>多様性の 包摂</a:t>
             </a:r>
           </a:p>
         </p:txBody>
@@ -13297,8 +13076,8 @@
         </p:nvSpPr>
         <p:spPr>
           <a:xfrm>
-            <a:off x="1458000" y="3088800"/>
-            <a:ext cx="10260000" cy="540000"/>
+            <a:off x="1458000" y="3060000"/>
+            <a:ext cx="10260000" cy="503999"/>
           </a:xfrm>
           <a:prstGeom prst="rect">
             <a:avLst/>
@@ -13306,25 +13085,25 @@
           <a:noFill/>
         </p:spPr>
         <p:txBody>
-          <a:bodyPr wrap="square" lIns="54000" rIns="54000" tIns="18000" bIns="18000" anchor="ctr">
+          <a:bodyPr wrap="square" lIns="43200" rIns="43200" tIns="18000" bIns="18000" anchor="ctr">
             <a:spAutoFit/>
           </a:bodyPr>
           <a:lstStyle/>
           <a:p>
             <a:pPr algn="l">
               <a:lnSpc>
-                <a:spcPct val="130000"/>
-              </a:lnSpc>
-            </a:pPr>
-            <a:r>
-              <a:rPr sz="2000" b="0">
+                <a:spcPct val="125000"/>
+              </a:lnSpc>
+            </a:pPr>
+            <a:r>
+              <a:rPr sz="1800" b="0">
                 <a:solidFill>
                   <a:srgbClr val="2B2B2B"/>
                 </a:solidFill>
                 <a:latin typeface="メイリオ"/>
                 <a:rFonts eastAsia="メイリオ" ascii="メイリオ" hAnsi="メイリオ"/>
               </a:rPr>
-              <a:t>全員が 参加 し 自分の 変化 を 実感できたか</a:t>
+              <a:t>全員が参加し 自分の変化を 実感できたか</a:t>
             </a:r>
           </a:p>
         </p:txBody>
@@ -13337,8 +13116,8 @@
         </p:nvSpPr>
         <p:spPr>
           <a:xfrm>
-            <a:off x="306000" y="3765600"/>
-            <a:ext cx="11574000" cy="1188000"/>
+            <a:off x="306000" y="3744000"/>
+            <a:ext cx="11574000" cy="1224000"/>
           </a:xfrm>
           <a:prstGeom prst="roundRect">
             <a:avLst>
@@ -13385,7 +13164,7 @@
         </p:nvSpPr>
         <p:spPr>
           <a:xfrm>
-            <a:off x="486000" y="3963600"/>
+            <a:off x="486000" y="3942000"/>
             <a:ext cx="792000" cy="792000"/>
           </a:xfrm>
           <a:prstGeom prst="roundRect">
@@ -13431,7 +13210,7 @@
         </p:nvSpPr>
         <p:spPr>
           <a:xfrm>
-            <a:off x="486000" y="3963600"/>
+            <a:off x="486000" y="3942000"/>
             <a:ext cx="792000" cy="792000"/>
           </a:xfrm>
           <a:prstGeom prst="rect">
@@ -13440,14 +13219,14 @@
           <a:noFill/>
         </p:spPr>
         <p:txBody>
-          <a:bodyPr wrap="square" lIns="54000" rIns="54000" tIns="18000" bIns="18000" anchor="ctr">
+          <a:bodyPr wrap="square" lIns="43200" rIns="43200" tIns="18000" bIns="18000" anchor="ctr">
             <a:spAutoFit/>
           </a:bodyPr>
           <a:lstStyle/>
           <a:p>
             <a:pPr algn="ctr">
               <a:lnSpc>
-                <a:spcPct val="130000"/>
+                <a:spcPct val="125000"/>
               </a:lnSpc>
             </a:pPr>
             <a:r>
@@ -13471,8 +13250,8 @@
         </p:nvSpPr>
         <p:spPr>
           <a:xfrm>
-            <a:off x="1458000" y="3891599"/>
-            <a:ext cx="4500000" cy="396000"/>
+            <a:off x="1458000" y="3888000"/>
+            <a:ext cx="10260000" cy="396000"/>
           </a:xfrm>
           <a:prstGeom prst="rect">
             <a:avLst/>
@@ -13480,25 +13259,25 @@
           <a:noFill/>
         </p:spPr>
         <p:txBody>
-          <a:bodyPr wrap="square" lIns="54000" rIns="54000" tIns="18000" bIns="18000" anchor="ctr">
+          <a:bodyPr wrap="square" lIns="43200" rIns="43200" tIns="18000" bIns="18000" anchor="ctr">
             <a:spAutoFit/>
           </a:bodyPr>
           <a:lstStyle/>
           <a:p>
             <a:pPr algn="l">
               <a:lnSpc>
-                <a:spcPct val="130000"/>
-              </a:lnSpc>
-            </a:pPr>
-            <a:r>
-              <a:rPr sz="2400" b="1">
+                <a:spcPct val="125000"/>
+              </a:lnSpc>
+            </a:pPr>
+            <a:r>
+              <a:rPr sz="2200" b="1">
                 <a:solidFill>
                   <a:srgbClr val="E87A1E"/>
                 </a:solidFill>
                 <a:latin typeface="メイリオ"/>
                 <a:rFonts eastAsia="メイリオ" ascii="メイリオ" hAnsi="メイリオ"/>
               </a:rPr>
-              <a:t>I C T の 活用</a:t>
+              <a:t>ICTの 活用</a:t>
             </a:r>
           </a:p>
         </p:txBody>
@@ -13511,8 +13290,8 @@
         </p:nvSpPr>
         <p:spPr>
           <a:xfrm>
-            <a:off x="1458000" y="4341600"/>
-            <a:ext cx="10260000" cy="540000"/>
+            <a:off x="1458000" y="4356000"/>
+            <a:ext cx="10260000" cy="503999"/>
           </a:xfrm>
           <a:prstGeom prst="rect">
             <a:avLst/>
@@ -13520,25 +13299,25 @@
           <a:noFill/>
         </p:spPr>
         <p:txBody>
-          <a:bodyPr wrap="square" lIns="54000" rIns="54000" tIns="18000" bIns="18000" anchor="ctr">
+          <a:bodyPr wrap="square" lIns="43200" rIns="43200" tIns="18000" bIns="18000" anchor="ctr">
             <a:spAutoFit/>
           </a:bodyPr>
           <a:lstStyle/>
           <a:p>
             <a:pPr algn="l">
               <a:lnSpc>
-                <a:spcPct val="130000"/>
-              </a:lnSpc>
-            </a:pPr>
-            <a:r>
-              <a:rPr sz="2000" b="0">
+                <a:spcPct val="125000"/>
+              </a:lnSpc>
+            </a:pPr>
+            <a:r>
+              <a:rPr sz="1800" b="0">
                 <a:solidFill>
                   <a:srgbClr val="2B2B2B"/>
                 </a:solidFill>
                 <a:latin typeface="メイリオ"/>
                 <a:rFonts eastAsia="メイリオ" ascii="メイリオ" hAnsi="メイリオ"/>
               </a:rPr>
-              <a:t>I C T は 何のため か ／ 身体活動時間 を 確保できたか</a:t>
+              <a:t>ICTは「何のため」か／身体活動時間 は確保できたか</a:t>
             </a:r>
           </a:p>
         </p:txBody>
@@ -13551,8 +13330,8 @@
         </p:nvSpPr>
         <p:spPr>
           <a:xfrm>
-            <a:off x="306000" y="5018400"/>
-            <a:ext cx="11574000" cy="1188000"/>
+            <a:off x="306000" y="5040000"/>
+            <a:ext cx="11574000" cy="1224000"/>
           </a:xfrm>
           <a:prstGeom prst="roundRect">
             <a:avLst>
@@ -13599,7 +13378,7 @@
         </p:nvSpPr>
         <p:spPr>
           <a:xfrm>
-            <a:off x="486000" y="5216400"/>
+            <a:off x="486000" y="5238000"/>
             <a:ext cx="792000" cy="792000"/>
           </a:xfrm>
           <a:prstGeom prst="roundRect">
@@ -13645,7 +13424,7 @@
         </p:nvSpPr>
         <p:spPr>
           <a:xfrm>
-            <a:off x="486000" y="5216400"/>
+            <a:off x="486000" y="5238000"/>
             <a:ext cx="792000" cy="792000"/>
           </a:xfrm>
           <a:prstGeom prst="rect">
@@ -13654,14 +13433,14 @@
           <a:noFill/>
         </p:spPr>
         <p:txBody>
-          <a:bodyPr wrap="square" lIns="54000" rIns="54000" tIns="18000" bIns="18000" anchor="ctr">
+          <a:bodyPr wrap="square" lIns="43200" rIns="43200" tIns="18000" bIns="18000" anchor="ctr">
             <a:spAutoFit/>
           </a:bodyPr>
           <a:lstStyle/>
           <a:p>
             <a:pPr algn="ctr">
               <a:lnSpc>
-                <a:spcPct val="130000"/>
+                <a:spcPct val="125000"/>
               </a:lnSpc>
             </a:pPr>
             <a:r>
@@ -13685,8 +13464,8 @@
         </p:nvSpPr>
         <p:spPr>
           <a:xfrm>
-            <a:off x="1458000" y="5144399"/>
-            <a:ext cx="4500000" cy="396000"/>
+            <a:off x="1458000" y="5184000"/>
+            <a:ext cx="10260000" cy="396000"/>
           </a:xfrm>
           <a:prstGeom prst="rect">
             <a:avLst/>
@@ -13694,25 +13473,25 @@
           <a:noFill/>
         </p:spPr>
         <p:txBody>
-          <a:bodyPr wrap="square" lIns="54000" rIns="54000" tIns="18000" bIns="18000" anchor="ctr">
+          <a:bodyPr wrap="square" lIns="43200" rIns="43200" tIns="18000" bIns="18000" anchor="ctr">
             <a:spAutoFit/>
           </a:bodyPr>
           <a:lstStyle/>
           <a:p>
             <a:pPr algn="l">
               <a:lnSpc>
-                <a:spcPct val="130000"/>
-              </a:lnSpc>
-            </a:pPr>
-            <a:r>
-              <a:rPr sz="2400" b="1">
+                <a:spcPct val="125000"/>
+              </a:lnSpc>
+            </a:pPr>
+            <a:r>
+              <a:rPr sz="2200" b="1">
                 <a:solidFill>
                   <a:srgbClr val="C0392B"/>
                 </a:solidFill>
                 <a:latin typeface="メイリオ"/>
                 <a:rFonts eastAsia="メイリオ" ascii="メイリオ" hAnsi="メイリオ"/>
               </a:rPr>
-              <a:t>余白 と 創意工夫</a:t>
+              <a:t>余白と 創意工夫</a:t>
             </a:r>
           </a:p>
         </p:txBody>
@@ -13725,8 +13504,8 @@
         </p:nvSpPr>
         <p:spPr>
           <a:xfrm>
-            <a:off x="1458000" y="5594400"/>
-            <a:ext cx="10260000" cy="540000"/>
+            <a:off x="1458000" y="5652000"/>
+            <a:ext cx="10260000" cy="503999"/>
           </a:xfrm>
           <a:prstGeom prst="rect">
             <a:avLst/>
@@ -13734,25 +13513,25 @@
           <a:noFill/>
         </p:spPr>
         <p:txBody>
-          <a:bodyPr wrap="square" lIns="54000" rIns="54000" tIns="18000" bIns="18000" anchor="ctr">
+          <a:bodyPr wrap="square" lIns="43200" rIns="43200" tIns="18000" bIns="18000" anchor="ctr">
             <a:spAutoFit/>
           </a:bodyPr>
           <a:lstStyle/>
           <a:p>
             <a:pPr algn="l">
               <a:lnSpc>
-                <a:spcPct val="130000"/>
-              </a:lnSpc>
-            </a:pPr>
-            <a:r>
-              <a:rPr sz="2000" b="0">
+                <a:spcPct val="125000"/>
+              </a:lnSpc>
+            </a:pPr>
+            <a:r>
+              <a:rPr sz="1800" b="0">
                 <a:solidFill>
                   <a:srgbClr val="2B2B2B"/>
                 </a:solidFill>
                 <a:latin typeface="メイリオ"/>
                 <a:rFonts eastAsia="メイリオ" ascii="メイリオ" hAnsi="メイリオ"/>
               </a:rPr>
-              <a:t>教師の 意図 と 子供の 試行錯誤 が 両立 したか</a:t>
+              <a:t>教師の意図 と 子供の試行錯誤 が両立したか</a:t>
             </a:r>
           </a:p>
         </p:txBody>
@@ -13765,8 +13544,8 @@
         </p:nvSpPr>
         <p:spPr>
           <a:xfrm>
-            <a:off x="0" y="6588000"/>
-            <a:ext cx="12192119" cy="270000"/>
+            <a:off x="0" y="6606001"/>
+            <a:ext cx="12192119" cy="251999"/>
           </a:xfrm>
           <a:prstGeom prst="rect">
             <a:avLst/>
@@ -13809,8 +13588,8 @@
         </p:nvSpPr>
         <p:spPr>
           <a:xfrm>
-            <a:off x="288000" y="6588000"/>
-            <a:ext cx="7200000" cy="270000"/>
+            <a:off x="288000" y="6606001"/>
+            <a:ext cx="7200000" cy="251999"/>
           </a:xfrm>
           <a:prstGeom prst="rect">
             <a:avLst/>
@@ -13818,18 +13597,18 @@
           <a:noFill/>
         </p:spPr>
         <p:txBody>
-          <a:bodyPr wrap="square" lIns="54000" rIns="54000" tIns="18000" bIns="18000" anchor="ctr">
+          <a:bodyPr wrap="square" lIns="43200" rIns="43200" tIns="18000" bIns="18000" anchor="ctr">
             <a:spAutoFit/>
           </a:bodyPr>
           <a:lstStyle/>
           <a:p>
             <a:pPr algn="l">
               <a:lnSpc>
-                <a:spcPct val="130000"/>
-              </a:lnSpc>
-            </a:pPr>
-            <a:r>
-              <a:rPr sz="1200" b="0">
+                <a:spcPct val="125000"/>
+              </a:lnSpc>
+            </a:pPr>
+            <a:r>
+              <a:rPr sz="1100" b="0">
                 <a:solidFill>
                   <a:srgbClr val="FFFFFF"/>
                 </a:solidFill>
@@ -13849,8 +13628,8 @@
         </p:nvSpPr>
         <p:spPr>
           <a:xfrm>
-            <a:off x="4680000" y="6588000"/>
-            <a:ext cx="7200000" cy="270000"/>
+            <a:off x="4680000" y="6606001"/>
+            <a:ext cx="7200000" cy="251999"/>
           </a:xfrm>
           <a:prstGeom prst="rect">
             <a:avLst/>
@@ -13858,18 +13637,18 @@
           <a:noFill/>
         </p:spPr>
         <p:txBody>
-          <a:bodyPr wrap="square" lIns="54000" rIns="54000" tIns="18000" bIns="18000" anchor="ctr">
+          <a:bodyPr wrap="square" lIns="43200" rIns="43200" tIns="18000" bIns="18000" anchor="ctr">
             <a:spAutoFit/>
           </a:bodyPr>
           <a:lstStyle/>
           <a:p>
             <a:pPr algn="r">
               <a:lnSpc>
-                <a:spcPct val="130000"/>
-              </a:lnSpc>
-            </a:pPr>
-            <a:r>
-              <a:rPr sz="1100" b="0">
+                <a:spcPct val="125000"/>
+              </a:lnSpc>
+            </a:pPr>
+            <a:r>
+              <a:rPr sz="1000" b="0">
                 <a:solidFill>
                   <a:srgbClr val="FFFFFF"/>
                 </a:solidFill>
